--- a/docs/presentations/X-Market-Sui-Overview.en.pptx
+++ b/docs/presentations/X-Market-Sui-Overview.en.pptx
@@ -6,6 +6,7 @@
   </p:sldMasterIdLst>
   <p:sldIdLst>
     <p:sldId id="256" r:id="rId2"/>
+    <p:sldId id="272" r:id="rId23"/>
     <p:sldId id="257" r:id="rId3"/>
     <p:sldId id="258" r:id="rId4"/>
     <p:sldId id="259" r:id="rId5"/>
@@ -20,6 +21,7 @@
     <p:sldId id="268" r:id="rId14"/>
     <p:sldId id="269" r:id="rId15"/>
     <p:sldId id="270" r:id="rId16"/>
+    <p:sldId id="273" r:id="rId24"/>
     <p:sldId id="271" r:id="rId17"/>
   </p:sldIdLst>
   <p:notesMasterIdLst>
@@ -1173,6 +1175,321 @@
     <a:masterClrMapping/>
   </p:clrMapOvr>
 </p:notes>
+</file>
+
+<file path=ppt/notesSlides/notesSlide18.xml><?xml version="1.0" encoding="utf-8"?>
+<p:notes xmlns:a="http://schemas.openxmlformats.org/drawingml/2006/main" xmlns:r="http://schemas.openxmlformats.org/officeDocument/2006/relationships" xmlns:p="http://schemas.openxmlformats.org/presentationml/2006/main">
+  
+  
+  <p:cSld>
+    
+    
+    <p:spTree>
+      
+      
+      <p:nvGrpSpPr>
+        
+        
+        <p:cNvPr id="1" name=""/>
+        
+        
+        <p:cNvGrpSpPr/>
+        
+        
+        <p:nvPr/>
+        
+      
+      </p:nvGrpSpPr>
+      
+      
+      <p:grpSpPr>
+        
+        
+        <a:xfrm>
+          
+          
+          <a:off x="0" y="0"/>
+          
+          
+          <a:ext cx="0" cy="0"/>
+          
+          
+          <a:chOff x="0" y="0"/>
+          
+          
+          <a:chExt cx="0" cy="0"/>
+          
+        
+        </a:xfrm>
+        
+      
+      </p:grpSpPr>
+      
+      
+      <p:sp>
+        
+        
+        <p:nvSpPr>
+          
+          
+          <p:cNvPr id="2" name="Slide Image Placeholder 1"/>
+          
+          
+          <p:cNvSpPr>
+            
+            
+            <a:spLocks noGrp="1" noRot="1" noChangeAspect="1"/>
+            
+          
+          </p:cNvSpPr>
+          
+          
+          <p:nvPr>
+            
+            
+            <p:ph type="sldImg"/>
+            
+          
+          </p:nvPr>
+          
+        
+        </p:nvSpPr>
+        
+        
+        <p:spPr/>
+        
+      
+      </p:sp>
+      
+      
+      <p:sp>
+        
+        
+        <p:nvSpPr>
+          
+          
+          <p:cNvPr id="3" name="Notes Placeholder 2"/>
+          
+          
+          <p:cNvSpPr>
+            
+            
+            <a:spLocks noGrp="1"/>
+            
+          
+          </p:cNvSpPr>
+          
+          
+          <p:nvPr>
+            
+            
+            <p:ph type="body" idx="1"/>
+            
+          
+          </p:nvPr>
+          
+        
+        </p:nvSpPr>
+        
+        
+        <p:spPr/>
+        
+        
+        <p:txBody>
+          
+          
+          <a:bodyPr/>
+          
+          
+          <a:lstStyle/>
+          
+          
+          <a:p>
+            <a:r>
+              <a:rPr lang="en-US" dirty="0"/>
+              <a:t>Video narration (~75 sec)</a:t>
+            </a:r>
+            <a:endParaRPr lang="en-US" dirty="0"/>
+          </a:p>
+          <a:p>
+            <a:r>
+              <a:rPr lang="en-US" dirty="0"/>
+              <a:t></a:t>
+            </a:r>
+            <a:endParaRPr lang="en-US" dirty="0"/>
+          </a:p>
+          <a:p>
+            <a:r>
+              <a:rPr lang="en-US" dirty="0"/>
+              <a:t>Having walked through the full stack, we close with Conclusion & Future.</a:t>
+            </a:r>
+            <a:endParaRPr lang="en-US" dirty="0"/>
+          </a:p>
+          <a:p>
+            <a:r>
+              <a:rPr lang="en-US" dirty="0"/>
+              <a:t></a:t>
+            </a:r>
+            <a:endParaRPr lang="en-US" dirty="0"/>
+          </a:p>
+          <a:p>
+            <a:r>
+              <a:rPr lang="en-US" dirty="0"/>
+              <a:t>On conclusion: X-Market is not "another prediction market." It upgrades prediction from Yes/No gambling to PDF probability derivatives. Trading and SuiProphet share one EventRoot and one Oracle — bets, unlocks, and settlement point to a single truth for each event. On-chain PDF pricing plus Seal-mandated audit creates a sustainable ecosystem for traders, LPs, prophets, and the protocol. Testnet v2 is live end-to-end — this is validated product, not a concept.</a:t>
+            </a:r>
+            <a:endParaRPr lang="en-US" dirty="0"/>
+          </a:p>
+          <a:p>
+            <a:r>
+              <a:rPr lang="en-US" dirty="0"/>
+              <a:t></a:t>
+            </a:r>
+            <a:endParaRPr lang="en-US" dirty="0"/>
+          </a:p>
+          <a:p>
+            <a:r>
+              <a:rPr lang="en-US" dirty="0"/>
+              <a:t>On the near term: Phase 3 wraps Variance Swap and Slash governance, plus the ZK Attestation cold path from mock to live — Brevis Prover registers proof_hash with a 3600s challenge window, never blocking the buy_* hot path. On PDF: Beta distribution for vote share, dual-pool joint probability, and more vertical markets in parallel. External audit then Mainnet; Circle USDC mainnet settlement lands together. GeoBlock is frontend-only IP-based web access restriction for compliance — not KYC, and it does not block direct on-chain interaction.</a:t>
+            </a:r>
+            <a:endParaRPr lang="en-US" dirty="0"/>
+          </a:p>
+          <a:p>
+            <a:r>
+              <a:rPr lang="en-US" dirty="0"/>
+              <a:t></a:t>
+            </a:r>
+            <a:endParaRPr lang="en-US" dirty="0"/>
+          </a:p>
+          <a:p>
+            <a:r>
+              <a:rPr lang="en-US" dirty="0"/>
+              <a:t>Long term: become Sui's infrastructure layer for probability derivatives and on-chain paid knowledge — serving retail, LPs, professional prophets, and quant firms. Full EventRoot migration and open SDK / Quant API. Replace fragmented Yes/No with on-chain PDF; replace fake signal-selling with forced audit. That's the endgame.</a:t>
+            </a:r>
+            <a:endParaRPr lang="en-US" dirty="0"/>
+          </a:p>
+          <a:p>
+            <a:r>
+              <a:rPr lang="en-US" dirty="0"/>
+              <a:t></a:t>
+            </a:r>
+            <a:endParaRPr lang="en-US" dirty="0"/>
+          </a:p>
+          <a:p>
+            <a:r>
+              <a:rPr lang="en-US" dirty="0"/>
+              <a:t>Transition: advance to Thank You — open Q&A.</a:t>
+            </a:r>
+            <a:endParaRPr lang="en-US" dirty="0"/>
+          </a:p>
+          
+        
+        </p:txBody>
+        
+      
+      </p:sp>
+      
+      
+      <p:sp>
+        
+        
+        <p:nvSpPr>
+          
+          
+          <p:cNvPr id="4" name="Slide Number Placeholder 3"/>
+          
+          
+          <p:cNvSpPr>
+            
+            
+            <a:spLocks noGrp="1"/>
+            
+          
+          </p:cNvSpPr>
+          
+          
+          <p:nvPr>
+            
+            
+            <p:ph type="sldNum" sz="quarter" idx="10"/>
+            
+          
+          </p:nvPr>
+          
+        
+        </p:nvSpPr>
+        
+        
+        <p:spPr/>
+        
+        
+        <p:txBody>
+          
+          
+          <a:bodyPr/>
+          
+          
+          <a:lstStyle/>
+          
+          
+          <a:p>
+            
+            
+            <a:fld id="{F7021451-1387-4CA6-816F-3879F97B5CBC}" type="slidenum">
+              
+              
+              <a:rPr lang="en-US"/>
+              
+              
+              <a:t>17</a:t>
+              
+            
+            </a:fld>
+            
+            
+            <a:endParaRPr lang="en-US"/>
+            
+          
+          </a:p>
+          
+        
+        </p:txBody>
+        
+      
+      </p:sp>
+      
+    
+    </p:spTree>
+    
+    
+    <p:extLst>
+      
+      
+      <p:ext uri="{BB962C8B-B14F-4D97-AF65-F5344CB8AC3E}">
+        
+        
+        <p14:creationId xmlns:p14="http://schemas.microsoft.com/office/powerpoint/2010/main" val="1024086991"/>
+        
+      
+      </p:ext>
+      
+    
+    </p:extLst>
+    
+  
+  </p:cSld>
+  
+  
+  <p:clrMapOvr>
+    
+    
+    <a:masterClrMapping/>
+    
+  
+  </p:clrMapOvr>
+  
+
+</p:notes>
+
 </file>
 
 <file path=ppt/notesSlides/notesSlide2.xml><?xml version="1.0" encoding="utf-8"?>
@@ -9918,6 +10235,3720 @@
     <a:masterClrMapping/>
   </p:clrMapOvr>
 </p:sld>
+</file>
+
+<file path=ppt/slides/slide17.xml><?xml version="1.0" encoding="utf-8"?>
+<p:sld xmlns:a="http://schemas.openxmlformats.org/drawingml/2006/main" xmlns:r="http://schemas.openxmlformats.org/officeDocument/2006/relationships" xmlns:p="http://schemas.openxmlformats.org/presentationml/2006/main">
+  <p:cSld name="Slide 17">
+    <p:bg>
+      <p:bgPr>
+        <a:solidFill>
+          <a:srgbClr val="F0F7FA"/>
+        </a:solidFill>
+      </p:bgPr>
+    </p:bg>
+    <p:spTree>
+      <p:nvGrpSpPr>
+        <p:cNvPr id="1" name=""/>
+        <p:cNvGrpSpPr/>
+        <p:nvPr/>
+      </p:nvGrpSpPr>
+      <p:grpSpPr>
+        <a:xfrm>
+          <a:off x="0" y="0"/>
+          <a:ext cx="0" cy="0"/>
+          <a:chOff x="0" y="0"/>
+          <a:chExt cx="0" cy="0"/>
+        </a:xfrm>
+      </p:grpSpPr>
+      <p:sp>
+        <p:nvSpPr>
+          <p:cNvPr id="2" name="Shape 0"/>
+          <p:cNvSpPr/>
+          <p:nvPr/>
+        </p:nvSpPr>
+        <p:spPr>
+          <a:xfrm>
+            <a:off x="0" y="0"/>
+            <a:ext cx="9144000" cy="960120"/>
+          </a:xfrm>
+          <a:prstGeom prst="rect">
+            <a:avLst/>
+          </a:prstGeom>
+          <a:solidFill>
+            <a:srgbClr val="065A82"/>
+          </a:solidFill>
+          <a:ln/>
+        </p:spPr>
+      </p:sp>
+      <p:sp>
+        <p:nvSpPr>
+          <p:cNvPr id="3" name="Shape 1"/>
+          <p:cNvSpPr/>
+          <p:nvPr/>
+        </p:nvSpPr>
+        <p:spPr>
+          <a:xfrm>
+            <a:off x="0" y="960120"/>
+            <a:ext cx="9144000" cy="54864"/>
+          </a:xfrm>
+          <a:prstGeom prst="rect">
+            <a:avLst/>
+          </a:prstGeom>
+          <a:solidFill>
+            <a:srgbClr val="02C39A"/>
+          </a:solidFill>
+          <a:ln/>
+        </p:spPr>
+      </p:sp>
+      <p:sp>
+        <p:nvSpPr>
+          <p:cNvPr id="4" name="Text 2"/>
+          <p:cNvSpPr/>
+          <p:nvPr/>
+        </p:nvSpPr>
+        <p:spPr>
+          <a:xfrm>
+            <a:off x="457200" y="164592"/>
+            <a:ext cx="8229600" cy="502920"/>
+          </a:xfrm>
+          <a:prstGeom prst="rect">
+            <a:avLst/>
+          </a:prstGeom>
+          <a:noFill/>
+          <a:ln/>
+        </p:spPr>
+        <p:txBody>
+          <a:bodyPr wrap="square" lIns="0" tIns="0" rIns="0" bIns="0" rtlCol="0" anchor="ctr"/>
+          <a:lstStyle/>
+          <a:p>
+            <a:pPr indent="0" marL="0">
+              <a:buNone/>
+            </a:pPr>
+            <a:r>
+              <a:rPr lang="en-US" sz="2800" b="1" dirty="0">
+                <a:solidFill>
+                  <a:srgbClr val="FFFFFF"/>
+                </a:solidFill>
+                <a:latin typeface="Arial" pitchFamily="34" charset="0"/>
+                <a:ea typeface="Arial" pitchFamily="34" charset="-122"/>
+                <a:cs typeface="Arial" pitchFamily="34" charset="-120"/>
+              </a:rPr>
+              <a:t>Problem Overview</a:t>
+            </a:r>
+            <a:endParaRPr lang="en-US" sz="2800" dirty="0"/>
+          </a:p>
+        </p:txBody>
+      </p:sp>
+      <p:sp>
+        <p:nvSpPr>
+          <p:cNvPr id="5" name="Text 3"/>
+          <p:cNvSpPr/>
+          <p:nvPr/>
+        </p:nvSpPr>
+        <p:spPr>
+          <a:xfrm>
+            <a:off x="457200" y="621792"/>
+            <a:ext cx="8229600" cy="274320"/>
+          </a:xfrm>
+          <a:prstGeom prst="rect">
+            <a:avLst/>
+          </a:prstGeom>
+          <a:noFill/>
+          <a:ln/>
+        </p:spPr>
+        <p:txBody>
+          <a:bodyPr wrap="square" lIns="0" tIns="0" rIns="0" bIns="0" rtlCol="0" anchor="ctr"/>
+          <a:lstStyle/>
+          <a:p>
+            <a:pPr indent="0" marL="0">
+              <a:buNone/>
+            </a:pPr>
+            <a:r>
+              <a:rPr lang="en-US" sz="1200" dirty="0">
+                <a:solidFill>
+                  <a:srgbClr val="CADCFC"/>
+                </a:solidFill>
+                <a:latin typeface="Arial" pitchFamily="34" charset="0"/>
+                <a:ea typeface="Arial" pitchFamily="34" charset="-122"/>
+                <a:cs typeface="Arial" pitchFamily="34" charset="-120"/>
+              </a:rPr>
+              <a:t>Three gaps blocking prediction markets from real financial infrastructure · ~30–60 sec</a:t>
+            </a:r>
+            <a:endParaRPr lang="en-US" sz="1200" dirty="0"/>
+          </a:p>
+        </p:txBody>
+      </p:sp>
+      <p:sp>
+        <p:nvSpPr>
+          <p:cNvPr id="6" name="Shape 4"/>
+          <p:cNvSpPr/>
+          <p:nvPr/>
+        </p:nvSpPr>
+        <p:spPr>
+          <a:xfrm>
+            <a:off x="365760" y="1234440"/>
+            <a:ext cx="73152" cy="914400"/>
+          </a:xfrm>
+          <a:prstGeom prst="rect">
+            <a:avLst/>
+          </a:prstGeom>
+          <a:solidFill>
+            <a:srgbClr val="F96167"/>
+          </a:solidFill>
+          <a:ln/>
+        </p:spPr>
+      </p:sp>
+      <p:sp>
+        <p:nvSpPr>
+          <p:cNvPr id="7" name="Text 5"/>
+          <p:cNvSpPr/>
+          <p:nvPr/>
+        </p:nvSpPr>
+        <p:spPr>
+          <a:xfrm>
+            <a:off x="594360" y="1280160"/>
+            <a:ext cx="8046720" cy="320040"/>
+          </a:xfrm>
+          <a:prstGeom prst="rect">
+            <a:avLst/>
+          </a:prstGeom>
+          <a:noFill/>
+          <a:ln/>
+        </p:spPr>
+        <p:txBody>
+          <a:bodyPr wrap="square" lIns="0" tIns="0" rIns="0" bIns="0" rtlCol="0" anchor="ctr"/>
+          <a:lstStyle/>
+          <a:p>
+            <a:pPr indent="0" marL="0">
+              <a:buNone/>
+            </a:pPr>
+            <a:r>
+              <a:rPr lang="en-US" sz="1400" b="1" dirty="0">
+                <a:solidFill>
+                  <a:srgbClr val="065A82"/>
+                </a:solidFill>
+                <a:latin typeface="Arial" pitchFamily="34" charset="0"/>
+                <a:ea typeface="Arial" pitchFamily="34" charset="-122"/>
+                <a:cs typeface="Arial" pitchFamily="34" charset="-120"/>
+              </a:rPr>
+              <a:t>Binary fragmentation — can't express continuous probability</a:t>
+            </a:r>
+            <a:endParaRPr lang="en-US" sz="1400" dirty="0"/>
+          </a:p>
+        </p:txBody>
+      </p:sp>
+      <p:sp>
+        <p:nvSpPr>
+          <p:cNvPr id="8" name="Text 6"/>
+          <p:cNvSpPr/>
+          <p:nvPr/>
+        </p:nvSpPr>
+        <p:spPr>
+          <a:xfrm>
+            <a:off x="594360" y="1618488"/>
+            <a:ext cx="8046720" cy="502920"/>
+          </a:xfrm>
+          <a:prstGeom prst="rect">
+            <a:avLst/>
+          </a:prstGeom>
+          <a:noFill/>
+          <a:ln/>
+        </p:spPr>
+        <p:txBody>
+          <a:bodyPr wrap="square" lIns="0" tIns="0" rIns="0" bIns="0" rtlCol="0" anchor="ctr"/>
+          <a:lstStyle/>
+          <a:p>
+            <a:pPr indent="0" marL="0">
+              <a:buNone/>
+            </a:pPr>
+            <a:r>
+              <a:rPr lang="en-US" sz="1100" dirty="0">
+                <a:solidFill>
+                  <a:srgbClr val="1E293B"/>
+                </a:solidFill>
+                <a:latin typeface="Arial" pitchFamily="34" charset="0"/>
+                <a:ea typeface="Arial" pitchFamily="34" charset="-122"/>
+                <a:cs typeface="Arial" pitchFamily="34" charset="-120"/>
+              </a:rPr>
+              <a:t>Yes/No tokens can't price CPI ranges, vote shares, or goal counts — institutions can't hedge interval risk</a:t>
+            </a:r>
+            <a:endParaRPr lang="en-US" sz="1100" dirty="0"/>
+          </a:p>
+        </p:txBody>
+      </p:sp>
+      <p:sp>
+        <p:nvSpPr>
+          <p:cNvPr id="9" name="Shape 7"/>
+          <p:cNvSpPr/>
+          <p:nvPr/>
+        </p:nvSpPr>
+        <p:spPr>
+          <a:xfrm>
+            <a:off x="365760" y="2377440"/>
+            <a:ext cx="73152" cy="914400"/>
+          </a:xfrm>
+          <a:prstGeom prst="rect">
+            <a:avLst/>
+          </a:prstGeom>
+          <a:solidFill>
+            <a:srgbClr val="F96167"/>
+          </a:solidFill>
+          <a:ln/>
+        </p:spPr>
+      </p:sp>
+      <p:sp>
+        <p:nvSpPr>
+          <p:cNvPr id="10" name="Text 8"/>
+          <p:cNvSpPr/>
+          <p:nvPr/>
+        </p:nvSpPr>
+        <p:spPr>
+          <a:xfrm>
+            <a:off x="594360" y="2423160"/>
+            <a:ext cx="8046720" cy="320040"/>
+          </a:xfrm>
+          <a:prstGeom prst="rect">
+            <a:avLst/>
+          </a:prstGeom>
+          <a:noFill/>
+          <a:ln/>
+        </p:spPr>
+        <p:txBody>
+          <a:bodyPr wrap="square" lIns="0" tIns="0" rIns="0" bIns="0" rtlCol="0" anchor="ctr"/>
+          <a:lstStyle/>
+          <a:p>
+            <a:pPr indent="0" marL="0">
+              <a:buNone/>
+            </a:pPr>
+            <a:r>
+              <a:rPr lang="en-US" sz="1400" b="1" dirty="0">
+                <a:solidFill>
+                  <a:srgbClr val="065A82"/>
+                </a:solidFill>
+                <a:latin typeface="Arial" pitchFamily="34" charset="0"/>
+                <a:ea typeface="Arial" pitchFamily="34" charset="-122"/>
+                <a:cs typeface="Arial" pitchFamily="34" charset="-120"/>
+              </a:rPr>
+              <a:t>Unaudited signal-selling — KOL track records are forgeable</a:t>
+            </a:r>
+            <a:endParaRPr lang="en-US" sz="1400" dirty="0"/>
+          </a:p>
+        </p:txBody>
+      </p:sp>
+      <p:sp>
+        <p:nvSpPr>
+          <p:cNvPr id="11" name="Text 9"/>
+          <p:cNvSpPr/>
+          <p:nvPr/>
+        </p:nvSpPr>
+        <p:spPr>
+          <a:xfrm>
+            <a:off x="594360" y="2761488"/>
+            <a:ext cx="8046720" cy="502920"/>
+          </a:xfrm>
+          <a:prstGeom prst="rect">
+            <a:avLst/>
+          </a:prstGeom>
+          <a:noFill/>
+          <a:ln/>
+        </p:spPr>
+        <p:txBody>
+          <a:bodyPr wrap="square" lIns="0" tIns="0" rIns="0" bIns="0" rtlCol="0" anchor="ctr"/>
+          <a:lstStyle/>
+          <a:p>
+            <a:pPr indent="0" marL="0">
+              <a:buNone/>
+            </a:pPr>
+            <a:r>
+              <a:rPr lang="en-US" sz="1100" dirty="0">
+                <a:solidFill>
+                  <a:srgbClr val="1E293B"/>
+                </a:solidFill>
+                <a:latin typeface="Arial" pitchFamily="34" charset="0"/>
+                <a:ea typeface="Arial" pitchFamily="34" charset="-122"/>
+                <a:cs typeface="Arial" pitchFamily="34" charset="-120"/>
+              </a:rPr>
+              <a:t>Paid KOL track records are forgeable — subscribers can't verify signals after the fact</a:t>
+            </a:r>
+            <a:endParaRPr lang="en-US" sz="1100" dirty="0"/>
+          </a:p>
+        </p:txBody>
+      </p:sp>
+      <p:sp>
+        <p:nvSpPr>
+          <p:cNvPr id="12" name="Shape 10"/>
+          <p:cNvSpPr/>
+          <p:nvPr/>
+        </p:nvSpPr>
+        <p:spPr>
+          <a:xfrm>
+            <a:off x="365760" y="3520440"/>
+            <a:ext cx="73152" cy="914400"/>
+          </a:xfrm>
+          <a:prstGeom prst="rect">
+            <a:avLst/>
+          </a:prstGeom>
+          <a:solidFill>
+            <a:srgbClr val="F96167"/>
+          </a:solidFill>
+          <a:ln/>
+        </p:spPr>
+      </p:sp>
+      <p:sp>
+        <p:nvSpPr>
+          <p:cNvPr id="13" name="Text 11"/>
+          <p:cNvSpPr/>
+          <p:nvPr/>
+        </p:nvSpPr>
+        <p:spPr>
+          <a:xfrm>
+            <a:off x="594360" y="3566160"/>
+            <a:ext cx="8046720" cy="320040"/>
+          </a:xfrm>
+          <a:prstGeom prst="rect">
+            <a:avLst/>
+          </a:prstGeom>
+          <a:noFill/>
+          <a:ln/>
+        </p:spPr>
+        <p:txBody>
+          <a:bodyPr wrap="square" lIns="0" tIns="0" rIns="0" bIns="0" rtlCol="0" anchor="ctr"/>
+          <a:lstStyle/>
+          <a:p>
+            <a:pPr indent="0" marL="0">
+              <a:buNone/>
+            </a:pPr>
+            <a:r>
+              <a:rPr lang="en-US" sz="1400" b="1" dirty="0">
+                <a:solidFill>
+                  <a:srgbClr val="065A82"/>
+                </a:solidFill>
+                <a:latin typeface="Arial" pitchFamily="34" charset="0"/>
+                <a:ea typeface="Arial" pitchFamily="34" charset="-122"/>
+                <a:cs typeface="Arial" pitchFamily="34" charset="-120"/>
+              </a:rPr>
+              <a:t>Split settlement — trading &amp; insights lack one truth source</a:t>
+            </a:r>
+            <a:endParaRPr lang="en-US" sz="1400" dirty="0"/>
+          </a:p>
+        </p:txBody>
+      </p:sp>
+      <p:sp>
+        <p:nvSpPr>
+          <p:cNvPr id="14" name="Text 12"/>
+          <p:cNvSpPr/>
+          <p:nvPr/>
+        </p:nvSpPr>
+        <p:spPr>
+          <a:xfrm>
+            <a:off x="594360" y="3904488"/>
+            <a:ext cx="8046720" cy="502920"/>
+          </a:xfrm>
+          <a:prstGeom prst="rect">
+            <a:avLst/>
+          </a:prstGeom>
+          <a:noFill/>
+          <a:ln/>
+        </p:spPr>
+        <p:txBody>
+          <a:bodyPr wrap="square" lIns="0" tIns="0" rIns="0" bIns="0" rtlCol="0" anchor="ctr"/>
+          <a:lstStyle/>
+          <a:p>
+            <a:pPr indent="0" marL="0">
+              <a:buNone/>
+            </a:pPr>
+            <a:r>
+              <a:rPr lang="en-US" sz="1100" dirty="0">
+                <a:solidFill>
+                  <a:srgbClr val="1E293B"/>
+                </a:solidFill>
+                <a:latin typeface="Arial" pitchFamily="34" charset="0"/>
+                <a:ea typeface="Arial" pitchFamily="34" charset="-122"/>
+                <a:cs typeface="Arial" pitchFamily="34" charset="-120"/>
+              </a:rPr>
+              <a:t>Betting outcomes and paid analysis use different Oracles — one event can't aggregate on a single root</a:t>
+            </a:r>
+            <a:endParaRPr lang="en-US" sz="1100" dirty="0"/>
+          </a:p>
+        </p:txBody>
+      </p:sp>
+      <p:sp>
+        <p:nvSpPr>
+          <p:cNvPr id="15" name="Shape 13"/>
+          <p:cNvSpPr/>
+          <p:nvPr/>
+        </p:nvSpPr>
+        <p:spPr>
+          <a:xfrm>
+            <a:off x="365760" y="4663440"/>
+            <a:ext cx="73152" cy="914400"/>
+          </a:xfrm>
+          <a:prstGeom prst="rect">
+            <a:avLst/>
+          </a:prstGeom>
+          <a:solidFill>
+            <a:srgbClr val="F96167">
+              <a:alpha val="0"/>
+            </a:srgbClr>
+          </a:solidFill>
+          <a:ln/>
+        </p:spPr>
+      </p:sp>
+      <p:sp>
+        <p:nvSpPr>
+          <p:cNvPr id="16" name="Text 14"/>
+          <p:cNvSpPr/>
+          <p:nvPr/>
+        </p:nvSpPr>
+        <p:spPr>
+          <a:xfrm>
+            <a:off x="594360" y="4709160"/>
+            <a:ext cx="8046720" cy="320040"/>
+          </a:xfrm>
+          <a:prstGeom prst="rect">
+            <a:avLst/>
+          </a:prstGeom>
+          <a:noFill/>
+          <a:ln/>
+        </p:spPr>
+        <p:txBody>
+          <a:bodyPr wrap="square" lIns="0" tIns="0" rIns="0" bIns="0" rtlCol="0" anchor="ctr"/>
+          <a:lstStyle/>
+          <a:p>
+            <a:pPr indent="0" marL="0">
+              <a:buNone/>
+            </a:pPr>
+            <a:r>
+              <a:rPr lang="en-US" sz="1400" b="1" dirty="0">
+                <a:solidFill>
+                  <a:srgbClr val="065A82"/>
+                </a:solidFill>
+                <a:latin typeface="Arial" pitchFamily="34" charset="0"/>
+                <a:ea typeface="Arial" pitchFamily="34" charset="-122"/>
+                <a:cs typeface="Arial" pitchFamily="34" charset="-120"/>
+              </a:rPr>
+              <a:t/>
+            </a:r>
+            <a:endParaRPr lang="en-US" sz="1400" dirty="0"/>
+          </a:p>
+        </p:txBody>
+      </p:sp>
+      <p:sp>
+        <p:nvSpPr>
+          <p:cNvPr id="17" name="Text 15"/>
+          <p:cNvSpPr/>
+          <p:nvPr/>
+        </p:nvSpPr>
+        <p:spPr>
+          <a:xfrm>
+            <a:off x="594360" y="5047488"/>
+            <a:ext cx="8046720" cy="502920"/>
+          </a:xfrm>
+          <a:prstGeom prst="rect">
+            <a:avLst/>
+          </a:prstGeom>
+          <a:noFill/>
+          <a:ln/>
+        </p:spPr>
+        <p:txBody>
+          <a:bodyPr wrap="square" lIns="0" tIns="0" rIns="0" bIns="0" rtlCol="0" anchor="ctr"/>
+          <a:lstStyle/>
+          <a:p>
+            <a:pPr indent="0" marL="0">
+              <a:buNone/>
+            </a:pPr>
+            <a:r>
+              <a:rPr lang="en-US" sz="1100" dirty="0">
+                <a:solidFill>
+                  <a:srgbClr val="1E293B"/>
+                </a:solidFill>
+                <a:latin typeface="Arial" pitchFamily="34" charset="0"/>
+                <a:ea typeface="Arial" pitchFamily="34" charset="-122"/>
+                <a:cs typeface="Arial" pitchFamily="34" charset="-120"/>
+              </a:rPr>
+              <a:t/>
+            </a:r>
+            <a:endParaRPr lang="en-US" sz="1100" dirty="0"/>
+          </a:p>
+        </p:txBody>
+      </p:sp>
+      <p:sp>
+        <p:nvSpPr>
+          <p:cNvPr id="18" name="Shape 16"/>
+          <p:cNvSpPr/>
+          <p:nvPr/>
+        </p:nvSpPr>
+        <p:spPr>
+          <a:xfrm>
+            <a:off x="365760" y="4434840"/>
+            <a:ext cx="8412480" cy="502920"/>
+          </a:xfrm>
+          <a:prstGeom prst="rect">
+            <a:avLst/>
+          </a:prstGeom>
+          <a:solidFill>
+            <a:srgbClr val="21295C"/>
+          </a:solidFill>
+          <a:ln/>
+        </p:spPr>
+      </p:sp>
+      <p:sp>
+        <p:nvSpPr>
+          <p:cNvPr id="19" name="Text 17"/>
+          <p:cNvSpPr/>
+          <p:nvPr/>
+        </p:nvSpPr>
+        <p:spPr>
+          <a:xfrm>
+            <a:off x="502920" y="4526280"/>
+            <a:ext cx="8138160" cy="365760"/>
+          </a:xfrm>
+          <a:prstGeom prst="rect">
+            <a:avLst/>
+          </a:prstGeom>
+          <a:noFill/>
+          <a:ln/>
+        </p:spPr>
+        <p:txBody>
+          <a:bodyPr wrap="square" lIns="0" tIns="0" rIns="0" bIns="0" rtlCol="0" anchor="ctr"/>
+          <a:lstStyle/>
+          <a:p>
+            <a:pPr indent="0" marL="0">
+              <a:buNone/>
+            </a:pPr>
+            <a:r>
+              <a:rPr lang="en-US" sz="1100" b="1" dirty="0">
+                <a:solidFill>
+                  <a:srgbClr val="02C39A"/>
+                </a:solidFill>
+                <a:latin typeface="Arial" pitchFamily="34" charset="0"/>
+                <a:ea typeface="Arial" pitchFamily="34" charset="-122"/>
+                <a:cs typeface="Arial" pitchFamily="34" charset="-120"/>
+              </a:rPr>
+              <a:t>Video hook: prediction markets must evolve from outcome gambling to probability distribution derivatives — X-Market rebuilds this on Sui</a:t>
+            </a:r>
+            <a:endParaRPr lang="en-US" sz="1100" dirty="0"/>
+          </a:p>
+        </p:txBody>
+      </p:sp>
+    </p:spTree>
+  </p:cSld>
+  <p:clrMapOvr>
+    <a:masterClrMapping/>
+  </p:clrMapOvr>
+</p:sld>
+</file>
+
+<file path=ppt/slides/slide18.xml><?xml version="1.0" encoding="utf-8"?>
+<p:sld xmlns:a="http://schemas.openxmlformats.org/drawingml/2006/main" xmlns:r="http://schemas.openxmlformats.org/officeDocument/2006/relationships" xmlns:p="http://schemas.openxmlformats.org/presentationml/2006/main">
+  
+  
+  <p:cSld name="Slide 13">
+    
+    
+    <p:bg>
+      
+      
+      <p:bgPr>
+        
+        
+        <a:solidFill>
+          
+          
+          <a:srgbClr val="F0F7FA"/>
+          
+        
+        </a:solidFill>
+        
+      
+      </p:bgPr>
+      
+    
+    </p:bg>
+    
+    
+    <p:spTree>
+      
+      
+      <p:nvGrpSpPr>
+        
+        
+        <p:cNvPr id="1" name=""/>
+        
+        
+        <p:cNvGrpSpPr/>
+        
+        
+        <p:nvPr/>
+        
+      
+      </p:nvGrpSpPr>
+      
+      
+      <p:grpSpPr>
+        
+        
+        <a:xfrm>
+          
+          
+          <a:off x="0" y="0"/>
+          
+          
+          <a:ext cx="0" cy="0"/>
+          
+          
+          <a:chOff x="0" y="0"/>
+          
+          
+          <a:chExt cx="0" cy="0"/>
+          
+        
+        </a:xfrm>
+        
+      
+      </p:grpSpPr>
+      
+      
+      <p:sp>
+        
+        
+        <p:nvSpPr>
+          
+          
+          <p:cNvPr id="2" name="Shape 0"/>
+          
+          
+          <p:cNvSpPr/>
+          
+          
+          <p:nvPr/>
+          
+        
+        </p:nvSpPr>
+        
+        
+        <p:spPr>
+          
+          
+          <a:xfrm>
+            
+            
+            <a:off x="0" y="0"/>
+            
+            
+            <a:ext cx="9144000" cy="960120"/>
+            
+          
+          </a:xfrm>
+          
+          
+          <a:prstGeom prst="rect">
+            
+            
+            <a:avLst/>
+            
+          
+          </a:prstGeom>
+          
+          
+          <a:solidFill>
+            
+            
+            <a:srgbClr val="065A82"/>
+            
+          
+          </a:solidFill>
+          
+          
+          <a:ln/>
+          
+        
+        </p:spPr>
+        
+      
+      </p:sp>
+      
+      
+      <p:sp>
+        
+        
+        <p:nvSpPr>
+          
+          
+          <p:cNvPr id="3" name="Shape 1"/>
+          
+          
+          <p:cNvSpPr/>
+          
+          
+          <p:nvPr/>
+          
+        
+        </p:nvSpPr>
+        
+        
+        <p:spPr>
+          
+          
+          <a:xfrm>
+            
+            
+            <a:off x="0" y="960120"/>
+            
+            
+            <a:ext cx="9144000" cy="54864"/>
+            
+          
+          </a:xfrm>
+          
+          
+          <a:prstGeom prst="rect">
+            
+            
+            <a:avLst/>
+            
+          
+          </a:prstGeom>
+          
+          
+          <a:solidFill>
+            
+            
+            <a:srgbClr val="02C39A"/>
+            
+          
+          </a:solidFill>
+          
+          
+          <a:ln/>
+          
+        
+        </p:spPr>
+        
+      
+      </p:sp>
+      
+      
+      <p:sp>
+        
+        
+        <p:nvSpPr>
+          
+          
+          <p:cNvPr id="4" name="Text 2"/>
+          
+          
+          <p:cNvSpPr/>
+          
+          
+          <p:nvPr/>
+          
+        
+        </p:nvSpPr>
+        
+        
+        <p:spPr>
+          
+          
+          <a:xfrm>
+            
+            
+            <a:off x="457200" y="164592"/>
+            
+            
+            <a:ext cx="8229600" cy="502920"/>
+            
+          
+          </a:xfrm>
+          
+          
+          <a:prstGeom prst="rect">
+            
+            
+            <a:avLst/>
+            
+          
+          </a:prstGeom>
+          
+          
+          <a:noFill/>
+          
+          
+          <a:ln/>
+          
+        
+        </p:spPr>
+        
+        
+        <p:txBody>
+          
+          
+          <a:bodyPr wrap="square" lIns="0" tIns="0" rIns="0" bIns="0" rtlCol="0" anchor="ctr"/>
+          
+          
+          <a:lstStyle/>
+          
+          
+          <a:p>
+            
+            
+            <a:pPr indent="0" marL="0">
+              
+              
+              <a:buNone/>
+              
+            
+            </a:pPr>
+            
+            
+            <a:r>
+              
+              
+              <a:rPr lang="en-US" sz="2800" b="1" dirty="0">
+                
+                
+                <a:solidFill>
+                  
+                  
+                  <a:srgbClr val="FFFFFF"/>
+                  
+                
+                </a:solidFill>
+                
+                
+                <a:latin typeface="Arial" pitchFamily="34" charset="0"/>
+                
+                
+                <a:ea typeface="Arial" pitchFamily="34" charset="-122"/>
+                
+                
+                <a:cs typeface="Arial" pitchFamily="34" charset="-120"/>
+                
+              
+              </a:rPr>
+              
+              
+              <a:t>Conclusion & Future</a:t>
+              
+            
+            </a:r>
+            
+            
+            <a:endParaRPr lang="en-US" sz="2800" dirty="0"/>
+            
+          
+          </a:p>
+          
+        
+        </p:txBody>
+        
+      
+      </p:sp>
+      
+      
+      <p:sp>
+        
+        
+        <p:nvSpPr>
+          
+          
+          <p:cNvPr id="5" name="Text 3"/>
+          
+          
+          <p:cNvSpPr/>
+          
+          
+          <p:nvPr/>
+          
+        
+        </p:nvSpPr>
+        
+        
+        <p:spPr>
+          
+          
+          <a:xfrm>
+            
+            
+            <a:off x="457200" y="621792"/>
+            
+            
+            <a:ext cx="8229600" cy="274320"/>
+            
+          
+          </a:xfrm>
+          
+          
+          <a:prstGeom prst="rect">
+            
+            
+            <a:avLst/>
+            
+          
+          </a:prstGeom>
+          
+          
+          <a:noFill/>
+          
+          
+          <a:ln/>
+          
+        
+        </p:spPr>
+        
+        
+        <p:txBody>
+          
+          
+          <a:bodyPr wrap="square" lIns="0" tIns="0" rIns="0" bIns="0" rtlCol="0" anchor="ctr"/>
+          
+          
+          <a:lstStyle/>
+          
+          
+          <a:p>
+            
+            
+            <a:pPr indent="0" marL="0">
+              
+              
+              <a:buNone/>
+              
+            
+            </a:pPr>
+            
+            
+            <a:r>
+              
+              
+              <a:rPr lang="en-US" sz="1200" dirty="0">
+                
+                
+                <a:solidFill>
+                  
+                  
+                  <a:srgbClr val="CADCFC"/>
+                  
+                
+                </a:solidFill>
+                
+                
+                <a:latin typeface="Arial" pitchFamily="34" charset="0"/>
+                
+                
+                <a:ea typeface="Arial" pitchFamily="34" charset="-122"/>
+                
+                
+                <a:cs typeface="Arial" pitchFamily="34" charset="-120"/>
+                
+              
+              </a:rPr>
+              
+              
+              <a:t>From Testnet validation to mainnet infrastructure · ~60–90 sec</a:t>
+              
+            
+            </a:r>
+            
+            
+            <a:endParaRPr lang="en-US" sz="1200" dirty="0"/>
+            
+          
+          </a:p>
+          
+        
+        </p:txBody>
+        
+      
+      </p:sp>
+      
+      
+      <p:sp>
+        
+        
+        <p:nvSpPr>
+          
+          
+          <p:cNvPr id="6" name="Shape 4"/>
+          
+          
+          <p:cNvSpPr/>
+          
+          
+          <p:nvPr/>
+          
+        
+        </p:nvSpPr>
+        
+        
+        <p:spPr>
+          
+          
+          <a:xfrm>
+            
+            
+            <a:off x="365760" y="1188720"/>
+            
+            
+            <a:ext cx="4023360" cy="1691640"/>
+            
+          
+          </a:xfrm>
+          
+          
+          <a:prstGeom prst="rect">
+            
+            
+            <a:avLst/>
+            
+          
+          </a:prstGeom>
+          
+          
+          <a:solidFill>
+            
+            
+            <a:srgbClr val="FFFFFF"/>
+            
+          
+          </a:solidFill>
+          
+          
+          <a:ln w="12700">
+            
+            
+            <a:solidFill>
+              
+              
+              <a:srgbClr val="E2E8F0"/>
+              
+            
+            </a:solidFill>
+            
+            
+            <a:prstDash val="solid"/>
+            
+          
+          </a:ln>
+          
+          
+          <a:effectLst>
+            
+             
+            
+            <a:outerShdw sx="100000" sy="100000" kx="0" ky="0" algn="bl" rotWithShape="0" blurRad="50800" dist="25400" dir="8100000">
+              
+               
+              
+              <a:srgbClr val="000000">
+                
+                 
+                
+                <a:alpha val="12000"/>
+                
+              
+              </a:srgbClr>
+              
+               
+            
+            </a:outerShdw>
+            
+          
+          </a:effectLst>
+          
+        
+        </p:spPr>
+        
+      
+      </p:sp>
+      
+      
+      <p:sp>
+        
+        
+        <p:nvSpPr>
+          
+          
+          <p:cNvPr id="7" name="Shape 5"/>
+          
+          
+          <p:cNvSpPr/>
+          
+          
+          <p:nvPr/>
+          
+        
+        </p:nvSpPr>
+        
+        
+        <p:spPr>
+          
+          
+          <a:xfrm>
+            
+            
+            <a:off x="548640" y="1371600"/>
+            
+            
+            <a:ext cx="502920" cy="502920"/>
+            
+          
+          </a:xfrm>
+          
+          
+          <a:prstGeom prst="ellipse">
+            
+            
+            <a:avLst/>
+            
+          
+          </a:prstGeom>
+          
+          
+          <a:solidFill>
+            
+            
+            <a:srgbClr val="02C39A"/>
+            
+          
+          </a:solidFill>
+          
+          
+          <a:ln/>
+          
+        
+        </p:spPr>
+        
+      
+      </p:sp>
+      
+      
+      <p:sp>
+        
+        
+        <p:nvSpPr>
+          
+          
+          <p:cNvPr id="8" name="Text 6"/>
+          
+          
+          <p:cNvSpPr/>
+          
+          
+          <p:nvPr/>
+          
+        
+        </p:nvSpPr>
+        
+        
+        <p:spPr>
+          
+          
+          <a:xfrm>
+            
+            
+            <a:off x="548640" y="1371600"/>
+            
+            
+            <a:ext cx="502920" cy="502920"/>
+            
+          
+          </a:xfrm>
+          
+          
+          <a:prstGeom prst="rect">
+            
+            
+            <a:avLst/>
+            
+          
+          </a:prstGeom>
+          
+          
+          <a:noFill/>
+          
+          
+          <a:ln/>
+          
+        
+        </p:spPr>
+        
+        
+        <p:txBody>
+          
+          
+          <a:bodyPr wrap="square" lIns="0" tIns="0" rIns="0" bIns="0" rtlCol="0" anchor="ctr"/>
+          
+          
+          <a:lstStyle/>
+          
+          
+          <a:p>
+            
+            
+            <a:pPr algn="ctr" indent="0" marL="0">
+              
+              
+              <a:buNone/>
+              
+            
+            </a:pPr>
+            
+            
+            <a:r>
+              
+              
+              <a:rPr lang="en-US" sz="1600" dirty="0">
+                
+                
+                <a:solidFill>
+                  
+                  
+                  <a:srgbClr val="000000"/>
+                  
+                
+                </a:solidFill>
+                
+              
+              </a:rPr>
+              
+              
+              <a:t>✅</a:t>
+              
+            
+            </a:r>
+            
+            
+            <a:endParaRPr lang="en-US" sz="1600" dirty="0"/>
+            
+          
+          </a:p>
+          
+        
+        </p:txBody>
+        
+      
+      </p:sp>
+      
+      
+      <p:sp>
+        
+        
+        <p:nvSpPr>
+          
+          
+          <p:cNvPr id="9" name="Text 7"/>
+          
+          
+          <p:cNvSpPr/>
+          
+          
+          <p:nvPr/>
+          
+        
+        </p:nvSpPr>
+        
+        
+        <p:spPr>
+          
+          
+          <a:xfrm>
+            
+            
+            <a:off x="1143000" y="1353312"/>
+            
+            
+            <a:ext cx="3108960" cy="365760"/>
+            
+          
+          </a:xfrm>
+          
+          
+          <a:prstGeom prst="rect">
+            
+            
+            <a:avLst/>
+            
+          
+          </a:prstGeom>
+          
+          
+          <a:noFill/>
+          
+          
+          <a:ln/>
+          
+        
+        </p:spPr>
+        
+        
+        <p:txBody>
+          
+          
+          <a:bodyPr wrap="square" lIns="0" tIns="0" rIns="0" bIns="0" rtlCol="0" anchor="ctr"/>
+          
+          
+          <a:lstStyle/>
+          
+          
+          <a:p>
+            
+            
+            <a:pPr indent="0" marL="0">
+              
+              
+              <a:buNone/>
+              
+            
+            </a:pPr>
+            
+            
+            <a:r>
+              
+              
+              <a:rPr lang="en-US" sz="1400" b="1" dirty="0">
+                
+                
+                <a:solidFill>
+                  
+                  
+                  <a:srgbClr val="065A82"/>
+                  
+                
+                </a:solidFill>
+                
+                
+                <a:latin typeface="Arial" pitchFamily="34" charset="0"/>
+                
+                
+                <a:ea typeface="Arial" pitchFamily="34" charset="-122"/>
+                
+                
+                <a:cs typeface="Arial" pitchFamily="34" charset="-120"/>
+                
+              
+              </a:rPr>
+              
+              
+              <a:t>Core Conclusions</a:t>
+              
+            
+            </a:r>
+            
+            
+            <a:endParaRPr lang="en-US" sz="1400" dirty="0"/>
+            
+          
+          </a:p>
+          
+        
+        </p:txBody>
+        
+      
+      </p:sp>
+      
+      
+      <p:sp>
+        
+        
+        <p:nvSpPr>
+          
+          
+          <p:cNvPr id="10" name="Text 8"/>
+          
+          
+          <p:cNvSpPr/>
+          
+          
+          <p:nvPr/>
+          
+        
+        </p:nvSpPr>
+        
+        
+        <p:spPr>
+          
+          
+          <a:xfrm>
+            
+            
+            <a:off x="548640" y="1874520"/>
+            
+            
+            <a:ext cx="3657600" cy="914400"/>
+            
+          
+          </a:xfrm>
+          
+          
+          <a:prstGeom prst="rect">
+            
+            
+            <a:avLst/>
+            
+          
+          </a:prstGeom>
+          
+          
+          <a:noFill/>
+          
+          
+          <a:ln/>
+          
+        
+        </p:spPr>
+        
+        
+        <p:txBody>
+          
+          
+          <a:bodyPr wrap="square" rtlCol="0" anchor="t"/>
+          
+          
+          <a:lstStyle/>
+          
+          
+          <a:p>
+            
+            
+            <a:pPr marL="342900" indent="-342900">
+              
+              
+              <a:buSzPct val="100000"/>
+              
+              
+              <a:buChar char="•"/>
+              
+            
+            </a:pPr>
+            
+            
+            <a:r>
+              
+              
+              <a:rPr lang="en-US" sz="1000" dirty="0">
+                
+                
+                <a:solidFill>
+                  
+                  
+                  <a:srgbClr val="1E293B"/>
+                  
+                
+                </a:solidFill>
+                
+                
+                <a:latin typeface="Arial" pitchFamily="34" charset="0"/>
+                
+                
+                <a:ea typeface="Arial" pitchFamily="34" charset="-122"/>
+                
+                
+                <a:cs typeface="Arial" pitchFamily="34" charset="-120"/>
+                
+              
+              </a:rPr>
+              
+              
+              <a:t>Prediction markets must evolve from gambling to PDF probability derivatives</a:t>
+              
+            
+            </a:r>
+            
+            
+            <a:endParaRPr lang="en-US" sz="1000" dirty="0"/>
+            
+          
+          </a:p>
+          
+          
+          <a:p>
+            
+            
+            <a:pPr marL="342900" indent="-342900">
+              
+              
+              <a:buSzPct val="100000"/>
+              
+              
+              <a:buChar char="•"/>
+              
+            
+            </a:pPr>
+            
+            
+            <a:r>
+              
+              
+              <a:rPr lang="en-US" sz="1000" dirty="0">
+                
+                
+                <a:solidFill>
+                  
+                  
+                  <a:srgbClr val="1E293B"/>
+                  
+                
+                </a:solidFill>
+                
+                
+                <a:latin typeface="Arial" pitchFamily="34" charset="0"/>
+                
+                
+                <a:ea typeface="Arial" pitchFamily="34" charset="-122"/>
+                
+                
+                <a:cs typeface="Arial" pitchFamily="34" charset="-120"/>
+                
+              
+              </a:rPr>
+              
+              
+              <a:t>Dual modules share EventRoot · unified Oracle settlement truth</a:t>
+              
+            
+            </a:r>
+            
+            
+            <a:endParaRPr lang="en-US" sz="1000" dirty="0"/>
+            
+          
+          </a:p>
+          
+          
+          <a:p>
+            
+            
+            <a:pPr marL="342900" indent="-342900">
+              
+              
+              <a:buSzPct val="100000"/>
+              
+              
+              <a:buChar char="•"/>
+              
+            
+            </a:pPr>
+            
+            
+            <a:r>
+              
+              
+              <a:rPr lang="en-US" sz="1000" dirty="0">
+                
+                
+                <a:solidFill>
+                  
+                  
+                  <a:srgbClr val="1E293B"/>
+                  
+                
+                </a:solidFill>
+                
+                
+                <a:latin typeface="Arial" pitchFamily="34" charset="0"/>
+                
+                
+                <a:ea typeface="Arial" pitchFamily="34" charset="-122"/>
+                
+                
+                <a:cs typeface="Arial" pitchFamily="34" charset="-120"/>
+                
+              
+              </a:rPr>
+              
+              
+              <a:t>On-chain PDF pricing + Seal forced audit · four-sided win-win ecosystem</a:t>
+              
+            
+            </a:r>
+            
+            
+            <a:endParaRPr lang="en-US" sz="1000" dirty="0"/>
+            
+          
+          </a:p>
+          
+          
+          <a:p>
+            
+            
+            <a:pPr marL="342900" indent="-342900">
+              
+              
+              <a:buSzPct val="100000"/>
+              
+              
+              <a:buChar char="•"/>
+              
+            
+            </a:pPr>
+            
+            
+            <a:r>
+              
+              
+              <a:rPr lang="en-US" sz="1000" dirty="0">
+                
+                
+                <a:solidFill>
+                  
+                  
+                  <a:srgbClr val="1E293B"/>
+                  
+                
+                </a:solidFill>
+                
+                
+                <a:latin typeface="Arial" pitchFamily="34" charset="0"/>
+                
+                
+                <a:ea typeface="Arial" pitchFamily="34" charset="-122"/>
+                
+                
+                <a:cs typeface="Arial" pitchFamily="34" charset="-120"/>
+                
+              
+              </a:rPr>
+              
+              
+              <a:t>Testnet v2 full stack validated — not a concept</a:t>
+              
+            
+            </a:r>
+            
+            
+            <a:endParaRPr lang="en-US" sz="1000" dirty="0"/>
+            
+          
+          </a:p>
+          
+        
+        </p:txBody>
+        
+      
+      </p:sp>
+      
+      
+      <p:sp>
+        
+        
+        <p:nvSpPr>
+          
+          
+          <p:cNvPr id="11" name="Shape 9"/>
+          
+          
+          <p:cNvSpPr/>
+          
+          
+          <p:nvPr/>
+          
+        
+        </p:nvSpPr>
+        
+        
+        <p:spPr>
+          
+          
+          <a:xfrm>
+            
+            
+            <a:off x="4754880" y="1188720"/>
+            
+            
+            <a:ext cx="4023360" cy="1691640"/>
+            
+          
+          </a:xfrm>
+          
+          
+          <a:prstGeom prst="rect">
+            
+            
+            <a:avLst/>
+            
+          
+          </a:prstGeom>
+          
+          
+          <a:solidFill>
+            
+            
+            <a:srgbClr val="FFFFFF"/>
+            
+          
+          </a:solidFill>
+          
+          
+          <a:ln w="12700">
+            
+            
+            <a:solidFill>
+              
+              
+              <a:srgbClr val="E2E8F0"/>
+              
+            
+            </a:solidFill>
+            
+            
+            <a:prstDash val="solid"/>
+            
+          
+          </a:ln>
+          
+          
+          <a:effectLst>
+            
+             
+            
+            <a:outerShdw sx="100000" sy="100000" kx="0" ky="0" algn="bl" rotWithShape="0" blurRad="50800" dist="25400" dir="8100000">
+              
+               
+              
+              <a:srgbClr val="000000">
+                
+                 
+                
+                <a:alpha val="12000"/>
+                
+              
+              </a:srgbClr>
+              
+               
+            
+            </a:outerShdw>
+            
+          
+          </a:effectLst>
+          
+        
+        </p:spPr>
+        
+      
+      </p:sp>
+      
+      
+      <p:sp>
+        
+        
+        <p:nvSpPr>
+          
+          
+          <p:cNvPr id="12" name="Shape 10"/>
+          
+          
+          <p:cNvSpPr/>
+          
+          
+          <p:nvPr/>
+          
+        
+        </p:nvSpPr>
+        
+        
+        <p:spPr>
+          
+          
+          <a:xfrm>
+            
+            
+            <a:off x="4937760" y="1371600"/>
+            
+            
+            <a:ext cx="502920" cy="502920"/>
+            
+          
+          </a:xfrm>
+          
+          
+          <a:prstGeom prst="ellipse">
+            
+            
+            <a:avLst/>
+            
+          
+          </a:prstGeom>
+          
+          
+          <a:solidFill>
+            
+            
+            <a:srgbClr val="1C7293"/>
+            
+          
+          </a:solidFill>
+          
+          
+          <a:ln/>
+          
+        
+        </p:spPr>
+        
+      
+      </p:sp>
+      
+      
+      <p:sp>
+        
+        
+        <p:nvSpPr>
+          
+          
+          <p:cNvPr id="13" name="Text 11"/>
+          
+          
+          <p:cNvSpPr/>
+          
+          
+          <p:nvPr/>
+          
+        
+        </p:nvSpPr>
+        
+        
+        <p:spPr>
+          
+          
+          <a:xfrm>
+            
+            
+            <a:off x="4937760" y="1371600"/>
+            
+            
+            <a:ext cx="502920" cy="502920"/>
+            
+          
+          </a:xfrm>
+          
+          
+          <a:prstGeom prst="rect">
+            
+            
+            <a:avLst/>
+            
+          
+          </a:prstGeom>
+          
+          
+          <a:noFill/>
+          
+          
+          <a:ln/>
+          
+        
+        </p:spPr>
+        
+        
+        <p:txBody>
+          
+          
+          <a:bodyPr wrap="square" lIns="0" tIns="0" rIns="0" bIns="0" rtlCol="0" anchor="ctr"/>
+          
+          
+          <a:lstStyle/>
+          
+          
+          <a:p>
+            
+            
+            <a:pPr algn="ctr" indent="0" marL="0">
+              
+              
+              <a:buNone/>
+              
+            
+            </a:pPr>
+            
+            
+            <a:r>
+              
+              
+              <a:rPr lang="en-US" sz="1600" dirty="0">
+                
+                
+                <a:solidFill>
+                  
+                  
+                  <a:srgbClr val="000000"/>
+                  
+                
+                </a:solidFill>
+                
+              
+              </a:rPr>
+              
+              
+              <a:t>🔬</a:t>
+              
+            
+            </a:r>
+            
+            
+            <a:endParaRPr lang="en-US" sz="1600" dirty="0"/>
+            
+          
+          </a:p>
+          
+        
+        </p:txBody>
+        
+      
+      </p:sp>
+      
+      
+      <p:sp>
+        
+        
+        <p:nvSpPr>
+          
+          
+          <p:cNvPr id="14" name="Text 12"/>
+          
+          
+          <p:cNvSpPr/>
+          
+          
+          <p:nvPr/>
+          
+        
+        </p:nvSpPr>
+        
+        
+        <p:spPr>
+          
+          
+          <a:xfrm>
+            
+            
+            <a:off x="5532120" y="1353312"/>
+            
+            
+            <a:ext cx="3108960" cy="365760"/>
+            
+          
+          </a:xfrm>
+          
+          
+          <a:prstGeom prst="rect">
+            
+            
+            <a:avLst/>
+            
+          
+          </a:prstGeom>
+          
+          
+          <a:noFill/>
+          
+          
+          <a:ln/>
+          
+        
+        </p:spPr>
+        
+        
+        <p:txBody>
+          
+          
+          <a:bodyPr wrap="square" lIns="0" tIns="0" rIns="0" bIns="0" rtlCol="0" anchor="ctr"/>
+          
+          
+          <a:lstStyle/>
+          
+          
+          <a:p>
+            
+            
+            <a:pPr indent="0" marL="0">
+              
+              
+              <a:buNone/>
+              
+            
+            </a:pPr>
+            
+            
+            <a:r>
+              
+              
+              <a:rPr lang="en-US" sz="1400" b="1" dirty="0">
+                
+                
+                <a:solidFill>
+                  
+                  
+                  <a:srgbClr val="065A82"/>
+                  
+                
+                </a:solidFill>
+                
+                
+                <a:latin typeface="Arial" pitchFamily="34" charset="0"/>
+                
+                
+                <a:ea typeface="Arial" pitchFamily="34" charset="-122"/>
+                
+                
+                <a:cs typeface="Arial" pitchFamily="34" charset="-120"/>
+                
+              
+              </a:rPr>
+              
+              
+              <a:t>Validated Capabilities</a:t>
+              
+            
+            </a:r>
+            
+            
+            <a:endParaRPr lang="en-US" sz="1400" dirty="0"/>
+            
+          
+          </a:p>
+          
+        
+        </p:txBody>
+        
+      
+      </p:sp>
+      
+      
+      <p:sp>
+        
+        
+        <p:nvSpPr>
+          
+          
+          <p:cNvPr id="15" name="Text 13"/>
+          
+          
+          <p:cNvSpPr/>
+          
+          
+          <p:nvPr/>
+          
+        
+        </p:nvSpPr>
+        
+        
+        <p:spPr>
+          
+          
+          <a:xfrm>
+            
+            
+            <a:off x="4937760" y="1874520"/>
+            
+            
+            <a:ext cx="3657600" cy="914400"/>
+            
+          
+          </a:xfrm>
+          
+          
+          <a:prstGeom prst="rect">
+            
+            
+            <a:avLst/>
+            
+          
+          </a:prstGeom>
+          
+          
+          <a:noFill/>
+          
+          
+          <a:ln/>
+          
+        
+        </p:spPr>
+        
+        
+        <p:txBody>
+          
+          
+          <a:bodyPr wrap="square" rtlCol="0" anchor="t"/>
+          
+          
+          <a:lstStyle/>
+          
+          
+          <a:p>
+            
+            
+            <a:pPr marL="342900" indent="-342900">
+              
+              
+              <a:buSzPct val="100000"/>
+              
+              
+              <a:buChar char="•"/>
+              
+            
+            </a:pPr>
+            
+            
+            <a:r>
+              
+              
+              <a:rPr lang="en-US" sz="1000" dirty="0">
+                
+                
+                <a:solidFill>
+                  
+                  
+                  <a:srgbClr val="1E293B"/>
+                  
+                
+                </a:solidFill>
+                
+                
+                <a:latin typeface="Arial" pitchFamily="34" charset="0"/>
+                
+                
+                <a:ea typeface="Arial" pitchFamily="34" charset="-122"/>
+                
+                
+                <a:cs typeface="Arial" pitchFamily="34" charset="-120"/>
+                
+              
+              </a:rPr>
+              
+              
+              <a:t>30+ Move modules · three distribution templates deployed</a:t>
+              
+            
+            </a:r>
+            
+            
+            <a:endParaRPr lang="en-US" sz="1000" dirty="0"/>
+            
+          
+          </a:p>
+          
+          
+          <a:p>
+            
+            
+            <a:pPr marL="342900" indent="-342900">
+              
+              
+              <a:buSzPct val="100000"/>
+              
+              
+              <a:buChar char="•"/>
+              
+            
+            </a:pPr>
+            
+            
+            <a:r>
+              
+              
+              <a:rPr lang="en-US" sz="1000" dirty="0">
+                
+                
+                <a:solidFill>
+                  
+                  
+                  <a:srgbClr val="1E293B"/>
+                  
+                
+                </a:solidFill>
+                
+                
+                <a:latin typeface="Arial" pitchFamily="34" charset="0"/>
+                
+                
+                <a:ea typeface="Arial" pitchFamily="34" charset="-122"/>
+                
+                
+                <a:cs typeface="Arial" pitchFamily="34" charset="-120"/>
+                
+              
+              </a:rPr>
+              
+              
+              <a:t>Opening Auction cold start · Max-Loss full-path coverage</a:t>
+              
+            
+            </a:r>
+            
+            
+            <a:endParaRPr lang="en-US" sz="1000" dirty="0"/>
+            
+          
+          </a:p>
+          
+          
+          <a:p>
+            
+            
+            <a:pPr marL="342900" indent="-342900">
+              
+              
+              <a:buSzPct val="100000"/>
+              
+              
+              <a:buChar char="•"/>
+              
+            
+            </a:pPr>
+            
+            
+            <a:r>
+              
+              
+              <a:rPr lang="en-US" sz="1000" dirty="0">
+                
+                
+                <a:solidFill>
+                  
+                  
+                  <a:srgbClr val="1E293B"/>
+                  
+                
+                </a:solidFill>
+                
+                
+                <a:latin typeface="Arial" pitchFamily="34" charset="0"/>
+                
+                
+                <a:ea typeface="Arial" pitchFamily="34" charset="-122"/>
+                
+                
+                <a:cs typeface="Arial" pitchFamily="34" charset="-120"/>
+                
+              
+              </a:rPr>
+              
+              
+              <a:t>SuiProphet + Indexer + Flutter end-to-end integrated</a:t>
+              
+            
+            </a:r>
+            
+            
+            <a:endParaRPr lang="en-US" sz="1000" dirty="0"/>
+            
+          
+          </a:p>
+          
+          
+          <a:p>
+            
+            
+            <a:pPr marL="342900" indent="-342900">
+              
+              
+              <a:buSzPct val="100000"/>
+              
+              
+              <a:buChar char="•"/>
+              
+            
+            </a:pPr>
+            
+            
+            <a:r>
+              
+              
+              <a:rPr lang="en-US" sz="1000" dirty="0">
+                
+                
+                <a:solidFill>
+                  
+                  
+                  <a:srgbClr val="1E293B"/>
+                  
+                
+                </a:solidFill>
+                
+                
+                <a:latin typeface="Arial" pitchFamily="34" charset="0"/>
+                
+                
+                <a:ea typeface="Arial" pitchFamily="34" charset="-122"/>
+                
+                
+                <a:cs typeface="Arial" pitchFamily="34" charset="-120"/>
+                
+              
+              </a:rPr>
+              
+              
+              <a:t>9+ off-chain microservices · Docker orchestration production-ready</a:t>
+              
+            
+            </a:r>
+            
+            
+            <a:endParaRPr lang="en-US" sz="1000" dirty="0"/>
+            
+          
+          </a:p>
+          
+        
+        </p:txBody>
+        
+      
+      </p:sp>
+      
+      
+      <p:sp>
+        
+        
+        <p:nvSpPr>
+          
+          
+          <p:cNvPr id="16" name="Shape 14"/>
+          
+          
+          <p:cNvSpPr/>
+          
+          
+          <p:nvPr/>
+          
+        
+        </p:nvSpPr>
+        
+        
+        <p:spPr>
+          
+          
+          <a:xfrm>
+            
+            
+            <a:off x="365760" y="3063240"/>
+            
+            
+            <a:ext cx="4023360" cy="1691640"/>
+            
+          
+          </a:xfrm>
+          
+          
+          <a:prstGeom prst="rect">
+            
+            
+            <a:avLst/>
+            
+          
+          </a:prstGeom>
+          
+          
+          <a:solidFill>
+            
+            
+            <a:srgbClr val="FFFFFF"/>
+            
+          
+          </a:solidFill>
+          
+          
+          <a:ln w="12700">
+            
+            
+            <a:solidFill>
+              
+              
+              <a:srgbClr val="E2E8F0"/>
+              
+            
+            </a:solidFill>
+            
+            
+            <a:prstDash val="solid"/>
+            
+          
+          </a:ln>
+          
+          
+          <a:effectLst>
+            
+             
+            
+            <a:outerShdw sx="100000" sy="100000" kx="0" ky="0" algn="bl" rotWithShape="0" blurRad="50800" dist="25400" dir="8100000">
+              
+               
+              
+              <a:srgbClr val="000000">
+                
+                 
+                
+                <a:alpha val="12000"/>
+                
+              
+              </a:srgbClr>
+              
+               
+            
+            </a:outerShdw>
+            
+          
+          </a:effectLst>
+          
+        
+        </p:spPr>
+        
+      
+      </p:sp>
+      
+      
+      <p:sp>
+        
+        
+        <p:nvSpPr>
+          
+          
+          <p:cNvPr id="17" name="Shape 15"/>
+          
+          
+          <p:cNvSpPr/>
+          
+          
+          <p:nvPr/>
+          
+        
+        </p:nvSpPr>
+        
+        
+        <p:spPr>
+          
+          
+          <a:xfrm>
+            
+            
+            <a:off x="548640" y="3246120"/>
+            
+            
+            <a:ext cx="502920" cy="502920"/>
+            
+          
+          </a:xfrm>
+          
+          
+          <a:prstGeom prst="ellipse">
+            
+            
+            <a:avLst/>
+            
+          
+          </a:prstGeom>
+          
+          
+          <a:solidFill>
+            
+            
+            <a:srgbClr val="065A82"/>
+            
+          
+          </a:solidFill>
+          
+          
+          <a:ln/>
+          
+        
+        </p:spPr>
+        
+      
+      </p:sp>
+      
+      
+      <p:sp>
+        
+        
+        <p:nvSpPr>
+          
+          
+          <p:cNvPr id="18" name="Text 16"/>
+          
+          
+          <p:cNvSpPr/>
+          
+          
+          <p:nvPr/>
+          
+        
+        </p:nvSpPr>
+        
+        
+        <p:spPr>
+          
+          
+          <a:xfrm>
+            
+            
+            <a:off x="548640" y="3246120"/>
+            
+            
+            <a:ext cx="502920" cy="502920"/>
+            
+          
+          </a:xfrm>
+          
+          
+          <a:prstGeom prst="rect">
+            
+            
+            <a:avLst/>
+            
+          
+          </a:prstGeom>
+          
+          
+          <a:noFill/>
+          
+          
+          <a:ln/>
+          
+        
+        </p:spPr>
+        
+        
+        <p:txBody>
+          
+          
+          <a:bodyPr wrap="square" lIns="0" tIns="0" rIns="0" bIns="0" rtlCol="0" anchor="ctr"/>
+          
+          
+          <a:lstStyle/>
+          
+          
+          <a:p>
+            
+            
+            <a:pPr algn="ctr" indent="0" marL="0">
+              
+              
+              <a:buNone/>
+              
+            
+            </a:pPr>
+            
+            
+            <a:r>
+              
+              
+              <a:rPr lang="en-US" sz="1600" dirty="0">
+                
+                
+                <a:solidFill>
+                  
+                  
+                  <a:srgbClr val="000000"/>
+                  
+                
+                </a:solidFill>
+                
+              
+              </a:rPr>
+              
+              
+              <a:t>🚀</a:t>
+              
+            
+            </a:r>
+            
+            
+            <a:endParaRPr lang="en-US" sz="1600" dirty="0"/>
+            
+          
+          </a:p>
+          
+        
+        </p:txBody>
+        
+      
+      </p:sp>
+      
+      
+      <p:sp>
+        
+        
+        <p:nvSpPr>
+          
+          
+          <p:cNvPr id="19" name="Text 17"/>
+          
+          
+          <p:cNvSpPr/>
+          
+          
+          <p:nvPr/>
+          
+        
+        </p:nvSpPr>
+        
+        
+        <p:spPr>
+          
+          
+          <a:xfrm>
+            
+            
+            <a:off x="1143000" y="3227832"/>
+            
+            
+            <a:ext cx="3108960" cy="365760"/>
+            
+          
+          </a:xfrm>
+          
+          
+          <a:prstGeom prst="rect">
+            
+            
+            <a:avLst/>
+            
+          
+          </a:prstGeom>
+          
+          
+          <a:noFill/>
+          
+          
+          <a:ln/>
+          
+        
+        </p:spPr>
+        
+        
+        <p:txBody>
+          
+          
+          <a:bodyPr wrap="square" lIns="0" tIns="0" rIns="0" bIns="0" rtlCol="0" anchor="ctr"/>
+          
+          
+          <a:lstStyle/>
+          
+          
+          <a:p>
+            
+            
+            <a:pPr indent="0" marL="0">
+              
+              
+              <a:buNone/>
+              
+            
+            </a:pPr>
+            
+            
+            <a:r>
+              
+              
+              <a:rPr lang="en-US" sz="1400" b="1" dirty="0">
+                
+                
+                <a:solidFill>
+                  
+                  
+                  <a:srgbClr val="065A82"/>
+                  
+                
+                </a:solidFill>
+                
+                
+                <a:latin typeface="Arial" pitchFamily="34" charset="0"/>
+                
+                
+                <a:ea typeface="Arial" pitchFamily="34" charset="-122"/>
+                
+                
+                <a:cs typeface="Arial" pitchFamily="34" charset="-120"/>
+                
+              
+              </a:rPr>
+              
+              
+              <a:t>Near-Term Outlook</a:t>
+              
+            
+            </a:r>
+            
+            
+            <a:endParaRPr lang="en-US" sz="1400" dirty="0"/>
+            
+          
+          </a:p>
+          
+        
+        </p:txBody>
+        
+      
+      </p:sp>
+      
+      
+      <p:sp>
+        
+        
+        <p:nvSpPr>
+          
+          
+          <p:cNvPr id="20" name="Text 18"/>
+          
+          
+          <p:cNvSpPr/>
+          
+          
+          <p:nvPr/>
+          
+        
+        </p:nvSpPr>
+        
+        
+        <p:spPr>
+          
+          
+          <a:xfrm>
+            
+            
+            <a:off x="548640" y="3749040"/>
+            
+            
+            <a:ext cx="3657600" cy="914400"/>
+            
+          
+          </a:xfrm>
+          
+          
+          <a:prstGeom prst="rect">
+            
+            
+            <a:avLst/>
+            
+          
+          </a:prstGeom>
+          
+          
+          <a:noFill/>
+          
+          
+          <a:ln/>
+          
+        
+        </p:spPr>
+        
+        
+        <p:txBody>
+          
+          
+          <a:bodyPr wrap="square" rtlCol="0" anchor="t"/>
+          
+          
+          <a:lstStyle/>
+          
+          
+          <a:p>
+            
+            
+            <a:pPr marL="342900" indent="-342900">
+              
+              
+              <a:buSzPct val="100000"/>
+              
+              
+              <a:buChar char="•"/>
+              
+            
+            </a:pPr>
+            
+            
+            <a:r>
+              
+              
+              <a:rPr lang="en-US" sz="1000" dirty="0">
+                
+                
+                <a:solidFill>
+                  
+                  
+                  <a:srgbClr val="1E293B"/>
+                  
+                
+                </a:solidFill>
+                
+                
+                <a:latin typeface="Arial" pitchFamily="34" charset="0"/>
+                
+                
+                <a:ea typeface="Arial" pitchFamily="34" charset="-122"/>
+                
+                
+                <a:cs typeface="Arial" pitchFamily="34" charset="-120"/>
+                
+              
+              </a:rPr>
+              
+              
+              <a:t>Phase 3: Variance Swap · Slash governance · ZK cold-path completion</a:t>
+              
+            
+            </a:r>
+            
+            
+            <a:endParaRPr lang="en-US" sz="1000" dirty="0"/>
+            
+          
+          </a:p>
+          
+          
+          <a:p>
+            
+            
+            <a:pPr marL="342900" indent="-342900">
+              
+              
+              <a:buSzPct val="100000"/>
+              
+              
+              <a:buChar char="•"/>
+              
+            
+            </a:pPr>
+            
+            
+            <a:r>
+              
+              
+              <a:rPr lang="en-US" sz="1000" dirty="0">
+                
+                
+                <a:solidFill>
+                  
+                  
+                  <a:srgbClr val="1E293B"/>
+                  
+                
+                </a:solidFill>
+                
+                
+                <a:latin typeface="Arial" pitchFamily="34" charset="0"/>
+                
+                
+                <a:ea typeface="Arial" pitchFamily="34" charset="-122"/>
+                
+                
+                <a:cs typeface="Arial" pitchFamily="34" charset="-120"/>
+                
+              
+              </a:rPr>
+              
+              
+              <a:t>Beta distribution · dual-pool joint probability · more vertical PDF markets</a:t>
+              
+            
+            </a:r>
+            
+            
+            <a:endParaRPr lang="en-US" sz="1000" dirty="0"/>
+            
+          
+          </a:p>
+          
+          
+          <a:p>
+            
+            
+            <a:pPr marL="342900" indent="-342900">
+              
+              
+              <a:buSzPct val="100000"/>
+              
+              
+              <a:buChar char="•"/>
+              
+            
+            </a:pPr>
+            
+            
+            <a:r>
+              
+              
+              <a:rPr lang="en-US" sz="1000" dirty="0">
+                
+                
+                <a:solidFill>
+                  
+                  
+                  <a:srgbClr val="1E293B"/>
+                  
+                
+                </a:solidFill>
+                
+                
+                <a:latin typeface="Arial" pitchFamily="34" charset="0"/>
+                
+                
+                <a:ea typeface="Arial" pitchFamily="34" charset="-122"/>
+                
+                
+                <a:cs typeface="Arial" pitchFamily="34" charset="-120"/>
+                
+              
+              </a:rPr>
+              
+              
+              <a:t>Attestation + Brevis Prover: mock → live supervision line</a:t>
+              
+            
+            </a:r>
+            
+            
+            <a:endParaRPr lang="en-US" sz="1000" dirty="0"/>
+            
+          
+          </a:p>
+          
+          
+          <a:p>
+            
+            
+            <a:pPr marL="342900" indent="-342900">
+              
+              
+              <a:buSzPct val="100000"/>
+              
+              
+              <a:buChar char="•"/>
+              
+            
+            </a:pPr>
+            
+            
+            <a:r>
+              
+              
+              <a:rPr lang="en-US" sz="1000" dirty="0">
+                
+                
+                <a:solidFill>
+                  
+                  
+                  <a:srgbClr val="1E293B"/>
+                  
+                
+                </a:solidFill>
+                
+                
+                <a:latin typeface="Arial" pitchFamily="34" charset="0"/>
+                
+                
+                <a:ea typeface="Arial" pitchFamily="34" charset="-122"/>
+                
+                
+                <a:cs typeface="Arial" pitchFamily="34" charset="-120"/>
+                
+              
+              </a:rPr>
+              
+              
+              <a:t>External audit → Mainnet · Circle USDC · GeoBlock (frontend compliance)</a:t>
+              
+            
+            </a:r>
+            
+            
+            <a:endParaRPr lang="en-US" sz="1000" dirty="0"/>
+            
+          
+          </a:p>
+          
+        
+        </p:txBody>
+        
+      
+      </p:sp>
+      
+      
+      <p:sp>
+        
+        
+        <p:nvSpPr>
+          
+          
+          <p:cNvPr id="21" name="Shape 19"/>
+          
+          
+          <p:cNvSpPr/>
+          
+          
+          <p:nvPr/>
+          
+        
+        </p:nvSpPr>
+        
+        
+        <p:spPr>
+          
+          
+          <a:xfrm>
+            
+            
+            <a:off x="4754880" y="3063240"/>
+            
+            
+            <a:ext cx="4023360" cy="1691640"/>
+            
+          
+          </a:xfrm>
+          
+          
+          <a:prstGeom prst="rect">
+            
+            
+            <a:avLst/>
+            
+          
+          </a:prstGeom>
+          
+          
+          <a:solidFill>
+            
+            
+            <a:srgbClr val="FFFFFF"/>
+            
+          
+          </a:solidFill>
+          
+          
+          <a:ln w="12700">
+            
+            
+            <a:solidFill>
+              
+              
+              <a:srgbClr val="E2E8F0"/>
+              
+            
+            </a:solidFill>
+            
+            
+            <a:prstDash val="solid"/>
+            
+          
+          </a:ln>
+          
+          
+          <a:effectLst>
+            
+             
+            
+            <a:outerShdw sx="100000" sy="100000" kx="0" ky="0" algn="bl" rotWithShape="0" blurRad="50800" dist="25400" dir="8100000">
+              
+               
+              
+              <a:srgbClr val="000000">
+                
+                 
+                
+                <a:alpha val="12000"/>
+                
+              
+              </a:srgbClr>
+              
+               
+            
+            </a:outerShdw>
+            
+          
+          </a:effectLst>
+          
+        
+        </p:spPr>
+        
+      
+      </p:sp>
+      
+      
+      <p:sp>
+        
+        
+        <p:nvSpPr>
+          
+          
+          <p:cNvPr id="22" name="Shape 20"/>
+          
+          
+          <p:cNvSpPr/>
+          
+          
+          <p:nvPr/>
+          
+        
+        </p:nvSpPr>
+        
+        
+        <p:spPr>
+          
+          
+          <a:xfrm>
+            
+            
+            <a:off x="4937760" y="3246120"/>
+            
+            
+            <a:ext cx="502920" cy="502920"/>
+            
+          
+          </a:xfrm>
+          
+          
+          <a:prstGeom prst="ellipse">
+            
+            
+            <a:avLst/>
+            
+          
+          </a:prstGeom>
+          
+          
+          <a:solidFill>
+            
+            
+            <a:srgbClr val="21295C"/>
+            
+          
+          </a:solidFill>
+          
+          
+          <a:ln/>
+          
+        
+        </p:spPr>
+        
+      
+      </p:sp>
+      
+      
+      <p:sp>
+        
+        
+        <p:nvSpPr>
+          
+          
+          <p:cNvPr id="23" name="Text 21"/>
+          
+          
+          <p:cNvSpPr/>
+          
+          
+          <p:nvPr/>
+          
+        
+        </p:nvSpPr>
+        
+        
+        <p:spPr>
+          
+          
+          <a:xfrm>
+            
+            
+            <a:off x="4937760" y="3246120"/>
+            
+            
+            <a:ext cx="502920" cy="502920"/>
+            
+          
+          </a:xfrm>
+          
+          
+          <a:prstGeom prst="rect">
+            
+            
+            <a:avLst/>
+            
+          
+          </a:prstGeom>
+          
+          
+          <a:noFill/>
+          
+          
+          <a:ln/>
+          
+        
+        </p:spPr>
+        
+        
+        <p:txBody>
+          
+          
+          <a:bodyPr wrap="square" lIns="0" tIns="0" rIns="0" bIns="0" rtlCol="0" anchor="ctr"/>
+          
+          
+          <a:lstStyle/>
+          
+          
+          <a:p>
+            
+            
+            <a:pPr algn="ctr" indent="0" marL="0">
+              
+              
+              <a:buNone/>
+              
+            
+            </a:pPr>
+            
+            
+            <a:r>
+              
+              
+              <a:rPr lang="en-US" sz="1600" dirty="0">
+                
+                
+                <a:solidFill>
+                  
+                  
+                  <a:srgbClr val="000000"/>
+                  
+                
+                </a:solidFill>
+                
+              
+              </a:rPr>
+              
+              
+              <a:t>🎯</a:t>
+              
+            
+            </a:r>
+            
+            
+            <a:endParaRPr lang="en-US" sz="1600" dirty="0"/>
+            
+          
+          </a:p>
+          
+        
+        </p:txBody>
+        
+      
+      </p:sp>
+      
+      
+      <p:sp>
+        
+        
+        <p:nvSpPr>
+          
+          
+          <p:cNvPr id="24" name="Text 22"/>
+          
+          
+          <p:cNvSpPr/>
+          
+          
+          <p:nvPr/>
+          
+        
+        </p:nvSpPr>
+        
+        
+        <p:spPr>
+          
+          
+          <a:xfrm>
+            
+            
+            <a:off x="5532120" y="3227832"/>
+            
+            
+            <a:ext cx="3108960" cy="365760"/>
+            
+          
+          </a:xfrm>
+          
+          
+          <a:prstGeom prst="rect">
+            
+            
+            <a:avLst/>
+            
+          
+          </a:prstGeom>
+          
+          
+          <a:noFill/>
+          
+          
+          <a:ln/>
+          
+        
+        </p:spPr>
+        
+        
+        <p:txBody>
+          
+          
+          <a:bodyPr wrap="square" lIns="0" tIns="0" rIns="0" bIns="0" rtlCol="0" anchor="ctr"/>
+          
+          
+          <a:lstStyle/>
+          
+          
+          <a:p>
+            
+            
+            <a:pPr indent="0" marL="0">
+              
+              
+              <a:buNone/>
+              
+            
+            </a:pPr>
+            
+            
+            <a:r>
+              
+              
+              <a:rPr lang="en-US" sz="1400" b="1" dirty="0">
+                
+                
+                <a:solidFill>
+                  
+                  
+                  <a:srgbClr val="065A82"/>
+                  
+                
+                </a:solidFill>
+                
+                
+                <a:latin typeface="Arial" pitchFamily="34" charset="0"/>
+                
+                
+                <a:ea typeface="Arial" pitchFamily="34" charset="-122"/>
+                
+                
+                <a:cs typeface="Arial" pitchFamily="34" charset="-120"/>
+                
+              
+              </a:rPr>
+              
+              
+              <a:t>Long-Term Vision</a:t>
+              
+            
+            </a:r>
+            
+            
+            <a:endParaRPr lang="en-US" sz="1400" dirty="0"/>
+            
+          
+          </a:p>
+          
+        
+        </p:txBody>
+        
+      
+      </p:sp>
+      
+      
+      <p:sp>
+        
+        
+        <p:nvSpPr>
+          
+          
+          <p:cNvPr id="25" name="Text 23"/>
+          
+          
+          <p:cNvSpPr/>
+          
+          
+          <p:nvPr/>
+          
+        
+        </p:nvSpPr>
+        
+        
+        <p:spPr>
+          
+          
+          <a:xfrm>
+            
+            
+            <a:off x="4937760" y="3749040"/>
+            
+            
+            <a:ext cx="3657600" cy="914400"/>
+            
+          
+          </a:xfrm>
+          
+          
+          <a:prstGeom prst="rect">
+            
+            
+            <a:avLst/>
+            
+          
+          </a:prstGeom>
+          
+          
+          <a:noFill/>
+          
+          
+          <a:ln/>
+          
+        
+        </p:spPr>
+        
+        
+        <p:txBody>
+          
+          
+          <a:bodyPr wrap="square" rtlCol="0" anchor="t"/>
+          
+          
+          <a:lstStyle/>
+          
+          
+          <a:p>
+            
+            
+            <a:pPr marL="342900" indent="-342900">
+              
+              
+              <a:buSzPct val="100000"/>
+              
+              
+              <a:buChar char="•"/>
+              
+            
+            </a:pPr>
+            
+            
+            <a:r>
+              
+              
+              <a:rPr lang="en-US" sz="1000" dirty="0">
+                
+                
+                <a:solidFill>
+                  
+                  
+                  <a:srgbClr val="1E293B"/>
+                  
+                
+                </a:solidFill>
+                
+                
+                <a:latin typeface="Arial" pitchFamily="34" charset="0"/>
+                
+                
+                <a:ea typeface="Arial" pitchFamily="34" charset="-122"/>
+                
+                
+                <a:cs typeface="Arial" pitchFamily="34" charset="-120"/>
+                
+              
+              </a:rPr>
+              
+              
+              <a:t>Become Sui's infrastructure layer for probability derivatives + paid knowledge</a:t>
+              
+            
+            </a:r>
+            
+            
+            <a:endParaRPr lang="en-US" sz="1000" dirty="0"/>
+            
+          
+          </a:p>
+          
+          
+          <a:p>
+            
+            
+            <a:pPr marL="342900" indent="-342900">
+              
+              
+              <a:buSzPct val="100000"/>
+              
+              
+              <a:buChar char="•"/>
+              
+            
+            </a:pPr>
+            
+            
+            <a:r>
+              
+              
+              <a:rPr lang="en-US" sz="1000" dirty="0">
+                
+                
+                <a:solidFill>
+                  
+                  
+                  <a:srgbClr val="1E293B"/>
+                  
+                
+                </a:solidFill>
+                
+                
+                <a:latin typeface="Arial" pitchFamily="34" charset="0"/>
+                
+                
+                <a:ea typeface="Arial" pitchFamily="34" charset="-122"/>
+                
+                
+                <a:cs typeface="Arial" pitchFamily="34" charset="-120"/>
+                
+              
+              </a:rPr>
+              
+              
+              <a:t>Serve retail traders, LPs, prophets, and quant institutions</a:t>
+              
+            
+            </a:r>
+            
+            
+            <a:endParaRPr lang="en-US" sz="1000" dirty="0"/>
+            
+          
+          </a:p>
+          
+          
+          <a:p>
+            
+            
+            <a:pPr marL="342900" indent="-342900">
+              
+              
+              <a:buSzPct val="100000"/>
+              
+              
+              <a:buChar char="•"/>
+              
+            
+            </a:pPr>
+            
+            
+            <a:r>
+              
+              
+              <a:rPr lang="en-US" sz="1000" dirty="0">
+                
+                
+                <a:solidFill>
+                  
+                  
+                  <a:srgbClr val="1E293B"/>
+                  
+                
+                </a:solidFill>
+                
+                
+                <a:latin typeface="Arial" pitchFamily="34" charset="0"/>
+                
+                
+                <a:ea typeface="Arial" pitchFamily="34" charset="-122"/>
+                
+                
+                <a:cs typeface="Arial" pitchFamily="34" charset="-120"/>
+                
+              
+              </a:rPr>
+              
+              
+              <a:t>Full EventRoot migration · SDK / Quant API open access</a:t>
+              
+            
+            </a:r>
+            
+            
+            <a:endParaRPr lang="en-US" sz="1000" dirty="0"/>
+            
+          
+          </a:p>
+          
+          
+          <a:p>
+            
+            
+            <a:pPr marL="342900" indent="-342900">
+              
+              
+              <a:buSzPct val="100000"/>
+              
+              
+              <a:buChar char="•"/>
+              
+            
+            </a:pPr>
+            
+            
+            <a:r>
+              
+              
+              <a:rPr lang="en-US" sz="1000" dirty="0">
+                
+                
+                <a:solidFill>
+                  
+                  
+                  <a:srgbClr val="1E293B"/>
+                  
+                
+                </a:solidFill>
+                
+                
+                <a:latin typeface="Arial" pitchFamily="34" charset="0"/>
+                
+                
+                <a:ea typeface="Arial" pitchFamily="34" charset="-122"/>
+                
+                
+                <a:cs typeface="Arial" pitchFamily="34" charset="-120"/>
+                
+              
+              </a:rPr>
+              
+              
+              <a:t>Replace fragmented Yes/No with on-chain PDF · replace fake signals with forced audit</a:t>
+              
+            
+            </a:r>
+            
+            
+            <a:endParaRPr lang="en-US" sz="1000" dirty="0"/>
+            
+          
+          </a:p>
+          
+        
+        </p:txBody>
+        
+      
+      </p:sp>
+      
+    
+    </p:spTree>
+    
+  
+  </p:cSld>
+  
+  
+  <p:clrMapOvr>
+    
+    
+    <a:masterClrMapping/>
+    
+  
+  </p:clrMapOvr>
+  
+
+</p:sld>
+
 </file>
 
 <file path=ppt/slides/slide2.xml><?xml version="1.0" encoding="utf-8"?>

--- a/docs/presentations/X-Market-Sui-Overview.en.pptx
+++ b/docs/presentations/X-Market-Sui-Overview.en.pptx
@@ -3072,7 +3072,7 @@
                 <a:ea typeface="Arial" pitchFamily="34" charset="-122"/>
                 <a:cs typeface="Arial" pitchFamily="34" charset="-120"/>
               </a:rPr>
-              <a:t>Lower cognitive barrier, focus on trading</a:t>
+              <a:t>On-chain txs paid with wallet SUI gas</a:t>
             </a:r>
             <a:endParaRPr lang="en-US" sz="1000" dirty="0"/>
           </a:p>
@@ -4900,7 +4900,7 @@
                 <a:ea typeface="Arial" pitchFamily="34" charset="-122"/>
                 <a:cs typeface="Arial" pitchFamily="34" charset="-120"/>
               </a:rPr>
-              <a:t>9+</a:t>
+              <a:t>8+</a:t>
             </a:r>
             <a:endParaRPr lang="en-US" sz="2800" dirty="0"/>
           </a:p>
@@ -12580,7 +12580,7 @@
               </a:rPr>
               
               
-              <a:t>9+ off-chain microservices · Docker orchestration production-ready</a:t>
+              <a:t>8+ off-chain microservices · Docker orchestration production-ready</a:t>
               
             
             </a:r>

--- a/docs/presentations/X-Market-Sui-Overview.en.pptx
+++ b/docs/presentations/X-Market-Sui-Overview.en.pptx
@@ -6,7 +6,6 @@
   </p:sldMasterIdLst>
   <p:sldIdLst>
     <p:sldId id="256" r:id="rId2"/>
-    <p:sldId id="272" r:id="rId23"/>
     <p:sldId id="257" r:id="rId3"/>
     <p:sldId id="258" r:id="rId4"/>
     <p:sldId id="259" r:id="rId5"/>
@@ -21,7 +20,6 @@
     <p:sldId id="268" r:id="rId14"/>
     <p:sldId id="269" r:id="rId15"/>
     <p:sldId id="270" r:id="rId16"/>
-    <p:sldId id="273" r:id="rId24"/>
     <p:sldId id="271" r:id="rId17"/>
   </p:sldIdLst>
   <p:notesMasterIdLst>
@@ -1175,321 +1173,6 @@
     <a:masterClrMapping/>
   </p:clrMapOvr>
 </p:notes>
-</file>
-
-<file path=ppt/notesSlides/notesSlide18.xml><?xml version="1.0" encoding="utf-8"?>
-<p:notes xmlns:a="http://schemas.openxmlformats.org/drawingml/2006/main" xmlns:r="http://schemas.openxmlformats.org/officeDocument/2006/relationships" xmlns:p="http://schemas.openxmlformats.org/presentationml/2006/main">
-  
-  
-  <p:cSld>
-    
-    
-    <p:spTree>
-      
-      
-      <p:nvGrpSpPr>
-        
-        
-        <p:cNvPr id="1" name=""/>
-        
-        
-        <p:cNvGrpSpPr/>
-        
-        
-        <p:nvPr/>
-        
-      
-      </p:nvGrpSpPr>
-      
-      
-      <p:grpSpPr>
-        
-        
-        <a:xfrm>
-          
-          
-          <a:off x="0" y="0"/>
-          
-          
-          <a:ext cx="0" cy="0"/>
-          
-          
-          <a:chOff x="0" y="0"/>
-          
-          
-          <a:chExt cx="0" cy="0"/>
-          
-        
-        </a:xfrm>
-        
-      
-      </p:grpSpPr>
-      
-      
-      <p:sp>
-        
-        
-        <p:nvSpPr>
-          
-          
-          <p:cNvPr id="2" name="Slide Image Placeholder 1"/>
-          
-          
-          <p:cNvSpPr>
-            
-            
-            <a:spLocks noGrp="1" noRot="1" noChangeAspect="1"/>
-            
-          
-          </p:cNvSpPr>
-          
-          
-          <p:nvPr>
-            
-            
-            <p:ph type="sldImg"/>
-            
-          
-          </p:nvPr>
-          
-        
-        </p:nvSpPr>
-        
-        
-        <p:spPr/>
-        
-      
-      </p:sp>
-      
-      
-      <p:sp>
-        
-        
-        <p:nvSpPr>
-          
-          
-          <p:cNvPr id="3" name="Notes Placeholder 2"/>
-          
-          
-          <p:cNvSpPr>
-            
-            
-            <a:spLocks noGrp="1"/>
-            
-          
-          </p:cNvSpPr>
-          
-          
-          <p:nvPr>
-            
-            
-            <p:ph type="body" idx="1"/>
-            
-          
-          </p:nvPr>
-          
-        
-        </p:nvSpPr>
-        
-        
-        <p:spPr/>
-        
-        
-        <p:txBody>
-          
-          
-          <a:bodyPr/>
-          
-          
-          <a:lstStyle/>
-          
-          
-          <a:p>
-            <a:r>
-              <a:rPr lang="en-US" dirty="0"/>
-              <a:t>Video narration (~75 sec)</a:t>
-            </a:r>
-            <a:endParaRPr lang="en-US" dirty="0"/>
-          </a:p>
-          <a:p>
-            <a:r>
-              <a:rPr lang="en-US" dirty="0"/>
-              <a:t></a:t>
-            </a:r>
-            <a:endParaRPr lang="en-US" dirty="0"/>
-          </a:p>
-          <a:p>
-            <a:r>
-              <a:rPr lang="en-US" dirty="0"/>
-              <a:t>Having walked through the full stack, we close with Conclusion & Future.</a:t>
-            </a:r>
-            <a:endParaRPr lang="en-US" dirty="0"/>
-          </a:p>
-          <a:p>
-            <a:r>
-              <a:rPr lang="en-US" dirty="0"/>
-              <a:t></a:t>
-            </a:r>
-            <a:endParaRPr lang="en-US" dirty="0"/>
-          </a:p>
-          <a:p>
-            <a:r>
-              <a:rPr lang="en-US" dirty="0"/>
-              <a:t>On conclusion: X-Market is not "another prediction market." It upgrades prediction from Yes/No gambling to PDF probability derivatives. Trading and SuiProphet share one EventRoot and one Oracle — bets, unlocks, and settlement point to a single truth for each event. On-chain PDF pricing plus Seal-mandated audit creates a sustainable ecosystem for traders, LPs, prophets, and the protocol. Testnet v2 is live end-to-end — this is validated product, not a concept.</a:t>
-            </a:r>
-            <a:endParaRPr lang="en-US" dirty="0"/>
-          </a:p>
-          <a:p>
-            <a:r>
-              <a:rPr lang="en-US" dirty="0"/>
-              <a:t></a:t>
-            </a:r>
-            <a:endParaRPr lang="en-US" dirty="0"/>
-          </a:p>
-          <a:p>
-            <a:r>
-              <a:rPr lang="en-US" dirty="0"/>
-              <a:t>On the near term: Phase 3 wraps Variance Swap and Slash governance, plus the ZK Attestation cold path from mock to live — Brevis Prover registers proof_hash with a 3600s challenge window, never blocking the buy_* hot path. On PDF: Beta distribution for vote share, dual-pool joint probability, and more vertical markets in parallel. External audit then Mainnet; Circle USDC mainnet settlement lands together. GeoBlock is frontend-only IP-based web access restriction for compliance — not KYC, and it does not block direct on-chain interaction.</a:t>
-            </a:r>
-            <a:endParaRPr lang="en-US" dirty="0"/>
-          </a:p>
-          <a:p>
-            <a:r>
-              <a:rPr lang="en-US" dirty="0"/>
-              <a:t></a:t>
-            </a:r>
-            <a:endParaRPr lang="en-US" dirty="0"/>
-          </a:p>
-          <a:p>
-            <a:r>
-              <a:rPr lang="en-US" dirty="0"/>
-              <a:t>Long term: become Sui's infrastructure layer for probability derivatives and on-chain paid knowledge — serving retail, LPs, professional prophets, and quant firms. Full EventRoot migration and open SDK / Quant API. Replace fragmented Yes/No with on-chain PDF; replace fake signal-selling with forced audit. That's the endgame.</a:t>
-            </a:r>
-            <a:endParaRPr lang="en-US" dirty="0"/>
-          </a:p>
-          <a:p>
-            <a:r>
-              <a:rPr lang="en-US" dirty="0"/>
-              <a:t></a:t>
-            </a:r>
-            <a:endParaRPr lang="en-US" dirty="0"/>
-          </a:p>
-          <a:p>
-            <a:r>
-              <a:rPr lang="en-US" dirty="0"/>
-              <a:t>Transition: advance to Thank You — open Q&A.</a:t>
-            </a:r>
-            <a:endParaRPr lang="en-US" dirty="0"/>
-          </a:p>
-          
-        
-        </p:txBody>
-        
-      
-      </p:sp>
-      
-      
-      <p:sp>
-        
-        
-        <p:nvSpPr>
-          
-          
-          <p:cNvPr id="4" name="Slide Number Placeholder 3"/>
-          
-          
-          <p:cNvSpPr>
-            
-            
-            <a:spLocks noGrp="1"/>
-            
-          
-          </p:cNvSpPr>
-          
-          
-          <p:nvPr>
-            
-            
-            <p:ph type="sldNum" sz="quarter" idx="10"/>
-            
-          
-          </p:nvPr>
-          
-        
-        </p:nvSpPr>
-        
-        
-        <p:spPr/>
-        
-        
-        <p:txBody>
-          
-          
-          <a:bodyPr/>
-          
-          
-          <a:lstStyle/>
-          
-          
-          <a:p>
-            
-            
-            <a:fld id="{F7021451-1387-4CA6-816F-3879F97B5CBC}" type="slidenum">
-              
-              
-              <a:rPr lang="en-US"/>
-              
-              
-              <a:t>17</a:t>
-              
-            
-            </a:fld>
-            
-            
-            <a:endParaRPr lang="en-US"/>
-            
-          
-          </a:p>
-          
-        
-        </p:txBody>
-        
-      
-      </p:sp>
-      
-    
-    </p:spTree>
-    
-    
-    <p:extLst>
-      
-      
-      <p:ext uri="{BB962C8B-B14F-4D97-AF65-F5344CB8AC3E}">
-        
-        
-        <p14:creationId xmlns:p14="http://schemas.microsoft.com/office/powerpoint/2010/main" val="1024086991"/>
-        
-      
-      </p:ext>
-      
-    
-    </p:extLst>
-    
-  
-  </p:cSld>
-  
-  
-  <p:clrMapOvr>
-    
-    
-    <a:masterClrMapping/>
-    
-  
-  </p:clrMapOvr>
-  
-
-</p:notes>
-
 </file>
 
 <file path=ppt/notesSlides/notesSlide2.xml><?xml version="1.0" encoding="utf-8"?>
@@ -2883,8 +2566,8 @@
         </p:nvSpPr>
         <p:spPr>
           <a:xfrm>
-            <a:off x="365760" y="1188720"/>
-            <a:ext cx="4023360" cy="1691640"/>
+            <a:off x="365760" y="1078992"/>
+            <a:ext cx="4023360" cy="1940814"/>
           </a:xfrm>
           <a:prstGeom prst="rect">
             <a:avLst/>
@@ -2915,8 +2598,8 @@
         </p:nvSpPr>
         <p:spPr>
           <a:xfrm>
-            <a:off x="548640" y="1371600"/>
-            <a:ext cx="502920" cy="502920"/>
+            <a:off x="530352" y="1225296"/>
+            <a:ext cx="457200" cy="457200"/>
           </a:xfrm>
           <a:prstGeom prst="ellipse">
             <a:avLst/>
@@ -2935,8 +2618,8 @@
         </p:nvSpPr>
         <p:spPr>
           <a:xfrm>
-            <a:off x="548640" y="1371600"/>
-            <a:ext cx="502920" cy="502920"/>
+            <a:off x="530352" y="1225296"/>
+            <a:ext cx="457200" cy="457200"/>
           </a:xfrm>
           <a:prstGeom prst="rect">
             <a:avLst/>
@@ -2952,14 +2635,14 @@
               <a:buNone/>
             </a:pPr>
             <a:r>
-              <a:rPr lang="en-US" sz="1600" dirty="0">
+              <a:rPr lang="en-US" sz="1400" dirty="0">
                 <a:solidFill>
                   <a:srgbClr val="000000"/>
                 </a:solidFill>
               </a:rPr>
               <a:t>💵</a:t>
             </a:r>
-            <a:endParaRPr lang="en-US" sz="1600" dirty="0"/>
+            <a:endParaRPr lang="en-US" sz="1400" dirty="0"/>
           </a:p>
         </p:txBody>
       </p:sp>
@@ -2971,8 +2654,8 @@
         </p:nvSpPr>
         <p:spPr>
           <a:xfrm>
-            <a:off x="1143000" y="1353312"/>
-            <a:ext cx="3108960" cy="365760"/>
+            <a:off x="1078992" y="1188720"/>
+            <a:ext cx="3218688" cy="420624"/>
           </a:xfrm>
           <a:prstGeom prst="rect">
             <a:avLst/>
@@ -2981,14 +2664,14 @@
           <a:ln/>
         </p:spPr>
         <p:txBody>
-          <a:bodyPr wrap="square" lIns="0" tIns="0" rIns="0" bIns="0" rtlCol="0" anchor="ctr"/>
+          <a:bodyPr wrap="square" lIns="0" tIns="0" rIns="0" bIns="0" rtlCol="0" anchor="t"/>
           <a:lstStyle/>
           <a:p>
             <a:pPr indent="0" marL="0">
               <a:buNone/>
             </a:pPr>
             <a:r>
-              <a:rPr lang="en-US" sz="1400" b="1" dirty="0">
+              <a:rPr lang="en-US" sz="1100" b="1" dirty="0">
                 <a:solidFill>
                   <a:srgbClr val="065A82"/>
                 </a:solidFill>
@@ -2998,7 +2681,7 @@
               </a:rPr>
               <a:t>Native USDC Experience</a:t>
             </a:r>
-            <a:endParaRPr lang="en-US" sz="1400" dirty="0"/>
+            <a:endParaRPr lang="en-US" sz="1100" dirty="0"/>
           </a:p>
         </p:txBody>
       </p:sp>
@@ -3010,8 +2693,8 @@
         </p:nvSpPr>
         <p:spPr>
           <a:xfrm>
-            <a:off x="548640" y="1874520"/>
-            <a:ext cx="3657600" cy="914400"/>
+            <a:off x="512064" y="1664208"/>
+            <a:ext cx="3767328" cy="1282446"/>
           </a:xfrm>
           <a:prstGeom prst="rect">
             <a:avLst/>
@@ -3020,7 +2703,7 @@
           <a:ln/>
         </p:spPr>
         <p:txBody>
-          <a:bodyPr wrap="square" rtlCol="0" anchor="t"/>
+          <a:bodyPr wrap="square" lIns="0" tIns="0" rIns="0" bIns="0" rtlCol="0" anchor="t"/>
           <a:lstStyle/>
           <a:p>
             <a:pPr marL="342900" indent="-342900">
@@ -3028,7 +2711,7 @@
               <a:buChar char="•"/>
             </a:pPr>
             <a:r>
-              <a:rPr lang="en-US" sz="1000" dirty="0">
+              <a:rPr lang="en-US" sz="750" dirty="0">
                 <a:solidFill>
                   <a:srgbClr val="1E293B"/>
                 </a:solidFill>
@@ -3038,7 +2721,7 @@
               </a:rPr>
               <a:t>Circle native USDC, not custom test tokens</a:t>
             </a:r>
-            <a:endParaRPr lang="en-US" sz="1000" dirty="0"/>
+            <a:endParaRPr lang="en-US" sz="750" dirty="0"/>
           </a:p>
           <a:p>
             <a:pPr marL="342900" indent="-342900">
@@ -3046,7 +2729,7 @@
               <a:buChar char="•"/>
             </a:pPr>
             <a:r>
-              <a:rPr lang="en-US" sz="1000" dirty="0">
+              <a:rPr lang="en-US" sz="750" dirty="0">
                 <a:solidFill>
                   <a:srgbClr val="1E293B"/>
                 </a:solidFill>
@@ -3056,7 +2739,7 @@
               </a:rPr>
               <a:t>Buy/unlock/payout all in stablecoin</a:t>
             </a:r>
-            <a:endParaRPr lang="en-US" sz="1000" dirty="0"/>
+            <a:endParaRPr lang="en-US" sz="750" dirty="0"/>
           </a:p>
           <a:p>
             <a:pPr marL="342900" indent="-342900">
@@ -3064,7 +2747,7 @@
               <a:buChar char="•"/>
             </a:pPr>
             <a:r>
-              <a:rPr lang="en-US" sz="1000" dirty="0">
+              <a:rPr lang="en-US" sz="750" dirty="0">
                 <a:solidFill>
                   <a:srgbClr val="1E293B"/>
                 </a:solidFill>
@@ -3072,9 +2755,9 @@
                 <a:ea typeface="Arial" pitchFamily="34" charset="-122"/>
                 <a:cs typeface="Arial" pitchFamily="34" charset="-120"/>
               </a:rPr>
-              <a:t>On-chain txs paid with wallet SUI gas</a:t>
-            </a:r>
-            <a:endParaRPr lang="en-US" sz="1000" dirty="0"/>
+              <a:t>Lower cognitive barrier, focus on trading</a:t>
+            </a:r>
+            <a:endParaRPr lang="en-US" sz="750" dirty="0"/>
           </a:p>
         </p:txBody>
       </p:sp>
@@ -3086,8 +2769,8 @@
         </p:nvSpPr>
         <p:spPr>
           <a:xfrm>
-            <a:off x="4754880" y="1188720"/>
-            <a:ext cx="4023360" cy="1691640"/>
+            <a:off x="4754880" y="1078992"/>
+            <a:ext cx="4023360" cy="1940814"/>
           </a:xfrm>
           <a:prstGeom prst="rect">
             <a:avLst/>
@@ -3118,8 +2801,8 @@
         </p:nvSpPr>
         <p:spPr>
           <a:xfrm>
-            <a:off x="4937760" y="1371600"/>
-            <a:ext cx="502920" cy="502920"/>
+            <a:off x="4919472" y="1225296"/>
+            <a:ext cx="457200" cy="457200"/>
           </a:xfrm>
           <a:prstGeom prst="ellipse">
             <a:avLst/>
@@ -3138,8 +2821,8 @@
         </p:nvSpPr>
         <p:spPr>
           <a:xfrm>
-            <a:off x="4937760" y="1371600"/>
-            <a:ext cx="502920" cy="502920"/>
+            <a:off x="4919472" y="1225296"/>
+            <a:ext cx="457200" cy="457200"/>
           </a:xfrm>
           <a:prstGeom prst="rect">
             <a:avLst/>
@@ -3155,14 +2838,14 @@
               <a:buNone/>
             </a:pPr>
             <a:r>
-              <a:rPr lang="en-US" sz="1600" dirty="0">
+              <a:rPr lang="en-US" sz="1400" dirty="0">
                 <a:solidFill>
                   <a:srgbClr val="000000"/>
                 </a:solidFill>
               </a:rPr>
               <a:t>📊</a:t>
             </a:r>
-            <a:endParaRPr lang="en-US" sz="1600" dirty="0"/>
+            <a:endParaRPr lang="en-US" sz="1400" dirty="0"/>
           </a:p>
         </p:txBody>
       </p:sp>
@@ -3174,8 +2857,8 @@
         </p:nvSpPr>
         <p:spPr>
           <a:xfrm>
-            <a:off x="5532120" y="1353312"/>
-            <a:ext cx="3108960" cy="365760"/>
+            <a:off x="5468112" y="1188720"/>
+            <a:ext cx="3218688" cy="420624"/>
           </a:xfrm>
           <a:prstGeom prst="rect">
             <a:avLst/>
@@ -3184,14 +2867,14 @@
           <a:ln/>
         </p:spPr>
         <p:txBody>
-          <a:bodyPr wrap="square" lIns="0" tIns="0" rIns="0" bIns="0" rtlCol="0" anchor="ctr"/>
+          <a:bodyPr wrap="square" lIns="0" tIns="0" rIns="0" bIns="0" rtlCol="0" anchor="t"/>
           <a:lstStyle/>
           <a:p>
             <a:pPr indent="0" marL="0">
               <a:buNone/>
             </a:pPr>
             <a:r>
-              <a:rPr lang="en-US" sz="1400" b="1" dirty="0">
+              <a:rPr lang="en-US" sz="1100" b="1" dirty="0">
                 <a:solidFill>
                   <a:srgbClr val="065A82"/>
                 </a:solidFill>
@@ -3201,7 +2884,7 @@
               </a:rPr>
               <a:t>Pricing Preview &amp; Guidance</a:t>
             </a:r>
-            <a:endParaRPr lang="en-US" sz="1400" dirty="0"/>
+            <a:endParaRPr lang="en-US" sz="1100" dirty="0"/>
           </a:p>
         </p:txBody>
       </p:sp>
@@ -3213,8 +2896,8 @@
         </p:nvSpPr>
         <p:spPr>
           <a:xfrm>
-            <a:off x="4937760" y="1874520"/>
-            <a:ext cx="3657600" cy="914400"/>
+            <a:off x="4901184" y="1664208"/>
+            <a:ext cx="3767328" cy="1282446"/>
           </a:xfrm>
           <a:prstGeom prst="rect">
             <a:avLst/>
@@ -3223,7 +2906,7 @@
           <a:ln/>
         </p:spPr>
         <p:txBody>
-          <a:bodyPr wrap="square" rtlCol="0" anchor="t"/>
+          <a:bodyPr wrap="square" lIns="0" tIns="0" rIns="0" bIns="0" rtlCol="0" anchor="t"/>
           <a:lstStyle/>
           <a:p>
             <a:pPr marL="342900" indent="-342900">
@@ -3231,7 +2914,7 @@
               <a:buChar char="•"/>
             </a:pPr>
             <a:r>
-              <a:rPr lang="en-US" sz="1000" dirty="0">
+              <a:rPr lang="en-US" sz="750" dirty="0">
                 <a:solidFill>
                   <a:srgbClr val="1E293B"/>
                 </a:solidFill>
@@ -3241,7 +2924,7 @@
               </a:rPr>
               <a:t>Pricing Engine off-chain quote preview</a:t>
             </a:r>
-            <a:endParaRPr lang="en-US" sz="1000" dirty="0"/>
+            <a:endParaRPr lang="en-US" sz="750" dirty="0"/>
           </a:p>
           <a:p>
             <a:pPr marL="342900" indent="-342900">
@@ -3249,7 +2932,7 @@
               <a:buChar char="•"/>
             </a:pPr>
             <a:r>
-              <a:rPr lang="en-US" sz="1000" dirty="0">
+              <a:rPr lang="en-US" sz="750" dirty="0">
                 <a:solidFill>
                   <a:srgbClr val="1E293B"/>
                 </a:solidFill>
@@ -3259,7 +2942,7 @@
               </a:rPr>
               <a:t>TradePanel real-time win rate &amp; ROI estimate</a:t>
             </a:r>
-            <a:endParaRPr lang="en-US" sz="1000" dirty="0"/>
+            <a:endParaRPr lang="en-US" sz="750" dirty="0"/>
           </a:p>
           <a:p>
             <a:pPr marL="342900" indent="-342900">
@@ -3267,7 +2950,7 @@
               <a:buChar char="•"/>
             </a:pPr>
             <a:r>
-              <a:rPr lang="en-US" sz="1000" dirty="0">
+              <a:rPr lang="en-US" sz="750" dirty="0">
                 <a:solidFill>
                   <a:srgbClr val="1E293B"/>
                 </a:solidFill>
@@ -3277,7 +2960,7 @@
               </a:rPr>
               <a:t>Reduces invalid on-chain submissions</a:t>
             </a:r>
-            <a:endParaRPr lang="en-US" sz="1000" dirty="0"/>
+            <a:endParaRPr lang="en-US" sz="750" dirty="0"/>
           </a:p>
         </p:txBody>
       </p:sp>
@@ -3289,8 +2972,8 @@
         </p:nvSpPr>
         <p:spPr>
           <a:xfrm>
-            <a:off x="365760" y="3063240"/>
-            <a:ext cx="4023360" cy="1691640"/>
+            <a:off x="365760" y="3092958"/>
+            <a:ext cx="4023360" cy="1940814"/>
           </a:xfrm>
           <a:prstGeom prst="rect">
             <a:avLst/>
@@ -3321,8 +3004,8 @@
         </p:nvSpPr>
         <p:spPr>
           <a:xfrm>
-            <a:off x="548640" y="3246120"/>
-            <a:ext cx="502920" cy="502920"/>
+            <a:off x="530352" y="3239262"/>
+            <a:ext cx="457200" cy="457200"/>
           </a:xfrm>
           <a:prstGeom prst="ellipse">
             <a:avLst/>
@@ -3341,8 +3024,8 @@
         </p:nvSpPr>
         <p:spPr>
           <a:xfrm>
-            <a:off x="548640" y="3246120"/>
-            <a:ext cx="502920" cy="502920"/>
+            <a:off x="530352" y="3239262"/>
+            <a:ext cx="457200" cy="457200"/>
           </a:xfrm>
           <a:prstGeom prst="rect">
             <a:avLst/>
@@ -3358,14 +3041,14 @@
               <a:buNone/>
             </a:pPr>
             <a:r>
-              <a:rPr lang="en-US" sz="1600" dirty="0">
+              <a:rPr lang="en-US" sz="1400" dirty="0">
                 <a:solidFill>
                   <a:srgbClr val="000000"/>
                 </a:solidFill>
               </a:rPr>
               <a:t>🌐</a:t>
             </a:r>
-            <a:endParaRPr lang="en-US" sz="1600" dirty="0"/>
+            <a:endParaRPr lang="en-US" sz="1400" dirty="0"/>
           </a:p>
         </p:txBody>
       </p:sp>
@@ -3377,8 +3060,8 @@
         </p:nvSpPr>
         <p:spPr>
           <a:xfrm>
-            <a:off x="1143000" y="3227832"/>
-            <a:ext cx="3108960" cy="365760"/>
+            <a:off x="1078992" y="3202686"/>
+            <a:ext cx="3218688" cy="420624"/>
           </a:xfrm>
           <a:prstGeom prst="rect">
             <a:avLst/>
@@ -3387,14 +3070,14 @@
           <a:ln/>
         </p:spPr>
         <p:txBody>
-          <a:bodyPr wrap="square" lIns="0" tIns="0" rIns="0" bIns="0" rtlCol="0" anchor="ctr"/>
+          <a:bodyPr wrap="square" lIns="0" tIns="0" rIns="0" bIns="0" rtlCol="0" anchor="t"/>
           <a:lstStyle/>
           <a:p>
             <a:pPr indent="0" marL="0">
               <a:buNone/>
             </a:pPr>
             <a:r>
-              <a:rPr lang="en-US" sz="1400" b="1" dirty="0">
+              <a:rPr lang="en-US" sz="1100" b="1" dirty="0">
                 <a:solidFill>
                   <a:srgbClr val="065A82"/>
                 </a:solidFill>
@@ -3404,7 +3087,7 @@
               </a:rPr>
               <a:t>Web + Mobile Dual Platform</a:t>
             </a:r>
-            <a:endParaRPr lang="en-US" sz="1400" dirty="0"/>
+            <a:endParaRPr lang="en-US" sz="1100" dirty="0"/>
           </a:p>
         </p:txBody>
       </p:sp>
@@ -3416,8 +3099,8 @@
         </p:nvSpPr>
         <p:spPr>
           <a:xfrm>
-            <a:off x="548640" y="3749040"/>
-            <a:ext cx="3657600" cy="914400"/>
+            <a:off x="512064" y="3678174"/>
+            <a:ext cx="3767328" cy="1282446"/>
           </a:xfrm>
           <a:prstGeom prst="rect">
             <a:avLst/>
@@ -3426,7 +3109,7 @@
           <a:ln/>
         </p:spPr>
         <p:txBody>
-          <a:bodyPr wrap="square" rtlCol="0" anchor="t"/>
+          <a:bodyPr wrap="square" lIns="0" tIns="0" rIns="0" bIns="0" rtlCol="0" anchor="t"/>
           <a:lstStyle/>
           <a:p>
             <a:pPr marL="342900" indent="-342900">
@@ -3434,7 +3117,7 @@
               <a:buChar char="•"/>
             </a:pPr>
             <a:r>
-              <a:rPr lang="en-US" sz="1000" dirty="0">
+              <a:rPr lang="en-US" sz="750" dirty="0">
                 <a:solidFill>
                   <a:srgbClr val="1E293B"/>
                 </a:solidFill>
@@ -3444,7 +3127,7 @@
               </a:rPr>
               <a:t>Next.js 15 + @mysten/dapp-kit</a:t>
             </a:r>
-            <a:endParaRPr lang="en-US" sz="1000" dirty="0"/>
+            <a:endParaRPr lang="en-US" sz="750" dirty="0"/>
           </a:p>
           <a:p>
             <a:pPr marL="342900" indent="-342900">
@@ -3452,7 +3135,7 @@
               <a:buChar char="•"/>
             </a:pPr>
             <a:r>
-              <a:rPr lang="en-US" sz="1000" dirty="0">
+              <a:rPr lang="en-US" sz="750" dirty="0">
                 <a:solidFill>
                   <a:srgbClr val="1E293B"/>
                 </a:solidFill>
@@ -3462,7 +3145,7 @@
               </a:rPr>
               <a:t>Flutter mobile + Rust pricing preview</a:t>
             </a:r>
-            <a:endParaRPr lang="en-US" sz="1000" dirty="0"/>
+            <a:endParaRPr lang="en-US" sz="750" dirty="0"/>
           </a:p>
           <a:p>
             <a:pPr marL="342900" indent="-342900">
@@ -3470,7 +3153,7 @@
               <a:buChar char="•"/>
             </a:pPr>
             <a:r>
-              <a:rPr lang="en-US" sz="1000" dirty="0">
+              <a:rPr lang="en-US" sz="750" dirty="0">
                 <a:solidFill>
                   <a:srgbClr val="1E293B"/>
                 </a:solidFill>
@@ -3480,7 +3163,7 @@
               </a:rPr>
               <a:t>/markets · /lp · /positions · /prophet · /leaderboard</a:t>
             </a:r>
-            <a:endParaRPr lang="en-US" sz="1000" dirty="0"/>
+            <a:endParaRPr lang="en-US" sz="750" dirty="0"/>
           </a:p>
         </p:txBody>
       </p:sp>
@@ -3492,8 +3175,8 @@
         </p:nvSpPr>
         <p:spPr>
           <a:xfrm>
-            <a:off x="4754880" y="3063240"/>
-            <a:ext cx="4023360" cy="1691640"/>
+            <a:off x="4754880" y="3092958"/>
+            <a:ext cx="4023360" cy="1940814"/>
           </a:xfrm>
           <a:prstGeom prst="rect">
             <a:avLst/>
@@ -3524,8 +3207,8 @@
         </p:nvSpPr>
         <p:spPr>
           <a:xfrm>
-            <a:off x="4937760" y="3246120"/>
-            <a:ext cx="502920" cy="502920"/>
+            <a:off x="4919472" y="3239262"/>
+            <a:ext cx="457200" cy="457200"/>
           </a:xfrm>
           <a:prstGeom prst="ellipse">
             <a:avLst/>
@@ -3544,8 +3227,8 @@
         </p:nvSpPr>
         <p:spPr>
           <a:xfrm>
-            <a:off x="4937760" y="3246120"/>
-            <a:ext cx="502920" cy="502920"/>
+            <a:off x="4919472" y="3239262"/>
+            <a:ext cx="457200" cy="457200"/>
           </a:xfrm>
           <a:prstGeom prst="rect">
             <a:avLst/>
@@ -3561,14 +3244,14 @@
               <a:buNone/>
             </a:pPr>
             <a:r>
-              <a:rPr lang="en-US" sz="1600" dirty="0">
+              <a:rPr lang="en-US" sz="1400" dirty="0">
                 <a:solidFill>
                   <a:srgbClr val="000000"/>
                 </a:solidFill>
               </a:rPr>
               <a:t>📖</a:t>
             </a:r>
-            <a:endParaRPr lang="en-US" sz="1600" dirty="0"/>
+            <a:endParaRPr lang="en-US" sz="1400" dirty="0"/>
           </a:p>
         </p:txBody>
       </p:sp>
@@ -3580,8 +3263,8 @@
         </p:nvSpPr>
         <p:spPr>
           <a:xfrm>
-            <a:off x="5532120" y="3227832"/>
-            <a:ext cx="3108960" cy="365760"/>
+            <a:off x="5468112" y="3202686"/>
+            <a:ext cx="3218688" cy="420624"/>
           </a:xfrm>
           <a:prstGeom prst="rect">
             <a:avLst/>
@@ -3590,14 +3273,14 @@
           <a:ln/>
         </p:spPr>
         <p:txBody>
-          <a:bodyPr wrap="square" lIns="0" tIns="0" rIns="0" bIns="0" rtlCol="0" anchor="ctr"/>
+          <a:bodyPr wrap="square" lIns="0" tIns="0" rIns="0" bIns="0" rtlCol="0" anchor="t"/>
           <a:lstStyle/>
           <a:p>
             <a:pPr indent="0" marL="0">
               <a:buNone/>
             </a:pPr>
             <a:r>
-              <a:rPr lang="en-US" sz="1400" b="1" dirty="0">
+              <a:rPr lang="en-US" sz="1100" b="1" dirty="0">
                 <a:solidFill>
                   <a:srgbClr val="065A82"/>
                 </a:solidFill>
@@ -3607,7 +3290,7 @@
               </a:rPr>
               <a:t>Complete Docs &amp; FAQ</a:t>
             </a:r>
-            <a:endParaRPr lang="en-US" sz="1400" dirty="0"/>
+            <a:endParaRPr lang="en-US" sz="1100" dirty="0"/>
           </a:p>
         </p:txBody>
       </p:sp>
@@ -3619,8 +3302,8 @@
         </p:nvSpPr>
         <p:spPr>
           <a:xfrm>
-            <a:off x="4937760" y="3749040"/>
-            <a:ext cx="3657600" cy="914400"/>
+            <a:off x="4901184" y="3678174"/>
+            <a:ext cx="3767328" cy="1282446"/>
           </a:xfrm>
           <a:prstGeom prst="rect">
             <a:avLst/>
@@ -3629,7 +3312,7 @@
           <a:ln/>
         </p:spPr>
         <p:txBody>
-          <a:bodyPr wrap="square" rtlCol="0" anchor="t"/>
+          <a:bodyPr wrap="square" lIns="0" tIns="0" rIns="0" bIns="0" rtlCol="0" anchor="t"/>
           <a:lstStyle/>
           <a:p>
             <a:pPr marL="342900" indent="-342900">
@@ -3637,7 +3320,7 @@
               <a:buChar char="•"/>
             </a:pPr>
             <a:r>
-              <a:rPr lang="en-US" sz="1000" dirty="0">
+              <a:rPr lang="en-US" sz="750" dirty="0">
                 <a:solidFill>
                   <a:srgbClr val="1E293B"/>
                 </a:solidFill>
@@ -3647,7 +3330,7 @@
               </a:rPr>
               <a:t>faq-public pitch-ready Q&amp;A</a:t>
             </a:r>
-            <a:endParaRPr lang="en-US" sz="1000" dirty="0"/>
+            <a:endParaRPr lang="en-US" sz="750" dirty="0"/>
           </a:p>
           <a:p>
             <a:pPr marL="342900" indent="-342900">
@@ -3655,7 +3338,7 @@
               <a:buChar char="•"/>
             </a:pPr>
             <a:r>
-              <a:rPr lang="en-US" sz="1000" dirty="0">
+              <a:rPr lang="en-US" sz="750" dirty="0">
                 <a:solidFill>
                   <a:srgbClr val="1E293B"/>
                 </a:solidFill>
@@ -3665,7 +3348,7 @@
               </a:rPr>
               <a:t>demo-walkthrough end-to-end demo</a:t>
             </a:r>
-            <a:endParaRPr lang="en-US" sz="1000" dirty="0"/>
+            <a:endParaRPr lang="en-US" sz="750" dirty="0"/>
           </a:p>
           <a:p>
             <a:pPr marL="342900" indent="-342900">
@@ -3673,7 +3356,7 @@
               <a:buChar char="•"/>
             </a:pPr>
             <a:r>
-              <a:rPr lang="en-US" sz="1000" dirty="0">
+              <a:rPr lang="en-US" sz="750" dirty="0">
                 <a:solidFill>
                   <a:srgbClr val="1E293B"/>
                 </a:solidFill>
@@ -3683,7 +3366,7 @@
               </a:rPr>
               <a:t>Phase playbooks for staged operations</a:t>
             </a:r>
-            <a:endParaRPr lang="en-US" sz="1000" dirty="0"/>
+            <a:endParaRPr lang="en-US" sz="750" dirty="0"/>
           </a:p>
         </p:txBody>
       </p:sp>
@@ -4900,7 +4583,7 @@
                 <a:ea typeface="Arial" pitchFamily="34" charset="-122"/>
                 <a:cs typeface="Arial" pitchFamily="34" charset="-120"/>
               </a:rPr>
-              <a:t>8+</a:t>
+              <a:t>9+</a:t>
             </a:r>
             <a:endParaRPr lang="en-US" sz="2800" dirty="0"/>
           </a:p>
@@ -6335,8 +6018,8 @@
         </p:nvSpPr>
         <p:spPr>
           <a:xfrm>
-            <a:off x="365760" y="1188720"/>
-            <a:ext cx="4023360" cy="1691640"/>
+            <a:off x="365760" y="1078992"/>
+            <a:ext cx="4023360" cy="1940814"/>
           </a:xfrm>
           <a:prstGeom prst="rect">
             <a:avLst/>
@@ -6367,8 +6050,8 @@
         </p:nvSpPr>
         <p:spPr>
           <a:xfrm>
-            <a:off x="548640" y="1371600"/>
-            <a:ext cx="502920" cy="502920"/>
+            <a:off x="530352" y="1225296"/>
+            <a:ext cx="457200" cy="457200"/>
           </a:xfrm>
           <a:prstGeom prst="ellipse">
             <a:avLst/>
@@ -6387,8 +6070,8 @@
         </p:nvSpPr>
         <p:spPr>
           <a:xfrm>
-            <a:off x="548640" y="1371600"/>
-            <a:ext cx="502920" cy="502920"/>
+            <a:off x="530352" y="1225296"/>
+            <a:ext cx="457200" cy="457200"/>
           </a:xfrm>
           <a:prstGeom prst="rect">
             <a:avLst/>
@@ -6404,14 +6087,14 @@
               <a:buNone/>
             </a:pPr>
             <a:r>
-              <a:rPr lang="en-US" sz="1600" dirty="0">
+              <a:rPr lang="en-US" sz="1400" dirty="0">
                 <a:solidFill>
                   <a:srgbClr val="000000"/>
                 </a:solidFill>
               </a:rPr>
               <a:t>📈</a:t>
             </a:r>
-            <a:endParaRPr lang="en-US" sz="1600" dirty="0"/>
+            <a:endParaRPr lang="en-US" sz="1400" dirty="0"/>
           </a:p>
         </p:txBody>
       </p:sp>
@@ -6423,8 +6106,8 @@
         </p:nvSpPr>
         <p:spPr>
           <a:xfrm>
-            <a:off x="1143000" y="1353312"/>
-            <a:ext cx="3108960" cy="365760"/>
+            <a:off x="1078992" y="1188720"/>
+            <a:ext cx="3218688" cy="420624"/>
           </a:xfrm>
           <a:prstGeom prst="rect">
             <a:avLst/>
@@ -6433,14 +6116,14 @@
           <a:ln/>
         </p:spPr>
         <p:txBody>
-          <a:bodyPr wrap="square" lIns="0" tIns="0" rIns="0" bIns="0" rtlCol="0" anchor="ctr"/>
+          <a:bodyPr wrap="square" lIns="0" tIns="0" rIns="0" bIns="0" rtlCol="0" anchor="t"/>
           <a:lstStyle/>
           <a:p>
             <a:pPr indent="0" marL="0">
               <a:buNone/>
             </a:pPr>
             <a:r>
-              <a:rPr lang="en-US" sz="1400" b="1" dirty="0">
+              <a:rPr lang="en-US" sz="1100" b="1" dirty="0">
                 <a:solidFill>
                   <a:srgbClr val="065A82"/>
                 </a:solidFill>
@@ -6450,7 +6133,7 @@
               </a:rPr>
               <a:t>Product Depth</a:t>
             </a:r>
-            <a:endParaRPr lang="en-US" sz="1400" dirty="0"/>
+            <a:endParaRPr lang="en-US" sz="1100" dirty="0"/>
           </a:p>
         </p:txBody>
       </p:sp>
@@ -6462,8 +6145,8 @@
         </p:nvSpPr>
         <p:spPr>
           <a:xfrm>
-            <a:off x="548640" y="1874520"/>
-            <a:ext cx="3657600" cy="914400"/>
+            <a:off x="512064" y="1664208"/>
+            <a:ext cx="3767328" cy="1282446"/>
           </a:xfrm>
           <a:prstGeom prst="rect">
             <a:avLst/>
@@ -6472,7 +6155,7 @@
           <a:ln/>
         </p:spPr>
         <p:txBody>
-          <a:bodyPr wrap="square" rtlCol="0" anchor="t"/>
+          <a:bodyPr wrap="square" lIns="0" tIns="0" rIns="0" bIns="0" rtlCol="0" anchor="t"/>
           <a:lstStyle/>
           <a:p>
             <a:pPr marL="342900" indent="-342900">
@@ -6480,7 +6163,7 @@
               <a:buChar char="•"/>
             </a:pPr>
             <a:r>
-              <a:rPr lang="en-US" sz="1000" dirty="0">
+              <a:rPr lang="en-US" sz="750" dirty="0">
                 <a:solidFill>
                   <a:srgbClr val="1E293B"/>
                 </a:solidFill>
@@ -6490,7 +6173,7 @@
               </a:rPr>
               <a:t>Normal derivatives: Variance Swap · Structured/Range/Barrier Note</a:t>
             </a:r>
-            <a:endParaRPr lang="en-US" sz="1000" dirty="0"/>
+            <a:endParaRPr lang="en-US" sz="750" dirty="0"/>
           </a:p>
           <a:p>
             <a:pPr marL="342900" indent="-342900">
@@ -6498,7 +6181,7 @@
               <a:buChar char="•"/>
             </a:pPr>
             <a:r>
-              <a:rPr lang="en-US" sz="1000" dirty="0">
+              <a:rPr lang="en-US" sz="750" dirty="0">
                 <a:solidFill>
                   <a:srgbClr val="1E293B"/>
                 </a:solidFill>
@@ -6508,7 +6191,7 @@
               </a:rPr>
               <a:t>Beta distribution for vote share [0,100] · dual-pool joint probability</a:t>
             </a:r>
-            <a:endParaRPr lang="en-US" sz="1000" dirty="0"/>
+            <a:endParaRPr lang="en-US" sz="750" dirty="0"/>
           </a:p>
           <a:p>
             <a:pPr marL="342900" indent="-342900">
@@ -6516,7 +6199,7 @@
               <a:buChar char="•"/>
             </a:pPr>
             <a:r>
-              <a:rPr lang="en-US" sz="1000" dirty="0">
+              <a:rPr lang="en-US" sz="750" dirty="0">
                 <a:solidFill>
                   <a:srgbClr val="1E293B"/>
                 </a:solidFill>
@@ -6526,7 +6209,7 @@
               </a:rPr>
               <a:t>Position secondary transfer · more verticals (macro/sports/elections)</a:t>
             </a:r>
-            <a:endParaRPr lang="en-US" sz="1000" dirty="0"/>
+            <a:endParaRPr lang="en-US" sz="750" dirty="0"/>
           </a:p>
           <a:p>
             <a:pPr marL="342900" indent="-342900">
@@ -6534,7 +6217,7 @@
               <a:buChar char="•"/>
             </a:pPr>
             <a:r>
-              <a:rPr lang="en-US" sz="1000" dirty="0">
+              <a:rPr lang="en-US" sz="750" dirty="0">
                 <a:solidFill>
                   <a:srgbClr val="1E293B"/>
                 </a:solidFill>
@@ -6544,7 +6227,7 @@
               </a:rPr>
               <a:t>Pricing Engine SDK for quant institutional access</a:t>
             </a:r>
-            <a:endParaRPr lang="en-US" sz="1000" dirty="0"/>
+            <a:endParaRPr lang="en-US" sz="750" dirty="0"/>
           </a:p>
         </p:txBody>
       </p:sp>
@@ -6556,8 +6239,8 @@
         </p:nvSpPr>
         <p:spPr>
           <a:xfrm>
-            <a:off x="4754880" y="1188720"/>
-            <a:ext cx="4023360" cy="1691640"/>
+            <a:off x="4754880" y="1078992"/>
+            <a:ext cx="4023360" cy="1940814"/>
           </a:xfrm>
           <a:prstGeom prst="rect">
             <a:avLst/>
@@ -6588,8 +6271,8 @@
         </p:nvSpPr>
         <p:spPr>
           <a:xfrm>
-            <a:off x="4937760" y="1371600"/>
-            <a:ext cx="502920" cy="502920"/>
+            <a:off x="4919472" y="1225296"/>
+            <a:ext cx="457200" cy="457200"/>
           </a:xfrm>
           <a:prstGeom prst="ellipse">
             <a:avLst/>
@@ -6608,8 +6291,8 @@
         </p:nvSpPr>
         <p:spPr>
           <a:xfrm>
-            <a:off x="4937760" y="1371600"/>
-            <a:ext cx="502920" cy="502920"/>
+            <a:off x="4919472" y="1225296"/>
+            <a:ext cx="457200" cy="457200"/>
           </a:xfrm>
           <a:prstGeom prst="rect">
             <a:avLst/>
@@ -6625,14 +6308,14 @@
               <a:buNone/>
             </a:pPr>
             <a:r>
-              <a:rPr lang="en-US" sz="1600" dirty="0">
+              <a:rPr lang="en-US" sz="1400" dirty="0">
                 <a:solidFill>
                   <a:srgbClr val="000000"/>
                 </a:solidFill>
               </a:rPr>
               <a:t>🌐</a:t>
             </a:r>
-            <a:endParaRPr lang="en-US" sz="1600" dirty="0"/>
+            <a:endParaRPr lang="en-US" sz="1400" dirty="0"/>
           </a:p>
         </p:txBody>
       </p:sp>
@@ -6644,8 +6327,8 @@
         </p:nvSpPr>
         <p:spPr>
           <a:xfrm>
-            <a:off x="5532120" y="1353312"/>
-            <a:ext cx="3108960" cy="365760"/>
+            <a:off x="5468112" y="1188720"/>
+            <a:ext cx="3218688" cy="420624"/>
           </a:xfrm>
           <a:prstGeom prst="rect">
             <a:avLst/>
@@ -6654,14 +6337,14 @@
           <a:ln/>
         </p:spPr>
         <p:txBody>
-          <a:bodyPr wrap="square" lIns="0" tIns="0" rIns="0" bIns="0" rtlCol="0" anchor="ctr"/>
+          <a:bodyPr wrap="square" lIns="0" tIns="0" rIns="0" bIns="0" rtlCol="0" anchor="t"/>
           <a:lstStyle/>
           <a:p>
             <a:pPr indent="0" marL="0">
               <a:buNone/>
             </a:pPr>
             <a:r>
-              <a:rPr lang="en-US" sz="1400" b="1" dirty="0">
+              <a:rPr lang="en-US" sz="1100" b="1" dirty="0">
                 <a:solidFill>
                   <a:srgbClr val="065A82"/>
                 </a:solidFill>
@@ -6671,7 +6354,7 @@
               </a:rPr>
               <a:t>SuiProphet Ecosystem Growth</a:t>
             </a:r>
-            <a:endParaRPr lang="en-US" sz="1400" dirty="0"/>
+            <a:endParaRPr lang="en-US" sz="1100" dirty="0"/>
           </a:p>
         </p:txBody>
       </p:sp>
@@ -6683,8 +6366,8 @@
         </p:nvSpPr>
         <p:spPr>
           <a:xfrm>
-            <a:off x="4937760" y="1874520"/>
-            <a:ext cx="3657600" cy="914400"/>
+            <a:off x="4901184" y="1664208"/>
+            <a:ext cx="3767328" cy="1282446"/>
           </a:xfrm>
           <a:prstGeom prst="rect">
             <a:avLst/>
@@ -6693,7 +6376,7 @@
           <a:ln/>
         </p:spPr>
         <p:txBody>
-          <a:bodyPr wrap="square" rtlCol="0" anchor="t"/>
+          <a:bodyPr wrap="square" lIns="0" tIns="0" rIns="0" bIns="0" rtlCol="0" anchor="t"/>
           <a:lstStyle/>
           <a:p>
             <a:pPr marL="342900" indent="-342900">
@@ -6701,7 +6384,7 @@
               <a:buChar char="•"/>
             </a:pPr>
             <a:r>
-              <a:rPr lang="en-US" sz="1000" dirty="0">
+              <a:rPr lang="en-US" sz="750" dirty="0">
                 <a:solidFill>
                   <a:srgbClr val="1E293B"/>
                 </a:solidFill>
@@ -6711,7 +6394,7 @@
               </a:rPr>
               <a:t>≥100 registered prophets · ≥$50K/mo unlock GMV</a:t>
             </a:r>
-            <a:endParaRPr lang="en-US" sz="1000" dirty="0"/>
+            <a:endParaRPr lang="en-US" sz="750" dirty="0"/>
           </a:p>
           <a:p>
             <a:pPr marL="342900" indent="-342900">
@@ -6719,7 +6402,7 @@
               <a:buChar char="•"/>
             </a:pPr>
             <a:r>
-              <a:rPr lang="en-US" sz="1000" dirty="0">
+              <a:rPr lang="en-US" sz="750" dirty="0">
                 <a:solidFill>
                   <a:srgbClr val="1E293B"/>
                 </a:solidFill>
@@ -6729,7 +6412,7 @@
               </a:rPr>
               <a:t>Leaderboard + subscriber ROI aggregation (Indexer enhancement)</a:t>
             </a:r>
-            <a:endParaRPr lang="en-US" sz="1000" dirty="0"/>
+            <a:endParaRPr lang="en-US" sz="750" dirty="0"/>
           </a:p>
           <a:p>
             <a:pPr marL="342900" indent="-342900">
@@ -6737,7 +6420,7 @@
               <a:buChar char="•"/>
             </a:pPr>
             <a:r>
-              <a:rPr lang="en-US" sz="1000" dirty="0">
+              <a:rPr lang="en-US" sz="750" dirty="0">
                 <a:solidFill>
                   <a:srgbClr val="1E293B"/>
                 </a:solidFill>
@@ -6747,7 +6430,7 @@
               </a:rPr>
               <a:t>Seal plaintext cache · forced public audit post lock_time</a:t>
             </a:r>
-            <a:endParaRPr lang="en-US" sz="1000" dirty="0"/>
+            <a:endParaRPr lang="en-US" sz="750" dirty="0"/>
           </a:p>
           <a:p>
             <a:pPr marL="342900" indent="-342900">
@@ -6755,7 +6438,7 @@
               <a:buChar char="•"/>
             </a:pPr>
             <a:r>
-              <a:rPr lang="en-US" sz="1000" dirty="0">
+              <a:rPr lang="en-US" sz="750" dirty="0">
                 <a:solidFill>
                   <a:srgbClr val="1E293B"/>
                 </a:solidFill>
@@ -6765,7 +6448,7 @@
               </a:rPr>
               <a:t>Pure USDC stablecoin UX · Web + Mobile dual-platform</a:t>
             </a:r>
-            <a:endParaRPr lang="en-US" sz="1000" dirty="0"/>
+            <a:endParaRPr lang="en-US" sz="750" dirty="0"/>
           </a:p>
         </p:txBody>
       </p:sp>
@@ -6777,8 +6460,8 @@
         </p:nvSpPr>
         <p:spPr>
           <a:xfrm>
-            <a:off x="365760" y="3063240"/>
-            <a:ext cx="4023360" cy="1691640"/>
+            <a:off x="365760" y="3092958"/>
+            <a:ext cx="4023360" cy="1940814"/>
           </a:xfrm>
           <a:prstGeom prst="rect">
             <a:avLst/>
@@ -6809,8 +6492,8 @@
         </p:nvSpPr>
         <p:spPr>
           <a:xfrm>
-            <a:off x="548640" y="3246120"/>
-            <a:ext cx="502920" cy="502920"/>
+            <a:off x="530352" y="3239262"/>
+            <a:ext cx="457200" cy="457200"/>
           </a:xfrm>
           <a:prstGeom prst="ellipse">
             <a:avLst/>
@@ -6829,8 +6512,8 @@
         </p:nvSpPr>
         <p:spPr>
           <a:xfrm>
-            <a:off x="548640" y="3246120"/>
-            <a:ext cx="502920" cy="502920"/>
+            <a:off x="530352" y="3239262"/>
+            <a:ext cx="457200" cy="457200"/>
           </a:xfrm>
           <a:prstGeom prst="rect">
             <a:avLst/>
@@ -6846,14 +6529,14 @@
               <a:buNone/>
             </a:pPr>
             <a:r>
-              <a:rPr lang="en-US" sz="1600" dirty="0">
+              <a:rPr lang="en-US" sz="1400" dirty="0">
                 <a:solidFill>
                   <a:srgbClr val="000000"/>
                 </a:solidFill>
               </a:rPr>
               <a:t>🚀</a:t>
             </a:r>
-            <a:endParaRPr lang="en-US" sz="1600" dirty="0"/>
+            <a:endParaRPr lang="en-US" sz="1400" dirty="0"/>
           </a:p>
         </p:txBody>
       </p:sp>
@@ -6865,8 +6548,8 @@
         </p:nvSpPr>
         <p:spPr>
           <a:xfrm>
-            <a:off x="1143000" y="3227832"/>
-            <a:ext cx="3108960" cy="365760"/>
+            <a:off x="1078992" y="3202686"/>
+            <a:ext cx="3218688" cy="420624"/>
           </a:xfrm>
           <a:prstGeom prst="rect">
             <a:avLst/>
@@ -6875,14 +6558,14 @@
           <a:ln/>
         </p:spPr>
         <p:txBody>
-          <a:bodyPr wrap="square" lIns="0" tIns="0" rIns="0" bIns="0" rtlCol="0" anchor="ctr"/>
+          <a:bodyPr wrap="square" lIns="0" tIns="0" rIns="0" bIns="0" rtlCol="0" anchor="t"/>
           <a:lstStyle/>
           <a:p>
             <a:pPr indent="0" marL="0">
               <a:buNone/>
             </a:pPr>
             <a:r>
-              <a:rPr lang="en-US" sz="1400" b="1" dirty="0">
+              <a:rPr lang="en-US" sz="1100" b="1" dirty="0">
                 <a:solidFill>
                   <a:srgbClr val="065A82"/>
                 </a:solidFill>
@@ -6892,7 +6575,7 @@
               </a:rPr>
               <a:t>Mainnet &amp; Compliance</a:t>
             </a:r>
-            <a:endParaRPr lang="en-US" sz="1400" dirty="0"/>
+            <a:endParaRPr lang="en-US" sz="1100" dirty="0"/>
           </a:p>
         </p:txBody>
       </p:sp>
@@ -6904,8 +6587,8 @@
         </p:nvSpPr>
         <p:spPr>
           <a:xfrm>
-            <a:off x="548640" y="3749040"/>
-            <a:ext cx="3657600" cy="914400"/>
+            <a:off x="512064" y="3678174"/>
+            <a:ext cx="3767328" cy="1282446"/>
           </a:xfrm>
           <a:prstGeom prst="rect">
             <a:avLst/>
@@ -6914,7 +6597,7 @@
           <a:ln/>
         </p:spPr>
         <p:txBody>
-          <a:bodyPr wrap="square" rtlCol="0" anchor="t"/>
+          <a:bodyPr wrap="square" lIns="0" tIns="0" rIns="0" bIns="0" rtlCol="0" anchor="t"/>
           <a:lstStyle/>
           <a:p>
             <a:pPr marL="342900" indent="-342900">
@@ -6922,7 +6605,7 @@
               <a:buChar char="•"/>
             </a:pPr>
             <a:r>
-              <a:rPr lang="en-US" sz="1000" dirty="0">
+              <a:rPr lang="en-US" sz="750" dirty="0">
                 <a:solidFill>
                   <a:srgbClr val="1E293B"/>
                 </a:solidFill>
@@ -6930,9 +6613,9 @@
                 <a:ea typeface="Arial" pitchFamily="34" charset="-122"/>
                 <a:cs typeface="Arial" pitchFamily="34" charset="-120"/>
               </a:rPr>
-              <a:t>External security audit completion · governance multisig + Slash timelock</a:t>
-            </a:r>
-            <a:endParaRPr lang="en-US" sz="1000" dirty="0"/>
+              <a:t>External security audit · governance multisig + Slash timelock</a:t>
+            </a:r>
+            <a:endParaRPr lang="en-US" sz="750" dirty="0"/>
           </a:p>
           <a:p>
             <a:pPr marL="342900" indent="-342900">
@@ -6940,7 +6623,7 @@
               <a:buChar char="•"/>
             </a:pPr>
             <a:r>
-              <a:rPr lang="en-US" sz="1000" dirty="0">
+              <a:rPr lang="en-US" sz="750" dirty="0">
                 <a:solidFill>
                   <a:srgbClr val="1E293B"/>
                 </a:solidFill>
@@ -6950,7 +6633,7 @@
               </a:rPr>
               <a:t>Circle USDC Mainnet · GeoBlock compliance framework</a:t>
             </a:r>
-            <a:endParaRPr lang="en-US" sz="1000" dirty="0"/>
+            <a:endParaRPr lang="en-US" sz="750" dirty="0"/>
           </a:p>
           <a:p>
             <a:pPr marL="342900" indent="-342900">
@@ -6958,7 +6641,7 @@
               <a:buChar char="•"/>
             </a:pPr>
             <a:r>
-              <a:rPr lang="en-US" sz="1000" dirty="0">
+              <a:rPr lang="en-US" sz="750" dirty="0">
                 <a:solidFill>
                   <a:srgbClr val="1E293B"/>
                 </a:solidFill>
@@ -6966,9 +6649,9 @@
                 <a:ea typeface="Arial" pitchFamily="34" charset="-122"/>
                 <a:cs typeface="Arial" pitchFamily="34" charset="-120"/>
               </a:rPr>
-              <a:t>mainnet-readiness drill documentation (Slash/ZK/settlement)</a:t>
-            </a:r>
-            <a:endParaRPr lang="en-US" sz="1000" dirty="0"/>
+              <a:t>mainnet-readiness drills (Slash / ZK / settlement)</a:t>
+            </a:r>
+            <a:endParaRPr lang="en-US" sz="750" dirty="0"/>
           </a:p>
           <a:p>
             <a:pPr marL="342900" indent="-342900">
@@ -6976,7 +6659,7 @@
               <a:buChar char="•"/>
             </a:pPr>
             <a:r>
-              <a:rPr lang="en-US" sz="1000" dirty="0">
+              <a:rPr lang="en-US" sz="750" dirty="0">
                 <a:solidFill>
                   <a:srgbClr val="1E293B"/>
                 </a:solidFill>
@@ -6984,9 +6667,9 @@
                 <a:ea typeface="Arial" pitchFamily="34" charset="-122"/>
                 <a:cs typeface="Arial" pitchFamily="34" charset="-120"/>
               </a:rPr>
-              <a:t>UMA DVM optional arbitration adapter (coexists with built-in committee)</a:t>
-            </a:r>
-            <a:endParaRPr lang="en-US" sz="1000" dirty="0"/>
+              <a:t>UMA DVM optional adapter (with built-in committee)</a:t>
+            </a:r>
+            <a:endParaRPr lang="en-US" sz="750" dirty="0"/>
           </a:p>
         </p:txBody>
       </p:sp>
@@ -6998,8 +6681,8 @@
         </p:nvSpPr>
         <p:spPr>
           <a:xfrm>
-            <a:off x="4754880" y="3063240"/>
-            <a:ext cx="4023360" cy="1691640"/>
+            <a:off x="4754880" y="3092958"/>
+            <a:ext cx="4023360" cy="1940814"/>
           </a:xfrm>
           <a:prstGeom prst="rect">
             <a:avLst/>
@@ -7030,8 +6713,8 @@
         </p:nvSpPr>
         <p:spPr>
           <a:xfrm>
-            <a:off x="4937760" y="3246120"/>
-            <a:ext cx="502920" cy="502920"/>
+            <a:off x="4919472" y="3239262"/>
+            <a:ext cx="457200" cy="457200"/>
           </a:xfrm>
           <a:prstGeom prst="ellipse">
             <a:avLst/>
@@ -7050,8 +6733,8 @@
         </p:nvSpPr>
         <p:spPr>
           <a:xfrm>
-            <a:off x="4937760" y="3246120"/>
-            <a:ext cx="502920" cy="502920"/>
+            <a:off x="4919472" y="3239262"/>
+            <a:ext cx="457200" cy="457200"/>
           </a:xfrm>
           <a:prstGeom prst="rect">
             <a:avLst/>
@@ -7067,14 +6750,14 @@
               <a:buNone/>
             </a:pPr>
             <a:r>
-              <a:rPr lang="en-US" sz="1600" dirty="0">
+              <a:rPr lang="en-US" sz="1400" dirty="0">
                 <a:solidFill>
                   <a:srgbClr val="000000"/>
                 </a:solidFill>
               </a:rPr>
               <a:t>⚙</a:t>
             </a:r>
-            <a:endParaRPr lang="en-US" sz="1600" dirty="0"/>
+            <a:endParaRPr lang="en-US" sz="1400" dirty="0"/>
           </a:p>
         </p:txBody>
       </p:sp>
@@ -7086,8 +6769,8 @@
         </p:nvSpPr>
         <p:spPr>
           <a:xfrm>
-            <a:off x="5532120" y="3227832"/>
-            <a:ext cx="3108960" cy="365760"/>
+            <a:off x="5468112" y="3202686"/>
+            <a:ext cx="3218688" cy="420624"/>
           </a:xfrm>
           <a:prstGeom prst="rect">
             <a:avLst/>
@@ -7096,14 +6779,14 @@
           <a:ln/>
         </p:spPr>
         <p:txBody>
-          <a:bodyPr wrap="square" lIns="0" tIns="0" rIns="0" bIns="0" rtlCol="0" anchor="ctr"/>
+          <a:bodyPr wrap="square" lIns="0" tIns="0" rIns="0" bIns="0" rtlCol="0" anchor="t"/>
           <a:lstStyle/>
           <a:p>
             <a:pPr indent="0" marL="0">
               <a:buNone/>
             </a:pPr>
             <a:r>
-              <a:rPr lang="en-US" sz="1400" b="1" dirty="0">
+              <a:rPr lang="en-US" sz="1100" b="1" dirty="0">
                 <a:solidFill>
                   <a:srgbClr val="065A82"/>
                 </a:solidFill>
@@ -7113,7 +6796,7 @@
               </a:rPr>
               <a:t>Infrastructure &amp; Institutional</a:t>
             </a:r>
-            <a:endParaRPr lang="en-US" sz="1400" dirty="0"/>
+            <a:endParaRPr lang="en-US" sz="1100" dirty="0"/>
           </a:p>
         </p:txBody>
       </p:sp>
@@ -7125,8 +6808,8 @@
         </p:nvSpPr>
         <p:spPr>
           <a:xfrm>
-            <a:off x="4937760" y="3749040"/>
-            <a:ext cx="3657600" cy="914400"/>
+            <a:off x="4901184" y="3678174"/>
+            <a:ext cx="3767328" cy="1282446"/>
           </a:xfrm>
           <a:prstGeom prst="rect">
             <a:avLst/>
@@ -7135,7 +6818,7 @@
           <a:ln/>
         </p:spPr>
         <p:txBody>
-          <a:bodyPr wrap="square" rtlCol="0" anchor="t"/>
+          <a:bodyPr wrap="square" lIns="0" tIns="0" rIns="0" bIns="0" rtlCol="0" anchor="t"/>
           <a:lstStyle/>
           <a:p>
             <a:pPr marL="342900" indent="-342900">
@@ -7143,7 +6826,7 @@
               <a:buChar char="•"/>
             </a:pPr>
             <a:r>
-              <a:rPr lang="en-US" sz="1000" dirty="0">
+              <a:rPr lang="en-US" sz="750" dirty="0">
                 <a:solidFill>
                   <a:srgbClr val="1E293B"/>
                 </a:solidFill>
@@ -7151,9 +6834,9 @@
                 <a:ea typeface="Arial" pitchFamily="34" charset="-122"/>
                 <a:cs typeface="Arial" pitchFamily="34" charset="-120"/>
               </a:rPr>
-              <a:t>EventRoot wrap migration (no hard fork) · Indexer EventRoot index</a:t>
-            </a:r>
-            <a:endParaRPr lang="en-US" sz="1000" dirty="0"/>
+              <a:t>EventRoot wrap migration · Indexer EventRoot index</a:t>
+            </a:r>
+            <a:endParaRPr lang="en-US" sz="750" dirty="0"/>
           </a:p>
           <a:p>
             <a:pPr marL="342900" indent="-342900">
@@ -7161,7 +6844,7 @@
               <a:buChar char="•"/>
             </a:pPr>
             <a:r>
-              <a:rPr lang="en-US" sz="1000" dirty="0">
+              <a:rPr lang="en-US" sz="750" dirty="0">
                 <a:solidFill>
                   <a:srgbClr val="1E293B"/>
                 </a:solidFill>
@@ -7169,9 +6852,9 @@
                 <a:ea typeface="Arial" pitchFamily="34" charset="-122"/>
                 <a:cs typeface="Arial" pitchFamily="34" charset="-120"/>
               </a:rPr>
-              <a:t>Brevis off-chain supervision (optional): maps proof_hash; on-chain remains attestation + challenge window</a:t>
-            </a:r>
-            <a:endParaRPr lang="en-US" sz="1000" dirty="0"/>
+              <a:t>Brevis off-chain supervision (opt.): proof_hash mapping</a:t>
+            </a:r>
+            <a:endParaRPr lang="en-US" sz="750" dirty="0"/>
           </a:p>
           <a:p>
             <a:pPr marL="342900" indent="-342900">
@@ -7179,7 +6862,7 @@
               <a:buChar char="•"/>
             </a:pPr>
             <a:r>
-              <a:rPr lang="en-US" sz="1000" dirty="0">
+              <a:rPr lang="en-US" sz="750" dirty="0">
                 <a:solidFill>
                   <a:srgbClr val="1E293B"/>
                 </a:solidFill>
@@ -7189,7 +6872,7 @@
               </a:rPr>
               <a:t>LP Guard Keeper production · Chain Monitor alerting</a:t>
             </a:r>
-            <a:endParaRPr lang="en-US" sz="1000" dirty="0"/>
+            <a:endParaRPr lang="en-US" sz="750" dirty="0"/>
           </a:p>
           <a:p>
             <a:pPr marL="342900" indent="-342900">
@@ -7197,7 +6880,7 @@
               <a:buChar char="•"/>
             </a:pPr>
             <a:r>
-              <a:rPr lang="en-US" sz="1000" dirty="0">
+              <a:rPr lang="en-US" sz="750" dirty="0">
                 <a:solidFill>
                   <a:srgbClr val="1E293B"/>
                 </a:solidFill>
@@ -7207,7 +6890,7 @@
               </a:rPr>
               <a:t>Institutional AUM target ≥$5M · Flutter mainnet dual-platform</a:t>
             </a:r>
-            <a:endParaRPr lang="en-US" sz="1000" dirty="0"/>
+            <a:endParaRPr lang="en-US" sz="750" dirty="0"/>
           </a:p>
         </p:txBody>
       </p:sp>
@@ -7369,8 +7052,8 @@
         </p:nvSpPr>
         <p:spPr>
           <a:xfrm>
-            <a:off x="320040" y="1234440"/>
-            <a:ext cx="1965960" cy="3337560"/>
+            <a:off x="228600" y="1097280"/>
+            <a:ext cx="1678838" cy="3607308"/>
           </a:xfrm>
           <a:prstGeom prst="rect">
             <a:avLst/>
@@ -7401,8 +7084,8 @@
         </p:nvSpPr>
         <p:spPr>
           <a:xfrm>
-            <a:off x="320040" y="1371600"/>
-            <a:ext cx="1965960" cy="365760"/>
+            <a:off x="228600" y="1207008"/>
+            <a:ext cx="1678838" cy="292608"/>
           </a:xfrm>
           <a:prstGeom prst="rect">
             <a:avLst/>
@@ -7418,7 +7101,7 @@
               <a:buNone/>
             </a:pPr>
             <a:r>
-              <a:rPr lang="en-US" sz="1100" b="1" dirty="0">
+              <a:rPr lang="en-US" sz="900" b="1" dirty="0">
                 <a:solidFill>
                   <a:srgbClr val="065A82"/>
                 </a:solidFill>
@@ -7428,7 +7111,7 @@
               </a:rPr>
               <a:t>Phase 1</a:t>
             </a:r>
-            <a:endParaRPr lang="en-US" sz="1100" dirty="0"/>
+            <a:endParaRPr lang="en-US" sz="900" dirty="0"/>
           </a:p>
         </p:txBody>
       </p:sp>
@@ -7440,8 +7123,8 @@
         </p:nvSpPr>
         <p:spPr>
           <a:xfrm>
-            <a:off x="320040" y="1737360"/>
-            <a:ext cx="1965960" cy="274320"/>
+            <a:off x="228600" y="1481328"/>
+            <a:ext cx="1678838" cy="237744"/>
           </a:xfrm>
           <a:prstGeom prst="rect">
             <a:avLst/>
@@ -7457,7 +7140,7 @@
               <a:buNone/>
             </a:pPr>
             <a:r>
-              <a:rPr lang="en-US" sz="900" dirty="0">
+              <a:rPr lang="en-US" sz="750" dirty="0">
                 <a:solidFill>
                   <a:srgbClr val="16A34A"/>
                 </a:solidFill>
@@ -7467,7 +7150,7 @@
               </a:rPr>
               <a:t>✅ Done</a:t>
             </a:r>
-            <a:endParaRPr lang="en-US" sz="900" dirty="0"/>
+            <a:endParaRPr lang="en-US" sz="750" dirty="0"/>
           </a:p>
         </p:txBody>
       </p:sp>
@@ -7479,8 +7162,8 @@
         </p:nvSpPr>
         <p:spPr>
           <a:xfrm>
-            <a:off x="411480" y="2103120"/>
-            <a:ext cx="1783080" cy="2286000"/>
+            <a:off x="283464" y="1755648"/>
+            <a:ext cx="1569110" cy="2857500"/>
           </a:xfrm>
           <a:prstGeom prst="rect">
             <a:avLst/>
@@ -7489,7 +7172,7 @@
           <a:ln/>
         </p:spPr>
         <p:txBody>
-          <a:bodyPr wrap="square" rtlCol="0" anchor="t"/>
+          <a:bodyPr wrap="square" lIns="0" tIns="0" rIns="0" bIns="0" rtlCol="0" anchor="t"/>
           <a:lstStyle/>
           <a:p>
             <a:pPr marL="342900" indent="-342900">
@@ -7497,7 +7180,7 @@
               <a:buChar char="•"/>
             </a:pPr>
             <a:r>
-              <a:rPr lang="en-US" sz="800" dirty="0">
+              <a:rPr lang="en-US" sz="750" dirty="0">
                 <a:solidFill>
                   <a:srgbClr val="1E293B"/>
                 </a:solidFill>
@@ -7507,7 +7190,7 @@
               </a:rPr>
               <a:t>Three distributions</a:t>
             </a:r>
-            <a:endParaRPr lang="en-US" sz="800" dirty="0"/>
+            <a:endParaRPr lang="en-US" sz="750" dirty="0"/>
           </a:p>
           <a:p>
             <a:pPr marL="342900" indent="-342900">
@@ -7515,7 +7198,7 @@
               <a:buChar char="•"/>
             </a:pPr>
             <a:r>
-              <a:rPr lang="en-US" sz="800" dirty="0">
+              <a:rPr lang="en-US" sz="750" dirty="0">
                 <a:solidFill>
                   <a:srgbClr val="1E293B"/>
                 </a:solidFill>
@@ -7525,7 +7208,7 @@
               </a:rPr>
               <a:t>Interval/digital options</a:t>
             </a:r>
-            <a:endParaRPr lang="en-US" sz="800" dirty="0"/>
+            <a:endParaRPr lang="en-US" sz="750" dirty="0"/>
           </a:p>
           <a:p>
             <a:pPr marL="342900" indent="-342900">
@@ -7533,7 +7216,7 @@
               <a:buChar char="•"/>
             </a:pPr>
             <a:r>
-              <a:rPr lang="en-US" sz="800" dirty="0">
+              <a:rPr lang="en-US" sz="750" dirty="0">
                 <a:solidFill>
                   <a:srgbClr val="1E293B"/>
                 </a:solidFill>
@@ -7543,7 +7226,7 @@
               </a:rPr>
               <a:t>Max-Loss</a:t>
             </a:r>
-            <a:endParaRPr lang="en-US" sz="800" dirty="0"/>
+            <a:endParaRPr lang="en-US" sz="750" dirty="0"/>
           </a:p>
           <a:p>
             <a:pPr marL="342900" indent="-342900">
@@ -7551,7 +7234,7 @@
               <a:buChar char="•"/>
             </a:pPr>
             <a:r>
-              <a:rPr lang="en-US" sz="800" dirty="0">
+              <a:rPr lang="en-US" sz="750" dirty="0">
                 <a:solidFill>
                   <a:srgbClr val="1E293B"/>
                 </a:solidFill>
@@ -7561,7 +7244,7 @@
               </a:rPr>
               <a:t>USDC Vault</a:t>
             </a:r>
-            <a:endParaRPr lang="en-US" sz="800" dirty="0"/>
+            <a:endParaRPr lang="en-US" sz="750" dirty="0"/>
           </a:p>
         </p:txBody>
       </p:sp>
@@ -7573,8 +7256,8 @@
         </p:nvSpPr>
         <p:spPr>
           <a:xfrm>
-            <a:off x="2468880" y="1234440"/>
-            <a:ext cx="1965960" cy="3337560"/>
+            <a:off x="1980590" y="1097280"/>
+            <a:ext cx="1678838" cy="3607308"/>
           </a:xfrm>
           <a:prstGeom prst="rect">
             <a:avLst/>
@@ -7605,8 +7288,8 @@
         </p:nvSpPr>
         <p:spPr>
           <a:xfrm>
-            <a:off x="2468880" y="1371600"/>
-            <a:ext cx="1965960" cy="365760"/>
+            <a:off x="1980590" y="1207008"/>
+            <a:ext cx="1678838" cy="292608"/>
           </a:xfrm>
           <a:prstGeom prst="rect">
             <a:avLst/>
@@ -7622,7 +7305,7 @@
               <a:buNone/>
             </a:pPr>
             <a:r>
-              <a:rPr lang="en-US" sz="1100" b="1" dirty="0">
+              <a:rPr lang="en-US" sz="900" b="1" dirty="0">
                 <a:solidFill>
                   <a:srgbClr val="065A82"/>
                 </a:solidFill>
@@ -7632,7 +7315,7 @@
               </a:rPr>
               <a:t>Phase 1.5</a:t>
             </a:r>
-            <a:endParaRPr lang="en-US" sz="1100" dirty="0"/>
+            <a:endParaRPr lang="en-US" sz="900" dirty="0"/>
           </a:p>
         </p:txBody>
       </p:sp>
@@ -7644,8 +7327,8 @@
         </p:nvSpPr>
         <p:spPr>
           <a:xfrm>
-            <a:off x="2468880" y="1737360"/>
-            <a:ext cx="1965960" cy="274320"/>
+            <a:off x="1980590" y="1481328"/>
+            <a:ext cx="1678838" cy="237744"/>
           </a:xfrm>
           <a:prstGeom prst="rect">
             <a:avLst/>
@@ -7661,7 +7344,7 @@
               <a:buNone/>
             </a:pPr>
             <a:r>
-              <a:rPr lang="en-US" sz="900" dirty="0">
+              <a:rPr lang="en-US" sz="750" dirty="0">
                 <a:solidFill>
                   <a:srgbClr val="16A34A"/>
                 </a:solidFill>
@@ -7671,7 +7354,7 @@
               </a:rPr>
               <a:t>✅ Done</a:t>
             </a:r>
-            <a:endParaRPr lang="en-US" sz="900" dirty="0"/>
+            <a:endParaRPr lang="en-US" sz="750" dirty="0"/>
           </a:p>
         </p:txBody>
       </p:sp>
@@ -7683,8 +7366,8 @@
         </p:nvSpPr>
         <p:spPr>
           <a:xfrm>
-            <a:off x="2560320" y="2103120"/>
-            <a:ext cx="1783080" cy="2286000"/>
+            <a:off x="2035454" y="1755648"/>
+            <a:ext cx="1569110" cy="2857500"/>
           </a:xfrm>
           <a:prstGeom prst="rect">
             <a:avLst/>
@@ -7693,7 +7376,7 @@
           <a:ln/>
         </p:spPr>
         <p:txBody>
-          <a:bodyPr wrap="square" rtlCol="0" anchor="t"/>
+          <a:bodyPr wrap="square" lIns="0" tIns="0" rIns="0" bIns="0" rtlCol="0" anchor="t"/>
           <a:lstStyle/>
           <a:p>
             <a:pPr marL="342900" indent="-342900">
@@ -7701,7 +7384,7 @@
               <a:buChar char="•"/>
             </a:pPr>
             <a:r>
-              <a:rPr lang="en-US" sz="800" dirty="0">
+              <a:rPr lang="en-US" sz="750" dirty="0">
                 <a:solidFill>
                   <a:srgbClr val="1E293B"/>
                 </a:solidFill>
@@ -7711,7 +7394,7 @@
               </a:rPr>
               <a:t>Opening Auction</a:t>
             </a:r>
-            <a:endParaRPr lang="en-US" sz="800" dirty="0"/>
+            <a:endParaRPr lang="en-US" sz="750" dirty="0"/>
           </a:p>
           <a:p>
             <a:pPr marL="342900" indent="-342900">
@@ -7719,7 +7402,7 @@
               <a:buChar char="•"/>
             </a:pPr>
             <a:r>
-              <a:rPr lang="en-US" sz="800" dirty="0">
+              <a:rPr lang="en-US" sz="750" dirty="0">
                 <a:solidFill>
                   <a:srgbClr val="1E293B"/>
                 </a:solidFill>
@@ -7729,7 +7412,7 @@
               </a:rPr>
               <a:t>LP Token + NAV</a:t>
             </a:r>
-            <a:endParaRPr lang="en-US" sz="800" dirty="0"/>
+            <a:endParaRPr lang="en-US" sz="750" dirty="0"/>
           </a:p>
           <a:p>
             <a:pPr marL="342900" indent="-342900">
@@ -7737,7 +7420,7 @@
               <a:buChar char="•"/>
             </a:pPr>
             <a:r>
-              <a:rPr lang="en-US" sz="800" dirty="0">
+              <a:rPr lang="en-US" sz="750" dirty="0">
                 <a:solidFill>
                   <a:srgbClr val="1E293B"/>
                 </a:solidFill>
@@ -7747,7 +7430,7 @@
               </a:rPr>
               <a:t>State machine</a:t>
             </a:r>
-            <a:endParaRPr lang="en-US" sz="800" dirty="0"/>
+            <a:endParaRPr lang="en-US" sz="750" dirty="0"/>
           </a:p>
           <a:p>
             <a:pPr marL="342900" indent="-342900">
@@ -7755,7 +7438,7 @@
               <a:buChar char="•"/>
             </a:pPr>
             <a:r>
-              <a:rPr lang="en-US" sz="800" dirty="0">
+              <a:rPr lang="en-US" sz="750" dirty="0">
                 <a:solidFill>
                   <a:srgbClr val="1E293B"/>
                 </a:solidFill>
@@ -7765,7 +7448,7 @@
               </a:rPr>
               <a:t>Cold-start pricing</a:t>
             </a:r>
-            <a:endParaRPr lang="en-US" sz="800" dirty="0"/>
+            <a:endParaRPr lang="en-US" sz="750" dirty="0"/>
           </a:p>
         </p:txBody>
       </p:sp>
@@ -7777,8 +7460,8 @@
         </p:nvSpPr>
         <p:spPr>
           <a:xfrm>
-            <a:off x="4617720" y="1234440"/>
-            <a:ext cx="1965960" cy="3337560"/>
+            <a:off x="3732581" y="1097280"/>
+            <a:ext cx="1678838" cy="3607308"/>
           </a:xfrm>
           <a:prstGeom prst="rect">
             <a:avLst/>
@@ -7809,8 +7492,8 @@
         </p:nvSpPr>
         <p:spPr>
           <a:xfrm>
-            <a:off x="4617720" y="1371600"/>
-            <a:ext cx="1965960" cy="365760"/>
+            <a:off x="3732581" y="1207008"/>
+            <a:ext cx="1678838" cy="292608"/>
           </a:xfrm>
           <a:prstGeom prst="rect">
             <a:avLst/>
@@ -7826,7 +7509,7 @@
               <a:buNone/>
             </a:pPr>
             <a:r>
-              <a:rPr lang="en-US" sz="1100" b="1" dirty="0">
+              <a:rPr lang="en-US" sz="900" b="1" dirty="0">
                 <a:solidFill>
                   <a:srgbClr val="065A82"/>
                 </a:solidFill>
@@ -7836,7 +7519,7 @@
               </a:rPr>
               <a:t>Phase 2</a:t>
             </a:r>
-            <a:endParaRPr lang="en-US" sz="1100" dirty="0"/>
+            <a:endParaRPr lang="en-US" sz="900" dirty="0"/>
           </a:p>
         </p:txBody>
       </p:sp>
@@ -7848,8 +7531,8 @@
         </p:nvSpPr>
         <p:spPr>
           <a:xfrm>
-            <a:off x="4617720" y="1737360"/>
-            <a:ext cx="1965960" cy="274320"/>
+            <a:off x="3732581" y="1481328"/>
+            <a:ext cx="1678838" cy="237744"/>
           </a:xfrm>
           <a:prstGeom prst="rect">
             <a:avLst/>
@@ -7865,7 +7548,7 @@
               <a:buNone/>
             </a:pPr>
             <a:r>
-              <a:rPr lang="en-US" sz="900" dirty="0">
+              <a:rPr lang="en-US" sz="750" dirty="0">
                 <a:solidFill>
                   <a:srgbClr val="16A34A"/>
                 </a:solidFill>
@@ -7875,7 +7558,7 @@
               </a:rPr>
               <a:t>✅ Done</a:t>
             </a:r>
-            <a:endParaRPr lang="en-US" sz="900" dirty="0"/>
+            <a:endParaRPr lang="en-US" sz="750" dirty="0"/>
           </a:p>
         </p:txBody>
       </p:sp>
@@ -7887,8 +7570,8 @@
         </p:nvSpPr>
         <p:spPr>
           <a:xfrm>
-            <a:off x="4709160" y="2103120"/>
-            <a:ext cx="1783080" cy="2286000"/>
+            <a:off x="3787445" y="1755648"/>
+            <a:ext cx="1569110" cy="2857500"/>
           </a:xfrm>
           <a:prstGeom prst="rect">
             <a:avLst/>
@@ -7897,7 +7580,7 @@
           <a:ln/>
         </p:spPr>
         <p:txBody>
-          <a:bodyPr wrap="square" rtlCol="0" anchor="t"/>
+          <a:bodyPr wrap="square" lIns="0" tIns="0" rIns="0" bIns="0" rtlCol="0" anchor="t"/>
           <a:lstStyle/>
           <a:p>
             <a:pPr marL="342900" indent="-342900">
@@ -7905,7 +7588,7 @@
               <a:buChar char="•"/>
             </a:pPr>
             <a:r>
-              <a:rPr lang="en-US" sz="800" dirty="0">
+              <a:rPr lang="en-US" sz="750" dirty="0">
                 <a:solidFill>
                   <a:srgbClr val="1E293B"/>
                 </a:solidFill>
@@ -7915,7 +7598,7 @@
               </a:rPr>
               <a:t>Linear options · Straddle</a:t>
             </a:r>
-            <a:endParaRPr lang="en-US" sz="800" dirty="0"/>
+            <a:endParaRPr lang="en-US" sz="750" dirty="0"/>
           </a:p>
           <a:p>
             <a:pPr marL="342900" indent="-342900">
@@ -7923,7 +7606,7 @@
               <a:buChar char="•"/>
             </a:pPr>
             <a:r>
-              <a:rPr lang="en-US" sz="800" dirty="0">
+              <a:rPr lang="en-US" sz="750" dirty="0">
                 <a:solidFill>
                   <a:srgbClr val="1E293B"/>
                 </a:solidFill>
@@ -7933,7 +7616,7 @@
               </a:rPr>
               <a:t>LP Guard dynamic fees</a:t>
             </a:r>
-            <a:endParaRPr lang="en-US" sz="800" dirty="0"/>
+            <a:endParaRPr lang="en-US" sz="750" dirty="0"/>
           </a:p>
           <a:p>
             <a:pPr marL="342900" indent="-342900">
@@ -7941,7 +7624,7 @@
               <a:buChar char="•"/>
             </a:pPr>
             <a:r>
-              <a:rPr lang="en-US" sz="800" dirty="0">
+              <a:rPr lang="en-US" sz="750" dirty="0">
                 <a:solidFill>
                   <a:srgbClr val="1E293B"/>
                 </a:solidFill>
@@ -7951,7 +7634,7 @@
               </a:rPr>
               <a:t>NAV redeem</a:t>
             </a:r>
-            <a:endParaRPr lang="en-US" sz="800" dirty="0"/>
+            <a:endParaRPr lang="en-US" sz="750" dirty="0"/>
           </a:p>
           <a:p>
             <a:pPr marL="342900" indent="-342900">
@@ -7959,7 +7642,7 @@
               <a:buChar char="•"/>
             </a:pPr>
             <a:r>
-              <a:rPr lang="en-US" sz="800" dirty="0">
+              <a:rPr lang="en-US" sz="750" dirty="0">
                 <a:solidFill>
                   <a:srgbClr val="1E293B"/>
                 </a:solidFill>
@@ -7969,7 +7652,7 @@
               </a:rPr>
               <a:t>IV panel</a:t>
             </a:r>
-            <a:endParaRPr lang="en-US" sz="800" dirty="0"/>
+            <a:endParaRPr lang="en-US" sz="750" dirty="0"/>
           </a:p>
         </p:txBody>
       </p:sp>
@@ -7981,8 +7664,8 @@
         </p:nvSpPr>
         <p:spPr>
           <a:xfrm>
-            <a:off x="6766560" y="1234440"/>
-            <a:ext cx="1965960" cy="3337560"/>
+            <a:off x="5484571" y="1097280"/>
+            <a:ext cx="1678838" cy="3607308"/>
           </a:xfrm>
           <a:prstGeom prst="rect">
             <a:avLst/>
@@ -8013,8 +7696,8 @@
         </p:nvSpPr>
         <p:spPr>
           <a:xfrm>
-            <a:off x="6766560" y="1371600"/>
-            <a:ext cx="1965960" cy="365760"/>
+            <a:off x="5484571" y="1207008"/>
+            <a:ext cx="1678838" cy="292608"/>
           </a:xfrm>
           <a:prstGeom prst="rect">
             <a:avLst/>
@@ -8030,7 +7713,7 @@
               <a:buNone/>
             </a:pPr>
             <a:r>
-              <a:rPr lang="en-US" sz="1100" b="1" dirty="0">
+              <a:rPr lang="en-US" sz="900" b="1" dirty="0">
                 <a:solidFill>
                   <a:srgbClr val="065A82"/>
                 </a:solidFill>
@@ -8040,7 +7723,7 @@
               </a:rPr>
               <a:t>Phase 3</a:t>
             </a:r>
-            <a:endParaRPr lang="en-US" sz="1100" dirty="0"/>
+            <a:endParaRPr lang="en-US" sz="900" dirty="0"/>
           </a:p>
         </p:txBody>
       </p:sp>
@@ -8052,8 +7735,8 @@
         </p:nvSpPr>
         <p:spPr>
           <a:xfrm>
-            <a:off x="6766560" y="1737360"/>
-            <a:ext cx="1965960" cy="274320"/>
+            <a:off x="5484571" y="1481328"/>
+            <a:ext cx="1678838" cy="237744"/>
           </a:xfrm>
           <a:prstGeom prst="rect">
             <a:avLst/>
@@ -8069,7 +7752,7 @@
               <a:buNone/>
             </a:pPr>
             <a:r>
-              <a:rPr lang="en-US" sz="900" dirty="0">
+              <a:rPr lang="en-US" sz="750" dirty="0">
                 <a:solidFill>
                   <a:srgbClr val="1C7293"/>
                 </a:solidFill>
@@ -8079,7 +7762,7 @@
               </a:rPr>
               <a:t>🔵 Closing</a:t>
             </a:r>
-            <a:endParaRPr lang="en-US" sz="900" dirty="0"/>
+            <a:endParaRPr lang="en-US" sz="750" dirty="0"/>
           </a:p>
         </p:txBody>
       </p:sp>
@@ -8091,8 +7774,8 @@
         </p:nvSpPr>
         <p:spPr>
           <a:xfrm>
-            <a:off x="6858000" y="2103120"/>
-            <a:ext cx="1783080" cy="2286000"/>
+            <a:off x="5539435" y="1755648"/>
+            <a:ext cx="1569110" cy="2857500"/>
           </a:xfrm>
           <a:prstGeom prst="rect">
             <a:avLst/>
@@ -8101,7 +7784,7 @@
           <a:ln/>
         </p:spPr>
         <p:txBody>
-          <a:bodyPr wrap="square" rtlCol="0" anchor="t"/>
+          <a:bodyPr wrap="square" lIns="0" tIns="0" rIns="0" bIns="0" rtlCol="0" anchor="t"/>
           <a:lstStyle/>
           <a:p>
             <a:pPr marL="342900" indent="-342900">
@@ -8109,7 +7792,7 @@
               <a:buChar char="•"/>
             </a:pPr>
             <a:r>
-              <a:rPr lang="en-US" sz="800" dirty="0">
+              <a:rPr lang="en-US" sz="750" dirty="0">
                 <a:solidFill>
                   <a:srgbClr val="1E293B"/>
                 </a:solidFill>
@@ -8119,7 +7802,7 @@
               </a:rPr>
               <a:t>Variance Swap + structured notes</a:t>
             </a:r>
-            <a:endParaRPr lang="en-US" sz="800" dirty="0"/>
+            <a:endParaRPr lang="en-US" sz="750" dirty="0"/>
           </a:p>
           <a:p>
             <a:pPr marL="342900" indent="-342900">
@@ -8127,7 +7810,7 @@
               <a:buChar char="•"/>
             </a:pPr>
             <a:r>
-              <a:rPr lang="en-US" sz="800" dirty="0">
+              <a:rPr lang="en-US" sz="750" dirty="0">
                 <a:solidFill>
                   <a:srgbClr val="1E293B"/>
                 </a:solidFill>
@@ -8137,7 +7820,7 @@
               </a:rPr>
               <a:t>Slash governance · ZK cold-path attestation</a:t>
             </a:r>
-            <a:endParaRPr lang="en-US" sz="800" dirty="0"/>
+            <a:endParaRPr lang="en-US" sz="750" dirty="0"/>
           </a:p>
           <a:p>
             <a:pPr marL="342900" indent="-342900">
@@ -8145,7 +7828,7 @@
               <a:buChar char="•"/>
             </a:pPr>
             <a:r>
-              <a:rPr lang="en-US" sz="800" dirty="0">
+              <a:rPr lang="en-US" sz="750" dirty="0">
                 <a:solidFill>
                   <a:srgbClr val="1E293B"/>
                 </a:solidFill>
@@ -8155,7 +7838,7 @@
               </a:rPr>
               <a:t>Beta dist · UMA DVM</a:t>
             </a:r>
-            <a:endParaRPr lang="en-US" sz="800" dirty="0"/>
+            <a:endParaRPr lang="en-US" sz="750" dirty="0"/>
           </a:p>
           <a:p>
             <a:pPr marL="342900" indent="-342900">
@@ -8163,7 +7846,7 @@
               <a:buChar char="•"/>
             </a:pPr>
             <a:r>
-              <a:rPr lang="en-US" sz="800" dirty="0">
+              <a:rPr lang="en-US" sz="750" dirty="0">
                 <a:solidFill>
                   <a:srgbClr val="1E293B"/>
                 </a:solidFill>
@@ -8173,7 +7856,7 @@
               </a:rPr>
               <a:t>External audit → Mainnet</a:t>
             </a:r>
-            <a:endParaRPr lang="en-US" sz="800" dirty="0"/>
+            <a:endParaRPr lang="en-US" sz="750" dirty="0"/>
           </a:p>
         </p:txBody>
       </p:sp>
@@ -8185,8 +7868,8 @@
         </p:nvSpPr>
         <p:spPr>
           <a:xfrm>
-            <a:off x="8915400" y="1234440"/>
-            <a:ext cx="1965960" cy="3337560"/>
+            <a:off x="7236562" y="1097280"/>
+            <a:ext cx="1678838" cy="3607308"/>
           </a:xfrm>
           <a:prstGeom prst="rect">
             <a:avLst/>
@@ -8217,8 +7900,8 @@
         </p:nvSpPr>
         <p:spPr>
           <a:xfrm>
-            <a:off x="8915400" y="1371600"/>
-            <a:ext cx="1965960" cy="365760"/>
+            <a:off x="7236562" y="1207008"/>
+            <a:ext cx="1678838" cy="292608"/>
           </a:xfrm>
           <a:prstGeom prst="rect">
             <a:avLst/>
@@ -8234,7 +7917,7 @@
               <a:buNone/>
             </a:pPr>
             <a:r>
-              <a:rPr lang="en-US" sz="1100" b="1" dirty="0">
+              <a:rPr lang="en-US" sz="900" b="1" dirty="0">
                 <a:solidFill>
                   <a:srgbClr val="065A82"/>
                 </a:solidFill>
@@ -8244,7 +7927,7 @@
               </a:rPr>
               <a:t>Phase 4</a:t>
             </a:r>
-            <a:endParaRPr lang="en-US" sz="1100" dirty="0"/>
+            <a:endParaRPr lang="en-US" sz="900" dirty="0"/>
           </a:p>
         </p:txBody>
       </p:sp>
@@ -8256,8 +7939,8 @@
         </p:nvSpPr>
         <p:spPr>
           <a:xfrm>
-            <a:off x="8915400" y="1737360"/>
-            <a:ext cx="1965960" cy="274320"/>
+            <a:off x="7236562" y="1481328"/>
+            <a:ext cx="1678838" cy="237744"/>
           </a:xfrm>
           <a:prstGeom prst="rect">
             <a:avLst/>
@@ -8273,7 +7956,7 @@
               <a:buNone/>
             </a:pPr>
             <a:r>
-              <a:rPr lang="en-US" sz="900" dirty="0">
+              <a:rPr lang="en-US" sz="750" dirty="0">
                 <a:solidFill>
                   <a:srgbClr val="1C7293"/>
                 </a:solidFill>
@@ -8283,7 +7966,7 @@
               </a:rPr>
               <a:t>🔵 Scaling</a:t>
             </a:r>
-            <a:endParaRPr lang="en-US" sz="900" dirty="0"/>
+            <a:endParaRPr lang="en-US" sz="750" dirty="0"/>
           </a:p>
         </p:txBody>
       </p:sp>
@@ -8295,8 +7978,8 @@
         </p:nvSpPr>
         <p:spPr>
           <a:xfrm>
-            <a:off x="9006840" y="2103120"/>
-            <a:ext cx="1783080" cy="2286000"/>
+            <a:off x="7291426" y="1755648"/>
+            <a:ext cx="1569110" cy="2857500"/>
           </a:xfrm>
           <a:prstGeom prst="rect">
             <a:avLst/>
@@ -8305,7 +7988,7 @@
           <a:ln/>
         </p:spPr>
         <p:txBody>
-          <a:bodyPr wrap="square" rtlCol="0" anchor="t"/>
+          <a:bodyPr wrap="square" lIns="0" tIns="0" rIns="0" bIns="0" rtlCol="0" anchor="t"/>
           <a:lstStyle/>
           <a:p>
             <a:pPr marL="342900" indent="-342900">
@@ -8313,7 +7996,7 @@
               <a:buChar char="•"/>
             </a:pPr>
             <a:r>
-              <a:rPr lang="en-US" sz="800" dirty="0">
+              <a:rPr lang="en-US" sz="750" dirty="0">
                 <a:solidFill>
                   <a:srgbClr val="1E293B"/>
                 </a:solidFill>
@@ -8323,7 +8006,7 @@
               </a:rPr>
               <a:t>EventRoot full migration</a:t>
             </a:r>
-            <a:endParaRPr lang="en-US" sz="800" dirty="0"/>
+            <a:endParaRPr lang="en-US" sz="750" dirty="0"/>
           </a:p>
           <a:p>
             <a:pPr marL="342900" indent="-342900">
@@ -8331,7 +8014,7 @@
               <a:buChar char="•"/>
             </a:pPr>
             <a:r>
-              <a:rPr lang="en-US" sz="800" dirty="0">
+              <a:rPr lang="en-US" sz="750" dirty="0">
                 <a:solidFill>
                   <a:srgbClr val="1E293B"/>
                 </a:solidFill>
@@ -8341,7 +8024,7 @@
               </a:rPr>
               <a:t>Prophet Audit Keeper auto</a:t>
             </a:r>
-            <a:endParaRPr lang="en-US" sz="800" dirty="0"/>
+            <a:endParaRPr lang="en-US" sz="750" dirty="0"/>
           </a:p>
           <a:p>
             <a:pPr marL="342900" indent="-342900">
@@ -8349,7 +8032,7 @@
               <a:buChar char="•"/>
             </a:pPr>
             <a:r>
-              <a:rPr lang="en-US" sz="800" dirty="0">
+              <a:rPr lang="en-US" sz="750" dirty="0">
                 <a:solidFill>
                   <a:srgbClr val="1E293B"/>
                 </a:solidFill>
@@ -8359,7 +8042,7 @@
               </a:rPr>
               <a:t>Buyer ROI · GMV metrics</a:t>
             </a:r>
-            <a:endParaRPr lang="en-US" sz="800" dirty="0"/>
+            <a:endParaRPr lang="en-US" sz="750" dirty="0"/>
           </a:p>
           <a:p>
             <a:pPr marL="342900" indent="-342900">
@@ -8367,7 +8050,7 @@
               <a:buChar char="•"/>
             </a:pPr>
             <a:r>
-              <a:rPr lang="en-US" sz="800" dirty="0">
+              <a:rPr lang="en-US" sz="750" dirty="0">
                 <a:solidFill>
                   <a:srgbClr val="1E293B"/>
                 </a:solidFill>
@@ -8377,7 +8060,7 @@
               </a:rPr>
               <a:t>SDK / Quant API open</a:t>
             </a:r>
-            <a:endParaRPr lang="en-US" sz="800" dirty="0"/>
+            <a:endParaRPr lang="en-US" sz="750" dirty="0"/>
           </a:p>
         </p:txBody>
       </p:sp>
@@ -8389,8 +8072,8 @@
         </p:nvSpPr>
         <p:spPr>
           <a:xfrm>
-            <a:off x="365760" y="4663440"/>
-            <a:ext cx="8412480" cy="320040"/>
+            <a:off x="228600" y="4759452"/>
+            <a:ext cx="8686800" cy="274320"/>
           </a:xfrm>
           <a:prstGeom prst="rect">
             <a:avLst/>
@@ -8406,7 +8089,7 @@
               <a:buNone/>
             </a:pPr>
             <a:r>
-              <a:rPr lang="en-US" sz="900" i="1" dirty="0">
+              <a:rPr lang="en-US" sz="750" i="1" dirty="0">
                 <a:solidFill>
                   <a:srgbClr val="64748B"/>
                 </a:solidFill>
@@ -8416,7 +8099,7 @@
               </a:rPr>
               <a:t>Tier 2 joint PDF model: deferred 6–12 months post-mainnet; prioritize Tier 1 + structured notes + SuiProphet ecosystem</a:t>
             </a:r>
-            <a:endParaRPr lang="en-US" sz="900" dirty="0"/>
+            <a:endParaRPr lang="en-US" sz="750" dirty="0"/>
           </a:p>
         </p:txBody>
       </p:sp>
@@ -10237,3720 +9920,6 @@
 </p:sld>
 </file>
 
-<file path=ppt/slides/slide17.xml><?xml version="1.0" encoding="utf-8"?>
-<p:sld xmlns:a="http://schemas.openxmlformats.org/drawingml/2006/main" xmlns:r="http://schemas.openxmlformats.org/officeDocument/2006/relationships" xmlns:p="http://schemas.openxmlformats.org/presentationml/2006/main">
-  <p:cSld name="Slide 17">
-    <p:bg>
-      <p:bgPr>
-        <a:solidFill>
-          <a:srgbClr val="F0F7FA"/>
-        </a:solidFill>
-      </p:bgPr>
-    </p:bg>
-    <p:spTree>
-      <p:nvGrpSpPr>
-        <p:cNvPr id="1" name=""/>
-        <p:cNvGrpSpPr/>
-        <p:nvPr/>
-      </p:nvGrpSpPr>
-      <p:grpSpPr>
-        <a:xfrm>
-          <a:off x="0" y="0"/>
-          <a:ext cx="0" cy="0"/>
-          <a:chOff x="0" y="0"/>
-          <a:chExt cx="0" cy="0"/>
-        </a:xfrm>
-      </p:grpSpPr>
-      <p:sp>
-        <p:nvSpPr>
-          <p:cNvPr id="2" name="Shape 0"/>
-          <p:cNvSpPr/>
-          <p:nvPr/>
-        </p:nvSpPr>
-        <p:spPr>
-          <a:xfrm>
-            <a:off x="0" y="0"/>
-            <a:ext cx="9144000" cy="960120"/>
-          </a:xfrm>
-          <a:prstGeom prst="rect">
-            <a:avLst/>
-          </a:prstGeom>
-          <a:solidFill>
-            <a:srgbClr val="065A82"/>
-          </a:solidFill>
-          <a:ln/>
-        </p:spPr>
-      </p:sp>
-      <p:sp>
-        <p:nvSpPr>
-          <p:cNvPr id="3" name="Shape 1"/>
-          <p:cNvSpPr/>
-          <p:nvPr/>
-        </p:nvSpPr>
-        <p:spPr>
-          <a:xfrm>
-            <a:off x="0" y="960120"/>
-            <a:ext cx="9144000" cy="54864"/>
-          </a:xfrm>
-          <a:prstGeom prst="rect">
-            <a:avLst/>
-          </a:prstGeom>
-          <a:solidFill>
-            <a:srgbClr val="02C39A"/>
-          </a:solidFill>
-          <a:ln/>
-        </p:spPr>
-      </p:sp>
-      <p:sp>
-        <p:nvSpPr>
-          <p:cNvPr id="4" name="Text 2"/>
-          <p:cNvSpPr/>
-          <p:nvPr/>
-        </p:nvSpPr>
-        <p:spPr>
-          <a:xfrm>
-            <a:off x="457200" y="164592"/>
-            <a:ext cx="8229600" cy="502920"/>
-          </a:xfrm>
-          <a:prstGeom prst="rect">
-            <a:avLst/>
-          </a:prstGeom>
-          <a:noFill/>
-          <a:ln/>
-        </p:spPr>
-        <p:txBody>
-          <a:bodyPr wrap="square" lIns="0" tIns="0" rIns="0" bIns="0" rtlCol="0" anchor="ctr"/>
-          <a:lstStyle/>
-          <a:p>
-            <a:pPr indent="0" marL="0">
-              <a:buNone/>
-            </a:pPr>
-            <a:r>
-              <a:rPr lang="en-US" sz="2800" b="1" dirty="0">
-                <a:solidFill>
-                  <a:srgbClr val="FFFFFF"/>
-                </a:solidFill>
-                <a:latin typeface="Arial" pitchFamily="34" charset="0"/>
-                <a:ea typeface="Arial" pitchFamily="34" charset="-122"/>
-                <a:cs typeface="Arial" pitchFamily="34" charset="-120"/>
-              </a:rPr>
-              <a:t>Problem Overview</a:t>
-            </a:r>
-            <a:endParaRPr lang="en-US" sz="2800" dirty="0"/>
-          </a:p>
-        </p:txBody>
-      </p:sp>
-      <p:sp>
-        <p:nvSpPr>
-          <p:cNvPr id="5" name="Text 3"/>
-          <p:cNvSpPr/>
-          <p:nvPr/>
-        </p:nvSpPr>
-        <p:spPr>
-          <a:xfrm>
-            <a:off x="457200" y="621792"/>
-            <a:ext cx="8229600" cy="274320"/>
-          </a:xfrm>
-          <a:prstGeom prst="rect">
-            <a:avLst/>
-          </a:prstGeom>
-          <a:noFill/>
-          <a:ln/>
-        </p:spPr>
-        <p:txBody>
-          <a:bodyPr wrap="square" lIns="0" tIns="0" rIns="0" bIns="0" rtlCol="0" anchor="ctr"/>
-          <a:lstStyle/>
-          <a:p>
-            <a:pPr indent="0" marL="0">
-              <a:buNone/>
-            </a:pPr>
-            <a:r>
-              <a:rPr lang="en-US" sz="1200" dirty="0">
-                <a:solidFill>
-                  <a:srgbClr val="CADCFC"/>
-                </a:solidFill>
-                <a:latin typeface="Arial" pitchFamily="34" charset="0"/>
-                <a:ea typeface="Arial" pitchFamily="34" charset="-122"/>
-                <a:cs typeface="Arial" pitchFamily="34" charset="-120"/>
-              </a:rPr>
-              <a:t>Three gaps blocking prediction markets from real financial infrastructure · ~30–60 sec</a:t>
-            </a:r>
-            <a:endParaRPr lang="en-US" sz="1200" dirty="0"/>
-          </a:p>
-        </p:txBody>
-      </p:sp>
-      <p:sp>
-        <p:nvSpPr>
-          <p:cNvPr id="6" name="Shape 4"/>
-          <p:cNvSpPr/>
-          <p:nvPr/>
-        </p:nvSpPr>
-        <p:spPr>
-          <a:xfrm>
-            <a:off x="365760" y="1234440"/>
-            <a:ext cx="73152" cy="914400"/>
-          </a:xfrm>
-          <a:prstGeom prst="rect">
-            <a:avLst/>
-          </a:prstGeom>
-          <a:solidFill>
-            <a:srgbClr val="F96167"/>
-          </a:solidFill>
-          <a:ln/>
-        </p:spPr>
-      </p:sp>
-      <p:sp>
-        <p:nvSpPr>
-          <p:cNvPr id="7" name="Text 5"/>
-          <p:cNvSpPr/>
-          <p:nvPr/>
-        </p:nvSpPr>
-        <p:spPr>
-          <a:xfrm>
-            <a:off x="594360" y="1280160"/>
-            <a:ext cx="8046720" cy="320040"/>
-          </a:xfrm>
-          <a:prstGeom prst="rect">
-            <a:avLst/>
-          </a:prstGeom>
-          <a:noFill/>
-          <a:ln/>
-        </p:spPr>
-        <p:txBody>
-          <a:bodyPr wrap="square" lIns="0" tIns="0" rIns="0" bIns="0" rtlCol="0" anchor="ctr"/>
-          <a:lstStyle/>
-          <a:p>
-            <a:pPr indent="0" marL="0">
-              <a:buNone/>
-            </a:pPr>
-            <a:r>
-              <a:rPr lang="en-US" sz="1400" b="1" dirty="0">
-                <a:solidFill>
-                  <a:srgbClr val="065A82"/>
-                </a:solidFill>
-                <a:latin typeface="Arial" pitchFamily="34" charset="0"/>
-                <a:ea typeface="Arial" pitchFamily="34" charset="-122"/>
-                <a:cs typeface="Arial" pitchFamily="34" charset="-120"/>
-              </a:rPr>
-              <a:t>Binary fragmentation — can't express continuous probability</a:t>
-            </a:r>
-            <a:endParaRPr lang="en-US" sz="1400" dirty="0"/>
-          </a:p>
-        </p:txBody>
-      </p:sp>
-      <p:sp>
-        <p:nvSpPr>
-          <p:cNvPr id="8" name="Text 6"/>
-          <p:cNvSpPr/>
-          <p:nvPr/>
-        </p:nvSpPr>
-        <p:spPr>
-          <a:xfrm>
-            <a:off x="594360" y="1618488"/>
-            <a:ext cx="8046720" cy="502920"/>
-          </a:xfrm>
-          <a:prstGeom prst="rect">
-            <a:avLst/>
-          </a:prstGeom>
-          <a:noFill/>
-          <a:ln/>
-        </p:spPr>
-        <p:txBody>
-          <a:bodyPr wrap="square" lIns="0" tIns="0" rIns="0" bIns="0" rtlCol="0" anchor="ctr"/>
-          <a:lstStyle/>
-          <a:p>
-            <a:pPr indent="0" marL="0">
-              <a:buNone/>
-            </a:pPr>
-            <a:r>
-              <a:rPr lang="en-US" sz="1100" dirty="0">
-                <a:solidFill>
-                  <a:srgbClr val="1E293B"/>
-                </a:solidFill>
-                <a:latin typeface="Arial" pitchFamily="34" charset="0"/>
-                <a:ea typeface="Arial" pitchFamily="34" charset="-122"/>
-                <a:cs typeface="Arial" pitchFamily="34" charset="-120"/>
-              </a:rPr>
-              <a:t>Yes/No tokens can't price CPI ranges, vote shares, or goal counts — institutions can't hedge interval risk</a:t>
-            </a:r>
-            <a:endParaRPr lang="en-US" sz="1100" dirty="0"/>
-          </a:p>
-        </p:txBody>
-      </p:sp>
-      <p:sp>
-        <p:nvSpPr>
-          <p:cNvPr id="9" name="Shape 7"/>
-          <p:cNvSpPr/>
-          <p:nvPr/>
-        </p:nvSpPr>
-        <p:spPr>
-          <a:xfrm>
-            <a:off x="365760" y="2377440"/>
-            <a:ext cx="73152" cy="914400"/>
-          </a:xfrm>
-          <a:prstGeom prst="rect">
-            <a:avLst/>
-          </a:prstGeom>
-          <a:solidFill>
-            <a:srgbClr val="F96167"/>
-          </a:solidFill>
-          <a:ln/>
-        </p:spPr>
-      </p:sp>
-      <p:sp>
-        <p:nvSpPr>
-          <p:cNvPr id="10" name="Text 8"/>
-          <p:cNvSpPr/>
-          <p:nvPr/>
-        </p:nvSpPr>
-        <p:spPr>
-          <a:xfrm>
-            <a:off x="594360" y="2423160"/>
-            <a:ext cx="8046720" cy="320040"/>
-          </a:xfrm>
-          <a:prstGeom prst="rect">
-            <a:avLst/>
-          </a:prstGeom>
-          <a:noFill/>
-          <a:ln/>
-        </p:spPr>
-        <p:txBody>
-          <a:bodyPr wrap="square" lIns="0" tIns="0" rIns="0" bIns="0" rtlCol="0" anchor="ctr"/>
-          <a:lstStyle/>
-          <a:p>
-            <a:pPr indent="0" marL="0">
-              <a:buNone/>
-            </a:pPr>
-            <a:r>
-              <a:rPr lang="en-US" sz="1400" b="1" dirty="0">
-                <a:solidFill>
-                  <a:srgbClr val="065A82"/>
-                </a:solidFill>
-                <a:latin typeface="Arial" pitchFamily="34" charset="0"/>
-                <a:ea typeface="Arial" pitchFamily="34" charset="-122"/>
-                <a:cs typeface="Arial" pitchFamily="34" charset="-120"/>
-              </a:rPr>
-              <a:t>Unaudited signal-selling — KOL track records are forgeable</a:t>
-            </a:r>
-            <a:endParaRPr lang="en-US" sz="1400" dirty="0"/>
-          </a:p>
-        </p:txBody>
-      </p:sp>
-      <p:sp>
-        <p:nvSpPr>
-          <p:cNvPr id="11" name="Text 9"/>
-          <p:cNvSpPr/>
-          <p:nvPr/>
-        </p:nvSpPr>
-        <p:spPr>
-          <a:xfrm>
-            <a:off x="594360" y="2761488"/>
-            <a:ext cx="8046720" cy="502920"/>
-          </a:xfrm>
-          <a:prstGeom prst="rect">
-            <a:avLst/>
-          </a:prstGeom>
-          <a:noFill/>
-          <a:ln/>
-        </p:spPr>
-        <p:txBody>
-          <a:bodyPr wrap="square" lIns="0" tIns="0" rIns="0" bIns="0" rtlCol="0" anchor="ctr"/>
-          <a:lstStyle/>
-          <a:p>
-            <a:pPr indent="0" marL="0">
-              <a:buNone/>
-            </a:pPr>
-            <a:r>
-              <a:rPr lang="en-US" sz="1100" dirty="0">
-                <a:solidFill>
-                  <a:srgbClr val="1E293B"/>
-                </a:solidFill>
-                <a:latin typeface="Arial" pitchFamily="34" charset="0"/>
-                <a:ea typeface="Arial" pitchFamily="34" charset="-122"/>
-                <a:cs typeface="Arial" pitchFamily="34" charset="-120"/>
-              </a:rPr>
-              <a:t>Paid KOL track records are forgeable — subscribers can't verify signals after the fact</a:t>
-            </a:r>
-            <a:endParaRPr lang="en-US" sz="1100" dirty="0"/>
-          </a:p>
-        </p:txBody>
-      </p:sp>
-      <p:sp>
-        <p:nvSpPr>
-          <p:cNvPr id="12" name="Shape 10"/>
-          <p:cNvSpPr/>
-          <p:nvPr/>
-        </p:nvSpPr>
-        <p:spPr>
-          <a:xfrm>
-            <a:off x="365760" y="3520440"/>
-            <a:ext cx="73152" cy="914400"/>
-          </a:xfrm>
-          <a:prstGeom prst="rect">
-            <a:avLst/>
-          </a:prstGeom>
-          <a:solidFill>
-            <a:srgbClr val="F96167"/>
-          </a:solidFill>
-          <a:ln/>
-        </p:spPr>
-      </p:sp>
-      <p:sp>
-        <p:nvSpPr>
-          <p:cNvPr id="13" name="Text 11"/>
-          <p:cNvSpPr/>
-          <p:nvPr/>
-        </p:nvSpPr>
-        <p:spPr>
-          <a:xfrm>
-            <a:off x="594360" y="3566160"/>
-            <a:ext cx="8046720" cy="320040"/>
-          </a:xfrm>
-          <a:prstGeom prst="rect">
-            <a:avLst/>
-          </a:prstGeom>
-          <a:noFill/>
-          <a:ln/>
-        </p:spPr>
-        <p:txBody>
-          <a:bodyPr wrap="square" lIns="0" tIns="0" rIns="0" bIns="0" rtlCol="0" anchor="ctr"/>
-          <a:lstStyle/>
-          <a:p>
-            <a:pPr indent="0" marL="0">
-              <a:buNone/>
-            </a:pPr>
-            <a:r>
-              <a:rPr lang="en-US" sz="1400" b="1" dirty="0">
-                <a:solidFill>
-                  <a:srgbClr val="065A82"/>
-                </a:solidFill>
-                <a:latin typeface="Arial" pitchFamily="34" charset="0"/>
-                <a:ea typeface="Arial" pitchFamily="34" charset="-122"/>
-                <a:cs typeface="Arial" pitchFamily="34" charset="-120"/>
-              </a:rPr>
-              <a:t>Split settlement — trading &amp; insights lack one truth source</a:t>
-            </a:r>
-            <a:endParaRPr lang="en-US" sz="1400" dirty="0"/>
-          </a:p>
-        </p:txBody>
-      </p:sp>
-      <p:sp>
-        <p:nvSpPr>
-          <p:cNvPr id="14" name="Text 12"/>
-          <p:cNvSpPr/>
-          <p:nvPr/>
-        </p:nvSpPr>
-        <p:spPr>
-          <a:xfrm>
-            <a:off x="594360" y="3904488"/>
-            <a:ext cx="8046720" cy="502920"/>
-          </a:xfrm>
-          <a:prstGeom prst="rect">
-            <a:avLst/>
-          </a:prstGeom>
-          <a:noFill/>
-          <a:ln/>
-        </p:spPr>
-        <p:txBody>
-          <a:bodyPr wrap="square" lIns="0" tIns="0" rIns="0" bIns="0" rtlCol="0" anchor="ctr"/>
-          <a:lstStyle/>
-          <a:p>
-            <a:pPr indent="0" marL="0">
-              <a:buNone/>
-            </a:pPr>
-            <a:r>
-              <a:rPr lang="en-US" sz="1100" dirty="0">
-                <a:solidFill>
-                  <a:srgbClr val="1E293B"/>
-                </a:solidFill>
-                <a:latin typeface="Arial" pitchFamily="34" charset="0"/>
-                <a:ea typeface="Arial" pitchFamily="34" charset="-122"/>
-                <a:cs typeface="Arial" pitchFamily="34" charset="-120"/>
-              </a:rPr>
-              <a:t>Betting outcomes and paid analysis use different Oracles — one event can't aggregate on a single root</a:t>
-            </a:r>
-            <a:endParaRPr lang="en-US" sz="1100" dirty="0"/>
-          </a:p>
-        </p:txBody>
-      </p:sp>
-      <p:sp>
-        <p:nvSpPr>
-          <p:cNvPr id="15" name="Shape 13"/>
-          <p:cNvSpPr/>
-          <p:nvPr/>
-        </p:nvSpPr>
-        <p:spPr>
-          <a:xfrm>
-            <a:off x="365760" y="4663440"/>
-            <a:ext cx="73152" cy="914400"/>
-          </a:xfrm>
-          <a:prstGeom prst="rect">
-            <a:avLst/>
-          </a:prstGeom>
-          <a:solidFill>
-            <a:srgbClr val="F96167">
-              <a:alpha val="0"/>
-            </a:srgbClr>
-          </a:solidFill>
-          <a:ln/>
-        </p:spPr>
-      </p:sp>
-      <p:sp>
-        <p:nvSpPr>
-          <p:cNvPr id="16" name="Text 14"/>
-          <p:cNvSpPr/>
-          <p:nvPr/>
-        </p:nvSpPr>
-        <p:spPr>
-          <a:xfrm>
-            <a:off x="594360" y="4709160"/>
-            <a:ext cx="8046720" cy="320040"/>
-          </a:xfrm>
-          <a:prstGeom prst="rect">
-            <a:avLst/>
-          </a:prstGeom>
-          <a:noFill/>
-          <a:ln/>
-        </p:spPr>
-        <p:txBody>
-          <a:bodyPr wrap="square" lIns="0" tIns="0" rIns="0" bIns="0" rtlCol="0" anchor="ctr"/>
-          <a:lstStyle/>
-          <a:p>
-            <a:pPr indent="0" marL="0">
-              <a:buNone/>
-            </a:pPr>
-            <a:r>
-              <a:rPr lang="en-US" sz="1400" b="1" dirty="0">
-                <a:solidFill>
-                  <a:srgbClr val="065A82"/>
-                </a:solidFill>
-                <a:latin typeface="Arial" pitchFamily="34" charset="0"/>
-                <a:ea typeface="Arial" pitchFamily="34" charset="-122"/>
-                <a:cs typeface="Arial" pitchFamily="34" charset="-120"/>
-              </a:rPr>
-              <a:t/>
-            </a:r>
-            <a:endParaRPr lang="en-US" sz="1400" dirty="0"/>
-          </a:p>
-        </p:txBody>
-      </p:sp>
-      <p:sp>
-        <p:nvSpPr>
-          <p:cNvPr id="17" name="Text 15"/>
-          <p:cNvSpPr/>
-          <p:nvPr/>
-        </p:nvSpPr>
-        <p:spPr>
-          <a:xfrm>
-            <a:off x="594360" y="5047488"/>
-            <a:ext cx="8046720" cy="502920"/>
-          </a:xfrm>
-          <a:prstGeom prst="rect">
-            <a:avLst/>
-          </a:prstGeom>
-          <a:noFill/>
-          <a:ln/>
-        </p:spPr>
-        <p:txBody>
-          <a:bodyPr wrap="square" lIns="0" tIns="0" rIns="0" bIns="0" rtlCol="0" anchor="ctr"/>
-          <a:lstStyle/>
-          <a:p>
-            <a:pPr indent="0" marL="0">
-              <a:buNone/>
-            </a:pPr>
-            <a:r>
-              <a:rPr lang="en-US" sz="1100" dirty="0">
-                <a:solidFill>
-                  <a:srgbClr val="1E293B"/>
-                </a:solidFill>
-                <a:latin typeface="Arial" pitchFamily="34" charset="0"/>
-                <a:ea typeface="Arial" pitchFamily="34" charset="-122"/>
-                <a:cs typeface="Arial" pitchFamily="34" charset="-120"/>
-              </a:rPr>
-              <a:t/>
-            </a:r>
-            <a:endParaRPr lang="en-US" sz="1100" dirty="0"/>
-          </a:p>
-        </p:txBody>
-      </p:sp>
-      <p:sp>
-        <p:nvSpPr>
-          <p:cNvPr id="18" name="Shape 16"/>
-          <p:cNvSpPr/>
-          <p:nvPr/>
-        </p:nvSpPr>
-        <p:spPr>
-          <a:xfrm>
-            <a:off x="365760" y="4434840"/>
-            <a:ext cx="8412480" cy="502920"/>
-          </a:xfrm>
-          <a:prstGeom prst="rect">
-            <a:avLst/>
-          </a:prstGeom>
-          <a:solidFill>
-            <a:srgbClr val="21295C"/>
-          </a:solidFill>
-          <a:ln/>
-        </p:spPr>
-      </p:sp>
-      <p:sp>
-        <p:nvSpPr>
-          <p:cNvPr id="19" name="Text 17"/>
-          <p:cNvSpPr/>
-          <p:nvPr/>
-        </p:nvSpPr>
-        <p:spPr>
-          <a:xfrm>
-            <a:off x="502920" y="4526280"/>
-            <a:ext cx="8138160" cy="365760"/>
-          </a:xfrm>
-          <a:prstGeom prst="rect">
-            <a:avLst/>
-          </a:prstGeom>
-          <a:noFill/>
-          <a:ln/>
-        </p:spPr>
-        <p:txBody>
-          <a:bodyPr wrap="square" lIns="0" tIns="0" rIns="0" bIns="0" rtlCol="0" anchor="ctr"/>
-          <a:lstStyle/>
-          <a:p>
-            <a:pPr indent="0" marL="0">
-              <a:buNone/>
-            </a:pPr>
-            <a:r>
-              <a:rPr lang="en-US" sz="1100" b="1" dirty="0">
-                <a:solidFill>
-                  <a:srgbClr val="02C39A"/>
-                </a:solidFill>
-                <a:latin typeface="Arial" pitchFamily="34" charset="0"/>
-                <a:ea typeface="Arial" pitchFamily="34" charset="-122"/>
-                <a:cs typeface="Arial" pitchFamily="34" charset="-120"/>
-              </a:rPr>
-              <a:t>Video hook: prediction markets must evolve from outcome gambling to probability distribution derivatives — X-Market rebuilds this on Sui</a:t>
-            </a:r>
-            <a:endParaRPr lang="en-US" sz="1100" dirty="0"/>
-          </a:p>
-        </p:txBody>
-      </p:sp>
-    </p:spTree>
-  </p:cSld>
-  <p:clrMapOvr>
-    <a:masterClrMapping/>
-  </p:clrMapOvr>
-</p:sld>
-</file>
-
-<file path=ppt/slides/slide18.xml><?xml version="1.0" encoding="utf-8"?>
-<p:sld xmlns:a="http://schemas.openxmlformats.org/drawingml/2006/main" xmlns:r="http://schemas.openxmlformats.org/officeDocument/2006/relationships" xmlns:p="http://schemas.openxmlformats.org/presentationml/2006/main">
-  
-  
-  <p:cSld name="Slide 13">
-    
-    
-    <p:bg>
-      
-      
-      <p:bgPr>
-        
-        
-        <a:solidFill>
-          
-          
-          <a:srgbClr val="F0F7FA"/>
-          
-        
-        </a:solidFill>
-        
-      
-      </p:bgPr>
-      
-    
-    </p:bg>
-    
-    
-    <p:spTree>
-      
-      
-      <p:nvGrpSpPr>
-        
-        
-        <p:cNvPr id="1" name=""/>
-        
-        
-        <p:cNvGrpSpPr/>
-        
-        
-        <p:nvPr/>
-        
-      
-      </p:nvGrpSpPr>
-      
-      
-      <p:grpSpPr>
-        
-        
-        <a:xfrm>
-          
-          
-          <a:off x="0" y="0"/>
-          
-          
-          <a:ext cx="0" cy="0"/>
-          
-          
-          <a:chOff x="0" y="0"/>
-          
-          
-          <a:chExt cx="0" cy="0"/>
-          
-        
-        </a:xfrm>
-        
-      
-      </p:grpSpPr>
-      
-      
-      <p:sp>
-        
-        
-        <p:nvSpPr>
-          
-          
-          <p:cNvPr id="2" name="Shape 0"/>
-          
-          
-          <p:cNvSpPr/>
-          
-          
-          <p:nvPr/>
-          
-        
-        </p:nvSpPr>
-        
-        
-        <p:spPr>
-          
-          
-          <a:xfrm>
-            
-            
-            <a:off x="0" y="0"/>
-            
-            
-            <a:ext cx="9144000" cy="960120"/>
-            
-          
-          </a:xfrm>
-          
-          
-          <a:prstGeom prst="rect">
-            
-            
-            <a:avLst/>
-            
-          
-          </a:prstGeom>
-          
-          
-          <a:solidFill>
-            
-            
-            <a:srgbClr val="065A82"/>
-            
-          
-          </a:solidFill>
-          
-          
-          <a:ln/>
-          
-        
-        </p:spPr>
-        
-      
-      </p:sp>
-      
-      
-      <p:sp>
-        
-        
-        <p:nvSpPr>
-          
-          
-          <p:cNvPr id="3" name="Shape 1"/>
-          
-          
-          <p:cNvSpPr/>
-          
-          
-          <p:nvPr/>
-          
-        
-        </p:nvSpPr>
-        
-        
-        <p:spPr>
-          
-          
-          <a:xfrm>
-            
-            
-            <a:off x="0" y="960120"/>
-            
-            
-            <a:ext cx="9144000" cy="54864"/>
-            
-          
-          </a:xfrm>
-          
-          
-          <a:prstGeom prst="rect">
-            
-            
-            <a:avLst/>
-            
-          
-          </a:prstGeom>
-          
-          
-          <a:solidFill>
-            
-            
-            <a:srgbClr val="02C39A"/>
-            
-          
-          </a:solidFill>
-          
-          
-          <a:ln/>
-          
-        
-        </p:spPr>
-        
-      
-      </p:sp>
-      
-      
-      <p:sp>
-        
-        
-        <p:nvSpPr>
-          
-          
-          <p:cNvPr id="4" name="Text 2"/>
-          
-          
-          <p:cNvSpPr/>
-          
-          
-          <p:nvPr/>
-          
-        
-        </p:nvSpPr>
-        
-        
-        <p:spPr>
-          
-          
-          <a:xfrm>
-            
-            
-            <a:off x="457200" y="164592"/>
-            
-            
-            <a:ext cx="8229600" cy="502920"/>
-            
-          
-          </a:xfrm>
-          
-          
-          <a:prstGeom prst="rect">
-            
-            
-            <a:avLst/>
-            
-          
-          </a:prstGeom>
-          
-          
-          <a:noFill/>
-          
-          
-          <a:ln/>
-          
-        
-        </p:spPr>
-        
-        
-        <p:txBody>
-          
-          
-          <a:bodyPr wrap="square" lIns="0" tIns="0" rIns="0" bIns="0" rtlCol="0" anchor="ctr"/>
-          
-          
-          <a:lstStyle/>
-          
-          
-          <a:p>
-            
-            
-            <a:pPr indent="0" marL="0">
-              
-              
-              <a:buNone/>
-              
-            
-            </a:pPr>
-            
-            
-            <a:r>
-              
-              
-              <a:rPr lang="en-US" sz="2800" b="1" dirty="0">
-                
-                
-                <a:solidFill>
-                  
-                  
-                  <a:srgbClr val="FFFFFF"/>
-                  
-                
-                </a:solidFill>
-                
-                
-                <a:latin typeface="Arial" pitchFamily="34" charset="0"/>
-                
-                
-                <a:ea typeface="Arial" pitchFamily="34" charset="-122"/>
-                
-                
-                <a:cs typeface="Arial" pitchFamily="34" charset="-120"/>
-                
-              
-              </a:rPr>
-              
-              
-              <a:t>Conclusion & Future</a:t>
-              
-            
-            </a:r>
-            
-            
-            <a:endParaRPr lang="en-US" sz="2800" dirty="0"/>
-            
-          
-          </a:p>
-          
-        
-        </p:txBody>
-        
-      
-      </p:sp>
-      
-      
-      <p:sp>
-        
-        
-        <p:nvSpPr>
-          
-          
-          <p:cNvPr id="5" name="Text 3"/>
-          
-          
-          <p:cNvSpPr/>
-          
-          
-          <p:nvPr/>
-          
-        
-        </p:nvSpPr>
-        
-        
-        <p:spPr>
-          
-          
-          <a:xfrm>
-            
-            
-            <a:off x="457200" y="621792"/>
-            
-            
-            <a:ext cx="8229600" cy="274320"/>
-            
-          
-          </a:xfrm>
-          
-          
-          <a:prstGeom prst="rect">
-            
-            
-            <a:avLst/>
-            
-          
-          </a:prstGeom>
-          
-          
-          <a:noFill/>
-          
-          
-          <a:ln/>
-          
-        
-        </p:spPr>
-        
-        
-        <p:txBody>
-          
-          
-          <a:bodyPr wrap="square" lIns="0" tIns="0" rIns="0" bIns="0" rtlCol="0" anchor="ctr"/>
-          
-          
-          <a:lstStyle/>
-          
-          
-          <a:p>
-            
-            
-            <a:pPr indent="0" marL="0">
-              
-              
-              <a:buNone/>
-              
-            
-            </a:pPr>
-            
-            
-            <a:r>
-              
-              
-              <a:rPr lang="en-US" sz="1200" dirty="0">
-                
-                
-                <a:solidFill>
-                  
-                  
-                  <a:srgbClr val="CADCFC"/>
-                  
-                
-                </a:solidFill>
-                
-                
-                <a:latin typeface="Arial" pitchFamily="34" charset="0"/>
-                
-                
-                <a:ea typeface="Arial" pitchFamily="34" charset="-122"/>
-                
-                
-                <a:cs typeface="Arial" pitchFamily="34" charset="-120"/>
-                
-              
-              </a:rPr>
-              
-              
-              <a:t>From Testnet validation to mainnet infrastructure · ~60–90 sec</a:t>
-              
-            
-            </a:r>
-            
-            
-            <a:endParaRPr lang="en-US" sz="1200" dirty="0"/>
-            
-          
-          </a:p>
-          
-        
-        </p:txBody>
-        
-      
-      </p:sp>
-      
-      
-      <p:sp>
-        
-        
-        <p:nvSpPr>
-          
-          
-          <p:cNvPr id="6" name="Shape 4"/>
-          
-          
-          <p:cNvSpPr/>
-          
-          
-          <p:nvPr/>
-          
-        
-        </p:nvSpPr>
-        
-        
-        <p:spPr>
-          
-          
-          <a:xfrm>
-            
-            
-            <a:off x="365760" y="1188720"/>
-            
-            
-            <a:ext cx="4023360" cy="1691640"/>
-            
-          
-          </a:xfrm>
-          
-          
-          <a:prstGeom prst="rect">
-            
-            
-            <a:avLst/>
-            
-          
-          </a:prstGeom>
-          
-          
-          <a:solidFill>
-            
-            
-            <a:srgbClr val="FFFFFF"/>
-            
-          
-          </a:solidFill>
-          
-          
-          <a:ln w="12700">
-            
-            
-            <a:solidFill>
-              
-              
-              <a:srgbClr val="E2E8F0"/>
-              
-            
-            </a:solidFill>
-            
-            
-            <a:prstDash val="solid"/>
-            
-          
-          </a:ln>
-          
-          
-          <a:effectLst>
-            
-             
-            
-            <a:outerShdw sx="100000" sy="100000" kx="0" ky="0" algn="bl" rotWithShape="0" blurRad="50800" dist="25400" dir="8100000">
-              
-               
-              
-              <a:srgbClr val="000000">
-                
-                 
-                
-                <a:alpha val="12000"/>
-                
-              
-              </a:srgbClr>
-              
-               
-            
-            </a:outerShdw>
-            
-          
-          </a:effectLst>
-          
-        
-        </p:spPr>
-        
-      
-      </p:sp>
-      
-      
-      <p:sp>
-        
-        
-        <p:nvSpPr>
-          
-          
-          <p:cNvPr id="7" name="Shape 5"/>
-          
-          
-          <p:cNvSpPr/>
-          
-          
-          <p:nvPr/>
-          
-        
-        </p:nvSpPr>
-        
-        
-        <p:spPr>
-          
-          
-          <a:xfrm>
-            
-            
-            <a:off x="548640" y="1371600"/>
-            
-            
-            <a:ext cx="502920" cy="502920"/>
-            
-          
-          </a:xfrm>
-          
-          
-          <a:prstGeom prst="ellipse">
-            
-            
-            <a:avLst/>
-            
-          
-          </a:prstGeom>
-          
-          
-          <a:solidFill>
-            
-            
-            <a:srgbClr val="02C39A"/>
-            
-          
-          </a:solidFill>
-          
-          
-          <a:ln/>
-          
-        
-        </p:spPr>
-        
-      
-      </p:sp>
-      
-      
-      <p:sp>
-        
-        
-        <p:nvSpPr>
-          
-          
-          <p:cNvPr id="8" name="Text 6"/>
-          
-          
-          <p:cNvSpPr/>
-          
-          
-          <p:nvPr/>
-          
-        
-        </p:nvSpPr>
-        
-        
-        <p:spPr>
-          
-          
-          <a:xfrm>
-            
-            
-            <a:off x="548640" y="1371600"/>
-            
-            
-            <a:ext cx="502920" cy="502920"/>
-            
-          
-          </a:xfrm>
-          
-          
-          <a:prstGeom prst="rect">
-            
-            
-            <a:avLst/>
-            
-          
-          </a:prstGeom>
-          
-          
-          <a:noFill/>
-          
-          
-          <a:ln/>
-          
-        
-        </p:spPr>
-        
-        
-        <p:txBody>
-          
-          
-          <a:bodyPr wrap="square" lIns="0" tIns="0" rIns="0" bIns="0" rtlCol="0" anchor="ctr"/>
-          
-          
-          <a:lstStyle/>
-          
-          
-          <a:p>
-            
-            
-            <a:pPr algn="ctr" indent="0" marL="0">
-              
-              
-              <a:buNone/>
-              
-            
-            </a:pPr>
-            
-            
-            <a:r>
-              
-              
-              <a:rPr lang="en-US" sz="1600" dirty="0">
-                
-                
-                <a:solidFill>
-                  
-                  
-                  <a:srgbClr val="000000"/>
-                  
-                
-                </a:solidFill>
-                
-              
-              </a:rPr>
-              
-              
-              <a:t>✅</a:t>
-              
-            
-            </a:r>
-            
-            
-            <a:endParaRPr lang="en-US" sz="1600" dirty="0"/>
-            
-          
-          </a:p>
-          
-        
-        </p:txBody>
-        
-      
-      </p:sp>
-      
-      
-      <p:sp>
-        
-        
-        <p:nvSpPr>
-          
-          
-          <p:cNvPr id="9" name="Text 7"/>
-          
-          
-          <p:cNvSpPr/>
-          
-          
-          <p:nvPr/>
-          
-        
-        </p:nvSpPr>
-        
-        
-        <p:spPr>
-          
-          
-          <a:xfrm>
-            
-            
-            <a:off x="1143000" y="1353312"/>
-            
-            
-            <a:ext cx="3108960" cy="365760"/>
-            
-          
-          </a:xfrm>
-          
-          
-          <a:prstGeom prst="rect">
-            
-            
-            <a:avLst/>
-            
-          
-          </a:prstGeom>
-          
-          
-          <a:noFill/>
-          
-          
-          <a:ln/>
-          
-        
-        </p:spPr>
-        
-        
-        <p:txBody>
-          
-          
-          <a:bodyPr wrap="square" lIns="0" tIns="0" rIns="0" bIns="0" rtlCol="0" anchor="ctr"/>
-          
-          
-          <a:lstStyle/>
-          
-          
-          <a:p>
-            
-            
-            <a:pPr indent="0" marL="0">
-              
-              
-              <a:buNone/>
-              
-            
-            </a:pPr>
-            
-            
-            <a:r>
-              
-              
-              <a:rPr lang="en-US" sz="1400" b="1" dirty="0">
-                
-                
-                <a:solidFill>
-                  
-                  
-                  <a:srgbClr val="065A82"/>
-                  
-                
-                </a:solidFill>
-                
-                
-                <a:latin typeface="Arial" pitchFamily="34" charset="0"/>
-                
-                
-                <a:ea typeface="Arial" pitchFamily="34" charset="-122"/>
-                
-                
-                <a:cs typeface="Arial" pitchFamily="34" charset="-120"/>
-                
-              
-              </a:rPr>
-              
-              
-              <a:t>Core Conclusions</a:t>
-              
-            
-            </a:r>
-            
-            
-            <a:endParaRPr lang="en-US" sz="1400" dirty="0"/>
-            
-          
-          </a:p>
-          
-        
-        </p:txBody>
-        
-      
-      </p:sp>
-      
-      
-      <p:sp>
-        
-        
-        <p:nvSpPr>
-          
-          
-          <p:cNvPr id="10" name="Text 8"/>
-          
-          
-          <p:cNvSpPr/>
-          
-          
-          <p:nvPr/>
-          
-        
-        </p:nvSpPr>
-        
-        
-        <p:spPr>
-          
-          
-          <a:xfrm>
-            
-            
-            <a:off x="548640" y="1874520"/>
-            
-            
-            <a:ext cx="3657600" cy="914400"/>
-            
-          
-          </a:xfrm>
-          
-          
-          <a:prstGeom prst="rect">
-            
-            
-            <a:avLst/>
-            
-          
-          </a:prstGeom>
-          
-          
-          <a:noFill/>
-          
-          
-          <a:ln/>
-          
-        
-        </p:spPr>
-        
-        
-        <p:txBody>
-          
-          
-          <a:bodyPr wrap="square" rtlCol="0" anchor="t"/>
-          
-          
-          <a:lstStyle/>
-          
-          
-          <a:p>
-            
-            
-            <a:pPr marL="342900" indent="-342900">
-              
-              
-              <a:buSzPct val="100000"/>
-              
-              
-              <a:buChar char="•"/>
-              
-            
-            </a:pPr>
-            
-            
-            <a:r>
-              
-              
-              <a:rPr lang="en-US" sz="1000" dirty="0">
-                
-                
-                <a:solidFill>
-                  
-                  
-                  <a:srgbClr val="1E293B"/>
-                  
-                
-                </a:solidFill>
-                
-                
-                <a:latin typeface="Arial" pitchFamily="34" charset="0"/>
-                
-                
-                <a:ea typeface="Arial" pitchFamily="34" charset="-122"/>
-                
-                
-                <a:cs typeface="Arial" pitchFamily="34" charset="-120"/>
-                
-              
-              </a:rPr>
-              
-              
-              <a:t>Prediction markets must evolve from gambling to PDF probability derivatives</a:t>
-              
-            
-            </a:r>
-            
-            
-            <a:endParaRPr lang="en-US" sz="1000" dirty="0"/>
-            
-          
-          </a:p>
-          
-          
-          <a:p>
-            
-            
-            <a:pPr marL="342900" indent="-342900">
-              
-              
-              <a:buSzPct val="100000"/>
-              
-              
-              <a:buChar char="•"/>
-              
-            
-            </a:pPr>
-            
-            
-            <a:r>
-              
-              
-              <a:rPr lang="en-US" sz="1000" dirty="0">
-                
-                
-                <a:solidFill>
-                  
-                  
-                  <a:srgbClr val="1E293B"/>
-                  
-                
-                </a:solidFill>
-                
-                
-                <a:latin typeface="Arial" pitchFamily="34" charset="0"/>
-                
-                
-                <a:ea typeface="Arial" pitchFamily="34" charset="-122"/>
-                
-                
-                <a:cs typeface="Arial" pitchFamily="34" charset="-120"/>
-                
-              
-              </a:rPr>
-              
-              
-              <a:t>Dual modules share EventRoot · unified Oracle settlement truth</a:t>
-              
-            
-            </a:r>
-            
-            
-            <a:endParaRPr lang="en-US" sz="1000" dirty="0"/>
-            
-          
-          </a:p>
-          
-          
-          <a:p>
-            
-            
-            <a:pPr marL="342900" indent="-342900">
-              
-              
-              <a:buSzPct val="100000"/>
-              
-              
-              <a:buChar char="•"/>
-              
-            
-            </a:pPr>
-            
-            
-            <a:r>
-              
-              
-              <a:rPr lang="en-US" sz="1000" dirty="0">
-                
-                
-                <a:solidFill>
-                  
-                  
-                  <a:srgbClr val="1E293B"/>
-                  
-                
-                </a:solidFill>
-                
-                
-                <a:latin typeface="Arial" pitchFamily="34" charset="0"/>
-                
-                
-                <a:ea typeface="Arial" pitchFamily="34" charset="-122"/>
-                
-                
-                <a:cs typeface="Arial" pitchFamily="34" charset="-120"/>
-                
-              
-              </a:rPr>
-              
-              
-              <a:t>On-chain PDF pricing + Seal forced audit · four-sided win-win ecosystem</a:t>
-              
-            
-            </a:r>
-            
-            
-            <a:endParaRPr lang="en-US" sz="1000" dirty="0"/>
-            
-          
-          </a:p>
-          
-          
-          <a:p>
-            
-            
-            <a:pPr marL="342900" indent="-342900">
-              
-              
-              <a:buSzPct val="100000"/>
-              
-              
-              <a:buChar char="•"/>
-              
-            
-            </a:pPr>
-            
-            
-            <a:r>
-              
-              
-              <a:rPr lang="en-US" sz="1000" dirty="0">
-                
-                
-                <a:solidFill>
-                  
-                  
-                  <a:srgbClr val="1E293B"/>
-                  
-                
-                </a:solidFill>
-                
-                
-                <a:latin typeface="Arial" pitchFamily="34" charset="0"/>
-                
-                
-                <a:ea typeface="Arial" pitchFamily="34" charset="-122"/>
-                
-                
-                <a:cs typeface="Arial" pitchFamily="34" charset="-120"/>
-                
-              
-              </a:rPr>
-              
-              
-              <a:t>Testnet v2 full stack validated — not a concept</a:t>
-              
-            
-            </a:r>
-            
-            
-            <a:endParaRPr lang="en-US" sz="1000" dirty="0"/>
-            
-          
-          </a:p>
-          
-        
-        </p:txBody>
-        
-      
-      </p:sp>
-      
-      
-      <p:sp>
-        
-        
-        <p:nvSpPr>
-          
-          
-          <p:cNvPr id="11" name="Shape 9"/>
-          
-          
-          <p:cNvSpPr/>
-          
-          
-          <p:nvPr/>
-          
-        
-        </p:nvSpPr>
-        
-        
-        <p:spPr>
-          
-          
-          <a:xfrm>
-            
-            
-            <a:off x="4754880" y="1188720"/>
-            
-            
-            <a:ext cx="4023360" cy="1691640"/>
-            
-          
-          </a:xfrm>
-          
-          
-          <a:prstGeom prst="rect">
-            
-            
-            <a:avLst/>
-            
-          
-          </a:prstGeom>
-          
-          
-          <a:solidFill>
-            
-            
-            <a:srgbClr val="FFFFFF"/>
-            
-          
-          </a:solidFill>
-          
-          
-          <a:ln w="12700">
-            
-            
-            <a:solidFill>
-              
-              
-              <a:srgbClr val="E2E8F0"/>
-              
-            
-            </a:solidFill>
-            
-            
-            <a:prstDash val="solid"/>
-            
-          
-          </a:ln>
-          
-          
-          <a:effectLst>
-            
-             
-            
-            <a:outerShdw sx="100000" sy="100000" kx="0" ky="0" algn="bl" rotWithShape="0" blurRad="50800" dist="25400" dir="8100000">
-              
-               
-              
-              <a:srgbClr val="000000">
-                
-                 
-                
-                <a:alpha val="12000"/>
-                
-              
-              </a:srgbClr>
-              
-               
-            
-            </a:outerShdw>
-            
-          
-          </a:effectLst>
-          
-        
-        </p:spPr>
-        
-      
-      </p:sp>
-      
-      
-      <p:sp>
-        
-        
-        <p:nvSpPr>
-          
-          
-          <p:cNvPr id="12" name="Shape 10"/>
-          
-          
-          <p:cNvSpPr/>
-          
-          
-          <p:nvPr/>
-          
-        
-        </p:nvSpPr>
-        
-        
-        <p:spPr>
-          
-          
-          <a:xfrm>
-            
-            
-            <a:off x="4937760" y="1371600"/>
-            
-            
-            <a:ext cx="502920" cy="502920"/>
-            
-          
-          </a:xfrm>
-          
-          
-          <a:prstGeom prst="ellipse">
-            
-            
-            <a:avLst/>
-            
-          
-          </a:prstGeom>
-          
-          
-          <a:solidFill>
-            
-            
-            <a:srgbClr val="1C7293"/>
-            
-          
-          </a:solidFill>
-          
-          
-          <a:ln/>
-          
-        
-        </p:spPr>
-        
-      
-      </p:sp>
-      
-      
-      <p:sp>
-        
-        
-        <p:nvSpPr>
-          
-          
-          <p:cNvPr id="13" name="Text 11"/>
-          
-          
-          <p:cNvSpPr/>
-          
-          
-          <p:nvPr/>
-          
-        
-        </p:nvSpPr>
-        
-        
-        <p:spPr>
-          
-          
-          <a:xfrm>
-            
-            
-            <a:off x="4937760" y="1371600"/>
-            
-            
-            <a:ext cx="502920" cy="502920"/>
-            
-          
-          </a:xfrm>
-          
-          
-          <a:prstGeom prst="rect">
-            
-            
-            <a:avLst/>
-            
-          
-          </a:prstGeom>
-          
-          
-          <a:noFill/>
-          
-          
-          <a:ln/>
-          
-        
-        </p:spPr>
-        
-        
-        <p:txBody>
-          
-          
-          <a:bodyPr wrap="square" lIns="0" tIns="0" rIns="0" bIns="0" rtlCol="0" anchor="ctr"/>
-          
-          
-          <a:lstStyle/>
-          
-          
-          <a:p>
-            
-            
-            <a:pPr algn="ctr" indent="0" marL="0">
-              
-              
-              <a:buNone/>
-              
-            
-            </a:pPr>
-            
-            
-            <a:r>
-              
-              
-              <a:rPr lang="en-US" sz="1600" dirty="0">
-                
-                
-                <a:solidFill>
-                  
-                  
-                  <a:srgbClr val="000000"/>
-                  
-                
-                </a:solidFill>
-                
-              
-              </a:rPr>
-              
-              
-              <a:t>🔬</a:t>
-              
-            
-            </a:r>
-            
-            
-            <a:endParaRPr lang="en-US" sz="1600" dirty="0"/>
-            
-          
-          </a:p>
-          
-        
-        </p:txBody>
-        
-      
-      </p:sp>
-      
-      
-      <p:sp>
-        
-        
-        <p:nvSpPr>
-          
-          
-          <p:cNvPr id="14" name="Text 12"/>
-          
-          
-          <p:cNvSpPr/>
-          
-          
-          <p:nvPr/>
-          
-        
-        </p:nvSpPr>
-        
-        
-        <p:spPr>
-          
-          
-          <a:xfrm>
-            
-            
-            <a:off x="5532120" y="1353312"/>
-            
-            
-            <a:ext cx="3108960" cy="365760"/>
-            
-          
-          </a:xfrm>
-          
-          
-          <a:prstGeom prst="rect">
-            
-            
-            <a:avLst/>
-            
-          
-          </a:prstGeom>
-          
-          
-          <a:noFill/>
-          
-          
-          <a:ln/>
-          
-        
-        </p:spPr>
-        
-        
-        <p:txBody>
-          
-          
-          <a:bodyPr wrap="square" lIns="0" tIns="0" rIns="0" bIns="0" rtlCol="0" anchor="ctr"/>
-          
-          
-          <a:lstStyle/>
-          
-          
-          <a:p>
-            
-            
-            <a:pPr indent="0" marL="0">
-              
-              
-              <a:buNone/>
-              
-            
-            </a:pPr>
-            
-            
-            <a:r>
-              
-              
-              <a:rPr lang="en-US" sz="1400" b="1" dirty="0">
-                
-                
-                <a:solidFill>
-                  
-                  
-                  <a:srgbClr val="065A82"/>
-                  
-                
-                </a:solidFill>
-                
-                
-                <a:latin typeface="Arial" pitchFamily="34" charset="0"/>
-                
-                
-                <a:ea typeface="Arial" pitchFamily="34" charset="-122"/>
-                
-                
-                <a:cs typeface="Arial" pitchFamily="34" charset="-120"/>
-                
-              
-              </a:rPr>
-              
-              
-              <a:t>Validated Capabilities</a:t>
-              
-            
-            </a:r>
-            
-            
-            <a:endParaRPr lang="en-US" sz="1400" dirty="0"/>
-            
-          
-          </a:p>
-          
-        
-        </p:txBody>
-        
-      
-      </p:sp>
-      
-      
-      <p:sp>
-        
-        
-        <p:nvSpPr>
-          
-          
-          <p:cNvPr id="15" name="Text 13"/>
-          
-          
-          <p:cNvSpPr/>
-          
-          
-          <p:nvPr/>
-          
-        
-        </p:nvSpPr>
-        
-        
-        <p:spPr>
-          
-          
-          <a:xfrm>
-            
-            
-            <a:off x="4937760" y="1874520"/>
-            
-            
-            <a:ext cx="3657600" cy="914400"/>
-            
-          
-          </a:xfrm>
-          
-          
-          <a:prstGeom prst="rect">
-            
-            
-            <a:avLst/>
-            
-          
-          </a:prstGeom>
-          
-          
-          <a:noFill/>
-          
-          
-          <a:ln/>
-          
-        
-        </p:spPr>
-        
-        
-        <p:txBody>
-          
-          
-          <a:bodyPr wrap="square" rtlCol="0" anchor="t"/>
-          
-          
-          <a:lstStyle/>
-          
-          
-          <a:p>
-            
-            
-            <a:pPr marL="342900" indent="-342900">
-              
-              
-              <a:buSzPct val="100000"/>
-              
-              
-              <a:buChar char="•"/>
-              
-            
-            </a:pPr>
-            
-            
-            <a:r>
-              
-              
-              <a:rPr lang="en-US" sz="1000" dirty="0">
-                
-                
-                <a:solidFill>
-                  
-                  
-                  <a:srgbClr val="1E293B"/>
-                  
-                
-                </a:solidFill>
-                
-                
-                <a:latin typeface="Arial" pitchFamily="34" charset="0"/>
-                
-                
-                <a:ea typeface="Arial" pitchFamily="34" charset="-122"/>
-                
-                
-                <a:cs typeface="Arial" pitchFamily="34" charset="-120"/>
-                
-              
-              </a:rPr>
-              
-              
-              <a:t>30+ Move modules · three distribution templates deployed</a:t>
-              
-            
-            </a:r>
-            
-            
-            <a:endParaRPr lang="en-US" sz="1000" dirty="0"/>
-            
-          
-          </a:p>
-          
-          
-          <a:p>
-            
-            
-            <a:pPr marL="342900" indent="-342900">
-              
-              
-              <a:buSzPct val="100000"/>
-              
-              
-              <a:buChar char="•"/>
-              
-            
-            </a:pPr>
-            
-            
-            <a:r>
-              
-              
-              <a:rPr lang="en-US" sz="1000" dirty="0">
-                
-                
-                <a:solidFill>
-                  
-                  
-                  <a:srgbClr val="1E293B"/>
-                  
-                
-                </a:solidFill>
-                
-                
-                <a:latin typeface="Arial" pitchFamily="34" charset="0"/>
-                
-                
-                <a:ea typeface="Arial" pitchFamily="34" charset="-122"/>
-                
-                
-                <a:cs typeface="Arial" pitchFamily="34" charset="-120"/>
-                
-              
-              </a:rPr>
-              
-              
-              <a:t>Opening Auction cold start · Max-Loss full-path coverage</a:t>
-              
-            
-            </a:r>
-            
-            
-            <a:endParaRPr lang="en-US" sz="1000" dirty="0"/>
-            
-          
-          </a:p>
-          
-          
-          <a:p>
-            
-            
-            <a:pPr marL="342900" indent="-342900">
-              
-              
-              <a:buSzPct val="100000"/>
-              
-              
-              <a:buChar char="•"/>
-              
-            
-            </a:pPr>
-            
-            
-            <a:r>
-              
-              
-              <a:rPr lang="en-US" sz="1000" dirty="0">
-                
-                
-                <a:solidFill>
-                  
-                  
-                  <a:srgbClr val="1E293B"/>
-                  
-                
-                </a:solidFill>
-                
-                
-                <a:latin typeface="Arial" pitchFamily="34" charset="0"/>
-                
-                
-                <a:ea typeface="Arial" pitchFamily="34" charset="-122"/>
-                
-                
-                <a:cs typeface="Arial" pitchFamily="34" charset="-120"/>
-                
-              
-              </a:rPr>
-              
-              
-              <a:t>SuiProphet + Indexer + Flutter end-to-end integrated</a:t>
-              
-            
-            </a:r>
-            
-            
-            <a:endParaRPr lang="en-US" sz="1000" dirty="0"/>
-            
-          
-          </a:p>
-          
-          
-          <a:p>
-            
-            
-            <a:pPr marL="342900" indent="-342900">
-              
-              
-              <a:buSzPct val="100000"/>
-              
-              
-              <a:buChar char="•"/>
-              
-            
-            </a:pPr>
-            
-            
-            <a:r>
-              
-              
-              <a:rPr lang="en-US" sz="1000" dirty="0">
-                
-                
-                <a:solidFill>
-                  
-                  
-                  <a:srgbClr val="1E293B"/>
-                  
-                
-                </a:solidFill>
-                
-                
-                <a:latin typeface="Arial" pitchFamily="34" charset="0"/>
-                
-                
-                <a:ea typeface="Arial" pitchFamily="34" charset="-122"/>
-                
-                
-                <a:cs typeface="Arial" pitchFamily="34" charset="-120"/>
-                
-              
-              </a:rPr>
-              
-              
-              <a:t>8+ off-chain microservices · Docker orchestration production-ready</a:t>
-              
-            
-            </a:r>
-            
-            
-            <a:endParaRPr lang="en-US" sz="1000" dirty="0"/>
-            
-          
-          </a:p>
-          
-        
-        </p:txBody>
-        
-      
-      </p:sp>
-      
-      
-      <p:sp>
-        
-        
-        <p:nvSpPr>
-          
-          
-          <p:cNvPr id="16" name="Shape 14"/>
-          
-          
-          <p:cNvSpPr/>
-          
-          
-          <p:nvPr/>
-          
-        
-        </p:nvSpPr>
-        
-        
-        <p:spPr>
-          
-          
-          <a:xfrm>
-            
-            
-            <a:off x="365760" y="3063240"/>
-            
-            
-            <a:ext cx="4023360" cy="1691640"/>
-            
-          
-          </a:xfrm>
-          
-          
-          <a:prstGeom prst="rect">
-            
-            
-            <a:avLst/>
-            
-          
-          </a:prstGeom>
-          
-          
-          <a:solidFill>
-            
-            
-            <a:srgbClr val="FFFFFF"/>
-            
-          
-          </a:solidFill>
-          
-          
-          <a:ln w="12700">
-            
-            
-            <a:solidFill>
-              
-              
-              <a:srgbClr val="E2E8F0"/>
-              
-            
-            </a:solidFill>
-            
-            
-            <a:prstDash val="solid"/>
-            
-          
-          </a:ln>
-          
-          
-          <a:effectLst>
-            
-             
-            
-            <a:outerShdw sx="100000" sy="100000" kx="0" ky="0" algn="bl" rotWithShape="0" blurRad="50800" dist="25400" dir="8100000">
-              
-               
-              
-              <a:srgbClr val="000000">
-                
-                 
-                
-                <a:alpha val="12000"/>
-                
-              
-              </a:srgbClr>
-              
-               
-            
-            </a:outerShdw>
-            
-          
-          </a:effectLst>
-          
-        
-        </p:spPr>
-        
-      
-      </p:sp>
-      
-      
-      <p:sp>
-        
-        
-        <p:nvSpPr>
-          
-          
-          <p:cNvPr id="17" name="Shape 15"/>
-          
-          
-          <p:cNvSpPr/>
-          
-          
-          <p:nvPr/>
-          
-        
-        </p:nvSpPr>
-        
-        
-        <p:spPr>
-          
-          
-          <a:xfrm>
-            
-            
-            <a:off x="548640" y="3246120"/>
-            
-            
-            <a:ext cx="502920" cy="502920"/>
-            
-          
-          </a:xfrm>
-          
-          
-          <a:prstGeom prst="ellipse">
-            
-            
-            <a:avLst/>
-            
-          
-          </a:prstGeom>
-          
-          
-          <a:solidFill>
-            
-            
-            <a:srgbClr val="065A82"/>
-            
-          
-          </a:solidFill>
-          
-          
-          <a:ln/>
-          
-        
-        </p:spPr>
-        
-      
-      </p:sp>
-      
-      
-      <p:sp>
-        
-        
-        <p:nvSpPr>
-          
-          
-          <p:cNvPr id="18" name="Text 16"/>
-          
-          
-          <p:cNvSpPr/>
-          
-          
-          <p:nvPr/>
-          
-        
-        </p:nvSpPr>
-        
-        
-        <p:spPr>
-          
-          
-          <a:xfrm>
-            
-            
-            <a:off x="548640" y="3246120"/>
-            
-            
-            <a:ext cx="502920" cy="502920"/>
-            
-          
-          </a:xfrm>
-          
-          
-          <a:prstGeom prst="rect">
-            
-            
-            <a:avLst/>
-            
-          
-          </a:prstGeom>
-          
-          
-          <a:noFill/>
-          
-          
-          <a:ln/>
-          
-        
-        </p:spPr>
-        
-        
-        <p:txBody>
-          
-          
-          <a:bodyPr wrap="square" lIns="0" tIns="0" rIns="0" bIns="0" rtlCol="0" anchor="ctr"/>
-          
-          
-          <a:lstStyle/>
-          
-          
-          <a:p>
-            
-            
-            <a:pPr algn="ctr" indent="0" marL="0">
-              
-              
-              <a:buNone/>
-              
-            
-            </a:pPr>
-            
-            
-            <a:r>
-              
-              
-              <a:rPr lang="en-US" sz="1600" dirty="0">
-                
-                
-                <a:solidFill>
-                  
-                  
-                  <a:srgbClr val="000000"/>
-                  
-                
-                </a:solidFill>
-                
-              
-              </a:rPr>
-              
-              
-              <a:t>🚀</a:t>
-              
-            
-            </a:r>
-            
-            
-            <a:endParaRPr lang="en-US" sz="1600" dirty="0"/>
-            
-          
-          </a:p>
-          
-        
-        </p:txBody>
-        
-      
-      </p:sp>
-      
-      
-      <p:sp>
-        
-        
-        <p:nvSpPr>
-          
-          
-          <p:cNvPr id="19" name="Text 17"/>
-          
-          
-          <p:cNvSpPr/>
-          
-          
-          <p:nvPr/>
-          
-        
-        </p:nvSpPr>
-        
-        
-        <p:spPr>
-          
-          
-          <a:xfrm>
-            
-            
-            <a:off x="1143000" y="3227832"/>
-            
-            
-            <a:ext cx="3108960" cy="365760"/>
-            
-          
-          </a:xfrm>
-          
-          
-          <a:prstGeom prst="rect">
-            
-            
-            <a:avLst/>
-            
-          
-          </a:prstGeom>
-          
-          
-          <a:noFill/>
-          
-          
-          <a:ln/>
-          
-        
-        </p:spPr>
-        
-        
-        <p:txBody>
-          
-          
-          <a:bodyPr wrap="square" lIns="0" tIns="0" rIns="0" bIns="0" rtlCol="0" anchor="ctr"/>
-          
-          
-          <a:lstStyle/>
-          
-          
-          <a:p>
-            
-            
-            <a:pPr indent="0" marL="0">
-              
-              
-              <a:buNone/>
-              
-            
-            </a:pPr>
-            
-            
-            <a:r>
-              
-              
-              <a:rPr lang="en-US" sz="1400" b="1" dirty="0">
-                
-                
-                <a:solidFill>
-                  
-                  
-                  <a:srgbClr val="065A82"/>
-                  
-                
-                </a:solidFill>
-                
-                
-                <a:latin typeface="Arial" pitchFamily="34" charset="0"/>
-                
-                
-                <a:ea typeface="Arial" pitchFamily="34" charset="-122"/>
-                
-                
-                <a:cs typeface="Arial" pitchFamily="34" charset="-120"/>
-                
-              
-              </a:rPr>
-              
-              
-              <a:t>Near-Term Outlook</a:t>
-              
-            
-            </a:r>
-            
-            
-            <a:endParaRPr lang="en-US" sz="1400" dirty="0"/>
-            
-          
-          </a:p>
-          
-        
-        </p:txBody>
-        
-      
-      </p:sp>
-      
-      
-      <p:sp>
-        
-        
-        <p:nvSpPr>
-          
-          
-          <p:cNvPr id="20" name="Text 18"/>
-          
-          
-          <p:cNvSpPr/>
-          
-          
-          <p:nvPr/>
-          
-        
-        </p:nvSpPr>
-        
-        
-        <p:spPr>
-          
-          
-          <a:xfrm>
-            
-            
-            <a:off x="548640" y="3749040"/>
-            
-            
-            <a:ext cx="3657600" cy="914400"/>
-            
-          
-          </a:xfrm>
-          
-          
-          <a:prstGeom prst="rect">
-            
-            
-            <a:avLst/>
-            
-          
-          </a:prstGeom>
-          
-          
-          <a:noFill/>
-          
-          
-          <a:ln/>
-          
-        
-        </p:spPr>
-        
-        
-        <p:txBody>
-          
-          
-          <a:bodyPr wrap="square" rtlCol="0" anchor="t"/>
-          
-          
-          <a:lstStyle/>
-          
-          
-          <a:p>
-            
-            
-            <a:pPr marL="342900" indent="-342900">
-              
-              
-              <a:buSzPct val="100000"/>
-              
-              
-              <a:buChar char="•"/>
-              
-            
-            </a:pPr>
-            
-            
-            <a:r>
-              
-              
-              <a:rPr lang="en-US" sz="1000" dirty="0">
-                
-                
-                <a:solidFill>
-                  
-                  
-                  <a:srgbClr val="1E293B"/>
-                  
-                
-                </a:solidFill>
-                
-                
-                <a:latin typeface="Arial" pitchFamily="34" charset="0"/>
-                
-                
-                <a:ea typeface="Arial" pitchFamily="34" charset="-122"/>
-                
-                
-                <a:cs typeface="Arial" pitchFamily="34" charset="-120"/>
-                
-              
-              </a:rPr>
-              
-              
-              <a:t>Phase 3: Variance Swap · Slash governance · ZK cold-path completion</a:t>
-              
-            
-            </a:r>
-            
-            
-            <a:endParaRPr lang="en-US" sz="1000" dirty="0"/>
-            
-          
-          </a:p>
-          
-          
-          <a:p>
-            
-            
-            <a:pPr marL="342900" indent="-342900">
-              
-              
-              <a:buSzPct val="100000"/>
-              
-              
-              <a:buChar char="•"/>
-              
-            
-            </a:pPr>
-            
-            
-            <a:r>
-              
-              
-              <a:rPr lang="en-US" sz="1000" dirty="0">
-                
-                
-                <a:solidFill>
-                  
-                  
-                  <a:srgbClr val="1E293B"/>
-                  
-                
-                </a:solidFill>
-                
-                
-                <a:latin typeface="Arial" pitchFamily="34" charset="0"/>
-                
-                
-                <a:ea typeface="Arial" pitchFamily="34" charset="-122"/>
-                
-                
-                <a:cs typeface="Arial" pitchFamily="34" charset="-120"/>
-                
-              
-              </a:rPr>
-              
-              
-              <a:t>Beta distribution · dual-pool joint probability · more vertical PDF markets</a:t>
-              
-            
-            </a:r>
-            
-            
-            <a:endParaRPr lang="en-US" sz="1000" dirty="0"/>
-            
-          
-          </a:p>
-          
-          
-          <a:p>
-            
-            
-            <a:pPr marL="342900" indent="-342900">
-              
-              
-              <a:buSzPct val="100000"/>
-              
-              
-              <a:buChar char="•"/>
-              
-            
-            </a:pPr>
-            
-            
-            <a:r>
-              
-              
-              <a:rPr lang="en-US" sz="1000" dirty="0">
-                
-                
-                <a:solidFill>
-                  
-                  
-                  <a:srgbClr val="1E293B"/>
-                  
-                
-                </a:solidFill>
-                
-                
-                <a:latin typeface="Arial" pitchFamily="34" charset="0"/>
-                
-                
-                <a:ea typeface="Arial" pitchFamily="34" charset="-122"/>
-                
-                
-                <a:cs typeface="Arial" pitchFamily="34" charset="-120"/>
-                
-              
-              </a:rPr>
-              
-              
-              <a:t>Attestation + Brevis Prover: mock → live supervision line</a:t>
-              
-            
-            </a:r>
-            
-            
-            <a:endParaRPr lang="en-US" sz="1000" dirty="0"/>
-            
-          
-          </a:p>
-          
-          
-          <a:p>
-            
-            
-            <a:pPr marL="342900" indent="-342900">
-              
-              
-              <a:buSzPct val="100000"/>
-              
-              
-              <a:buChar char="•"/>
-              
-            
-            </a:pPr>
-            
-            
-            <a:r>
-              
-              
-              <a:rPr lang="en-US" sz="1000" dirty="0">
-                
-                
-                <a:solidFill>
-                  
-                  
-                  <a:srgbClr val="1E293B"/>
-                  
-                
-                </a:solidFill>
-                
-                
-                <a:latin typeface="Arial" pitchFamily="34" charset="0"/>
-                
-                
-                <a:ea typeface="Arial" pitchFamily="34" charset="-122"/>
-                
-                
-                <a:cs typeface="Arial" pitchFamily="34" charset="-120"/>
-                
-              
-              </a:rPr>
-              
-              
-              <a:t>External audit → Mainnet · Circle USDC · GeoBlock (frontend compliance)</a:t>
-              
-            
-            </a:r>
-            
-            
-            <a:endParaRPr lang="en-US" sz="1000" dirty="0"/>
-            
-          
-          </a:p>
-          
-        
-        </p:txBody>
-        
-      
-      </p:sp>
-      
-      
-      <p:sp>
-        
-        
-        <p:nvSpPr>
-          
-          
-          <p:cNvPr id="21" name="Shape 19"/>
-          
-          
-          <p:cNvSpPr/>
-          
-          
-          <p:nvPr/>
-          
-        
-        </p:nvSpPr>
-        
-        
-        <p:spPr>
-          
-          
-          <a:xfrm>
-            
-            
-            <a:off x="4754880" y="3063240"/>
-            
-            
-            <a:ext cx="4023360" cy="1691640"/>
-            
-          
-          </a:xfrm>
-          
-          
-          <a:prstGeom prst="rect">
-            
-            
-            <a:avLst/>
-            
-          
-          </a:prstGeom>
-          
-          
-          <a:solidFill>
-            
-            
-            <a:srgbClr val="FFFFFF"/>
-            
-          
-          </a:solidFill>
-          
-          
-          <a:ln w="12700">
-            
-            
-            <a:solidFill>
-              
-              
-              <a:srgbClr val="E2E8F0"/>
-              
-            
-            </a:solidFill>
-            
-            
-            <a:prstDash val="solid"/>
-            
-          
-          </a:ln>
-          
-          
-          <a:effectLst>
-            
-             
-            
-            <a:outerShdw sx="100000" sy="100000" kx="0" ky="0" algn="bl" rotWithShape="0" blurRad="50800" dist="25400" dir="8100000">
-              
-               
-              
-              <a:srgbClr val="000000">
-                
-                 
-                
-                <a:alpha val="12000"/>
-                
-              
-              </a:srgbClr>
-              
-               
-            
-            </a:outerShdw>
-            
-          
-          </a:effectLst>
-          
-        
-        </p:spPr>
-        
-      
-      </p:sp>
-      
-      
-      <p:sp>
-        
-        
-        <p:nvSpPr>
-          
-          
-          <p:cNvPr id="22" name="Shape 20"/>
-          
-          
-          <p:cNvSpPr/>
-          
-          
-          <p:nvPr/>
-          
-        
-        </p:nvSpPr>
-        
-        
-        <p:spPr>
-          
-          
-          <a:xfrm>
-            
-            
-            <a:off x="4937760" y="3246120"/>
-            
-            
-            <a:ext cx="502920" cy="502920"/>
-            
-          
-          </a:xfrm>
-          
-          
-          <a:prstGeom prst="ellipse">
-            
-            
-            <a:avLst/>
-            
-          
-          </a:prstGeom>
-          
-          
-          <a:solidFill>
-            
-            
-            <a:srgbClr val="21295C"/>
-            
-          
-          </a:solidFill>
-          
-          
-          <a:ln/>
-          
-        
-        </p:spPr>
-        
-      
-      </p:sp>
-      
-      
-      <p:sp>
-        
-        
-        <p:nvSpPr>
-          
-          
-          <p:cNvPr id="23" name="Text 21"/>
-          
-          
-          <p:cNvSpPr/>
-          
-          
-          <p:nvPr/>
-          
-        
-        </p:nvSpPr>
-        
-        
-        <p:spPr>
-          
-          
-          <a:xfrm>
-            
-            
-            <a:off x="4937760" y="3246120"/>
-            
-            
-            <a:ext cx="502920" cy="502920"/>
-            
-          
-          </a:xfrm>
-          
-          
-          <a:prstGeom prst="rect">
-            
-            
-            <a:avLst/>
-            
-          
-          </a:prstGeom>
-          
-          
-          <a:noFill/>
-          
-          
-          <a:ln/>
-          
-        
-        </p:spPr>
-        
-        
-        <p:txBody>
-          
-          
-          <a:bodyPr wrap="square" lIns="0" tIns="0" rIns="0" bIns="0" rtlCol="0" anchor="ctr"/>
-          
-          
-          <a:lstStyle/>
-          
-          
-          <a:p>
-            
-            
-            <a:pPr algn="ctr" indent="0" marL="0">
-              
-              
-              <a:buNone/>
-              
-            
-            </a:pPr>
-            
-            
-            <a:r>
-              
-              
-              <a:rPr lang="en-US" sz="1600" dirty="0">
-                
-                
-                <a:solidFill>
-                  
-                  
-                  <a:srgbClr val="000000"/>
-                  
-                
-                </a:solidFill>
-                
-              
-              </a:rPr>
-              
-              
-              <a:t>🎯</a:t>
-              
-            
-            </a:r>
-            
-            
-            <a:endParaRPr lang="en-US" sz="1600" dirty="0"/>
-            
-          
-          </a:p>
-          
-        
-        </p:txBody>
-        
-      
-      </p:sp>
-      
-      
-      <p:sp>
-        
-        
-        <p:nvSpPr>
-          
-          
-          <p:cNvPr id="24" name="Text 22"/>
-          
-          
-          <p:cNvSpPr/>
-          
-          
-          <p:nvPr/>
-          
-        
-        </p:nvSpPr>
-        
-        
-        <p:spPr>
-          
-          
-          <a:xfrm>
-            
-            
-            <a:off x="5532120" y="3227832"/>
-            
-            
-            <a:ext cx="3108960" cy="365760"/>
-            
-          
-          </a:xfrm>
-          
-          
-          <a:prstGeom prst="rect">
-            
-            
-            <a:avLst/>
-            
-          
-          </a:prstGeom>
-          
-          
-          <a:noFill/>
-          
-          
-          <a:ln/>
-          
-        
-        </p:spPr>
-        
-        
-        <p:txBody>
-          
-          
-          <a:bodyPr wrap="square" lIns="0" tIns="0" rIns="0" bIns="0" rtlCol="0" anchor="ctr"/>
-          
-          
-          <a:lstStyle/>
-          
-          
-          <a:p>
-            
-            
-            <a:pPr indent="0" marL="0">
-              
-              
-              <a:buNone/>
-              
-            
-            </a:pPr>
-            
-            
-            <a:r>
-              
-              
-              <a:rPr lang="en-US" sz="1400" b="1" dirty="0">
-                
-                
-                <a:solidFill>
-                  
-                  
-                  <a:srgbClr val="065A82"/>
-                  
-                
-                </a:solidFill>
-                
-                
-                <a:latin typeface="Arial" pitchFamily="34" charset="0"/>
-                
-                
-                <a:ea typeface="Arial" pitchFamily="34" charset="-122"/>
-                
-                
-                <a:cs typeface="Arial" pitchFamily="34" charset="-120"/>
-                
-              
-              </a:rPr>
-              
-              
-              <a:t>Long-Term Vision</a:t>
-              
-            
-            </a:r>
-            
-            
-            <a:endParaRPr lang="en-US" sz="1400" dirty="0"/>
-            
-          
-          </a:p>
-          
-        
-        </p:txBody>
-        
-      
-      </p:sp>
-      
-      
-      <p:sp>
-        
-        
-        <p:nvSpPr>
-          
-          
-          <p:cNvPr id="25" name="Text 23"/>
-          
-          
-          <p:cNvSpPr/>
-          
-          
-          <p:nvPr/>
-          
-        
-        </p:nvSpPr>
-        
-        
-        <p:spPr>
-          
-          
-          <a:xfrm>
-            
-            
-            <a:off x="4937760" y="3749040"/>
-            
-            
-            <a:ext cx="3657600" cy="914400"/>
-            
-          
-          </a:xfrm>
-          
-          
-          <a:prstGeom prst="rect">
-            
-            
-            <a:avLst/>
-            
-          
-          </a:prstGeom>
-          
-          
-          <a:noFill/>
-          
-          
-          <a:ln/>
-          
-        
-        </p:spPr>
-        
-        
-        <p:txBody>
-          
-          
-          <a:bodyPr wrap="square" rtlCol="0" anchor="t"/>
-          
-          
-          <a:lstStyle/>
-          
-          
-          <a:p>
-            
-            
-            <a:pPr marL="342900" indent="-342900">
-              
-              
-              <a:buSzPct val="100000"/>
-              
-              
-              <a:buChar char="•"/>
-              
-            
-            </a:pPr>
-            
-            
-            <a:r>
-              
-              
-              <a:rPr lang="en-US" sz="1000" dirty="0">
-                
-                
-                <a:solidFill>
-                  
-                  
-                  <a:srgbClr val="1E293B"/>
-                  
-                
-                </a:solidFill>
-                
-                
-                <a:latin typeface="Arial" pitchFamily="34" charset="0"/>
-                
-                
-                <a:ea typeface="Arial" pitchFamily="34" charset="-122"/>
-                
-                
-                <a:cs typeface="Arial" pitchFamily="34" charset="-120"/>
-                
-              
-              </a:rPr>
-              
-              
-              <a:t>Become Sui's infrastructure layer for probability derivatives + paid knowledge</a:t>
-              
-            
-            </a:r>
-            
-            
-            <a:endParaRPr lang="en-US" sz="1000" dirty="0"/>
-            
-          
-          </a:p>
-          
-          
-          <a:p>
-            
-            
-            <a:pPr marL="342900" indent="-342900">
-              
-              
-              <a:buSzPct val="100000"/>
-              
-              
-              <a:buChar char="•"/>
-              
-            
-            </a:pPr>
-            
-            
-            <a:r>
-              
-              
-              <a:rPr lang="en-US" sz="1000" dirty="0">
-                
-                
-                <a:solidFill>
-                  
-                  
-                  <a:srgbClr val="1E293B"/>
-                  
-                
-                </a:solidFill>
-                
-                
-                <a:latin typeface="Arial" pitchFamily="34" charset="0"/>
-                
-                
-                <a:ea typeface="Arial" pitchFamily="34" charset="-122"/>
-                
-                
-                <a:cs typeface="Arial" pitchFamily="34" charset="-120"/>
-                
-              
-              </a:rPr>
-              
-              
-              <a:t>Serve retail traders, LPs, prophets, and quant institutions</a:t>
-              
-            
-            </a:r>
-            
-            
-            <a:endParaRPr lang="en-US" sz="1000" dirty="0"/>
-            
-          
-          </a:p>
-          
-          
-          <a:p>
-            
-            
-            <a:pPr marL="342900" indent="-342900">
-              
-              
-              <a:buSzPct val="100000"/>
-              
-              
-              <a:buChar char="•"/>
-              
-            
-            </a:pPr>
-            
-            
-            <a:r>
-              
-              
-              <a:rPr lang="en-US" sz="1000" dirty="0">
-                
-                
-                <a:solidFill>
-                  
-                  
-                  <a:srgbClr val="1E293B"/>
-                  
-                
-                </a:solidFill>
-                
-                
-                <a:latin typeface="Arial" pitchFamily="34" charset="0"/>
-                
-                
-                <a:ea typeface="Arial" pitchFamily="34" charset="-122"/>
-                
-                
-                <a:cs typeface="Arial" pitchFamily="34" charset="-120"/>
-                
-              
-              </a:rPr>
-              
-              
-              <a:t>Full EventRoot migration · SDK / Quant API open access</a:t>
-              
-            
-            </a:r>
-            
-            
-            <a:endParaRPr lang="en-US" sz="1000" dirty="0"/>
-            
-          
-          </a:p>
-          
-          
-          <a:p>
-            
-            
-            <a:pPr marL="342900" indent="-342900">
-              
-              
-              <a:buSzPct val="100000"/>
-              
-              
-              <a:buChar char="•"/>
-              
-            
-            </a:pPr>
-            
-            
-            <a:r>
-              
-              
-              <a:rPr lang="en-US" sz="1000" dirty="0">
-                
-                
-                <a:solidFill>
-                  
-                  
-                  <a:srgbClr val="1E293B"/>
-                  
-                
-                </a:solidFill>
-                
-                
-                <a:latin typeface="Arial" pitchFamily="34" charset="0"/>
-                
-                
-                <a:ea typeface="Arial" pitchFamily="34" charset="-122"/>
-                
-                
-                <a:cs typeface="Arial" pitchFamily="34" charset="-120"/>
-                
-              
-              </a:rPr>
-              
-              
-              <a:t>Replace fragmented Yes/No with on-chain PDF · replace fake signals with forced audit</a:t>
-              
-            
-            </a:r>
-            
-            
-            <a:endParaRPr lang="en-US" sz="1000" dirty="0"/>
-            
-          
-          </a:p>
-          
-        
-        </p:txBody>
-        
-      
-      </p:sp>
-      
-    
-    </p:spTree>
-    
-  
-  </p:cSld>
-  
-  
-  <p:clrMapOvr>
-    
-    
-    <a:masterClrMapping/>
-    
-  
-  </p:clrMapOvr>
-  
-
-</p:sld>
-
-</file>
-
 <file path=ppt/slides/slide2.xml><?xml version="1.0" encoding="utf-8"?>
 <p:sld xmlns:a="http://schemas.openxmlformats.org/drawingml/2006/main" xmlns:r="http://schemas.openxmlformats.org/officeDocument/2006/relationships" xmlns:p="http://schemas.openxmlformats.org/presentationml/2006/main">
   <p:cSld name="Slide 2">
@@ -15626,8 +11595,8 @@
         </p:nvSpPr>
         <p:spPr>
           <a:xfrm>
-            <a:off x="365760" y="1188720"/>
-            <a:ext cx="1645920" cy="960120"/>
+            <a:off x="320040" y="1078992"/>
+            <a:ext cx="1508760" cy="947547"/>
           </a:xfrm>
           <a:prstGeom prst="rect">
             <a:avLst/>
@@ -15646,8 +11615,8 @@
         </p:nvSpPr>
         <p:spPr>
           <a:xfrm>
-            <a:off x="365760" y="1463040"/>
-            <a:ext cx="1645920" cy="457200"/>
+            <a:off x="320040" y="1078992"/>
+            <a:ext cx="1508760" cy="947547"/>
           </a:xfrm>
           <a:prstGeom prst="rect">
             <a:avLst/>
@@ -15663,7 +11632,7 @@
               <a:buNone/>
             </a:pPr>
             <a:r>
-              <a:rPr lang="en-US" sz="1200" b="1" dirty="0">
+              <a:rPr lang="en-US" sz="1000" b="1" dirty="0">
                 <a:solidFill>
                   <a:srgbClr val="FFFFFF"/>
                 </a:solidFill>
@@ -15673,7 +11642,7 @@
               </a:rPr>
               <a:t>Traders</a:t>
             </a:r>
-            <a:endParaRPr lang="en-US" sz="1200" dirty="0"/>
+            <a:endParaRPr lang="en-US" sz="1000" dirty="0"/>
           </a:p>
         </p:txBody>
       </p:sp>
@@ -15685,8 +11654,8 @@
         </p:nvSpPr>
         <p:spPr>
           <a:xfrm>
-            <a:off x="2148840" y="1188720"/>
-            <a:ext cx="6629400" cy="960120"/>
+            <a:off x="1920240" y="1078992"/>
+            <a:ext cx="6903720" cy="947547"/>
           </a:xfrm>
           <a:prstGeom prst="rect">
             <a:avLst/>
@@ -15710,8 +11679,8 @@
         </p:nvSpPr>
         <p:spPr>
           <a:xfrm>
-            <a:off x="2286000" y="1298448"/>
-            <a:ext cx="3108960" cy="777240"/>
+            <a:off x="2011680" y="1133856"/>
+            <a:ext cx="6720840" cy="360068"/>
           </a:xfrm>
           <a:prstGeom prst="rect">
             <a:avLst/>
@@ -15720,14 +11689,14 @@
           <a:ln/>
         </p:spPr>
         <p:txBody>
-          <a:bodyPr wrap="square" lIns="0" tIns="0" rIns="0" bIns="0" rtlCol="0" anchor="ctr"/>
+          <a:bodyPr wrap="square" lIns="0" tIns="0" rIns="0" bIns="0" rtlCol="0" anchor="t"/>
           <a:lstStyle/>
           <a:p>
             <a:pPr indent="0" marL="0">
               <a:buNone/>
             </a:pPr>
             <a:r>
-              <a:rPr lang="en-US" sz="1100" b="1" dirty="0">
+              <a:rPr lang="en-US" sz="950" b="1" dirty="0">
                 <a:solidFill>
                   <a:srgbClr val="065A82"/>
                 </a:solidFill>
@@ -15737,7 +11706,7 @@
               </a:rPr>
               <a:t>Trade probability curves, not fragment tokens</a:t>
             </a:r>
-            <a:endParaRPr lang="en-US" sz="1100" dirty="0"/>
+            <a:endParaRPr lang="en-US" sz="950" dirty="0"/>
           </a:p>
         </p:txBody>
       </p:sp>
@@ -15749,8 +11718,8 @@
         </p:nvSpPr>
         <p:spPr>
           <a:xfrm>
-            <a:off x="5394960" y="1298448"/>
-            <a:ext cx="3200400" cy="777240"/>
+            <a:off x="2011680" y="1493924"/>
+            <a:ext cx="6720840" cy="530626"/>
           </a:xfrm>
           <a:prstGeom prst="rect">
             <a:avLst/>
@@ -15759,14 +11728,14 @@
           <a:ln/>
         </p:spPr>
         <p:txBody>
-          <a:bodyPr wrap="square" lIns="0" tIns="0" rIns="0" bIns="0" rtlCol="0" anchor="ctr"/>
+          <a:bodyPr wrap="square" lIns="0" tIns="0" rIns="0" bIns="0" rtlCol="0" anchor="t"/>
           <a:lstStyle/>
           <a:p>
             <a:pPr indent="0" marL="0">
               <a:buNone/>
             </a:pPr>
             <a:r>
-              <a:rPr lang="en-US" sz="1000" dirty="0">
+              <a:rPr lang="en-US" sz="800" dirty="0">
                 <a:solidFill>
                   <a:srgbClr val="64748B"/>
                 </a:solidFill>
@@ -15776,7 +11745,7 @@
               </a:rPr>
               <a:t>Interval/digital options · structured notes · Max-Loss risk control · transparent PDF pricing</a:t>
             </a:r>
-            <a:endParaRPr lang="en-US" sz="1000" dirty="0"/>
+            <a:endParaRPr lang="en-US" sz="800" dirty="0"/>
           </a:p>
         </p:txBody>
       </p:sp>
@@ -15788,8 +11757,8 @@
         </p:nvSpPr>
         <p:spPr>
           <a:xfrm>
-            <a:off x="365760" y="2331720"/>
-            <a:ext cx="1645920" cy="960120"/>
+            <a:off x="320040" y="2081403"/>
+            <a:ext cx="1508760" cy="947547"/>
           </a:xfrm>
           <a:prstGeom prst="rect">
             <a:avLst/>
@@ -15808,8 +11777,8 @@
         </p:nvSpPr>
         <p:spPr>
           <a:xfrm>
-            <a:off x="365760" y="2606040"/>
-            <a:ext cx="1645920" cy="457200"/>
+            <a:off x="320040" y="2081403"/>
+            <a:ext cx="1508760" cy="947547"/>
           </a:xfrm>
           <a:prstGeom prst="rect">
             <a:avLst/>
@@ -15825,7 +11794,7 @@
               <a:buNone/>
             </a:pPr>
             <a:r>
-              <a:rPr lang="en-US" sz="1200" b="1" dirty="0">
+              <a:rPr lang="en-US" sz="1000" b="1" dirty="0">
                 <a:solidFill>
                   <a:srgbClr val="FFFFFF"/>
                 </a:solidFill>
@@ -15835,7 +11804,7 @@
               </a:rPr>
               <a:t>LP Underwriters</a:t>
             </a:r>
-            <a:endParaRPr lang="en-US" sz="1200" dirty="0"/>
+            <a:endParaRPr lang="en-US" sz="1000" dirty="0"/>
           </a:p>
         </p:txBody>
       </p:sp>
@@ -15847,8 +11816,8 @@
         </p:nvSpPr>
         <p:spPr>
           <a:xfrm>
-            <a:off x="2148840" y="2331720"/>
-            <a:ext cx="6629400" cy="960120"/>
+            <a:off x="1920240" y="2081403"/>
+            <a:ext cx="6903720" cy="947547"/>
           </a:xfrm>
           <a:prstGeom prst="rect">
             <a:avLst/>
@@ -15872,8 +11841,8 @@
         </p:nvSpPr>
         <p:spPr>
           <a:xfrm>
-            <a:off x="2286000" y="2441448"/>
-            <a:ext cx="3108960" cy="777240"/>
+            <a:off x="2011680" y="2136267"/>
+            <a:ext cx="6720840" cy="360068"/>
           </a:xfrm>
           <a:prstGeom prst="rect">
             <a:avLst/>
@@ -15882,14 +11851,14 @@
           <a:ln/>
         </p:spPr>
         <p:txBody>
-          <a:bodyPr wrap="square" lIns="0" tIns="0" rIns="0" bIns="0" rtlCol="0" anchor="ctr"/>
+          <a:bodyPr wrap="square" lIns="0" tIns="0" rIns="0" bIns="0" rtlCol="0" anchor="t"/>
           <a:lstStyle/>
           <a:p>
             <a:pPr indent="0" marL="0">
               <a:buNone/>
             </a:pPr>
             <a:r>
-              <a:rPr lang="en-US" sz="1100" b="1" dirty="0">
+              <a:rPr lang="en-US" sz="950" b="1" dirty="0">
                 <a:solidFill>
                   <a:srgbClr val="065A82"/>
                 </a:solidFill>
@@ -15899,7 +11868,7 @@
               </a:rPr>
               <a:t>Earn spread + Theta + mispricing principal</a:t>
             </a:r>
-            <a:endParaRPr lang="en-US" sz="1100" dirty="0"/>
+            <a:endParaRPr lang="en-US" sz="950" dirty="0"/>
           </a:p>
         </p:txBody>
       </p:sp>
@@ -15911,8 +11880,8 @@
         </p:nvSpPr>
         <p:spPr>
           <a:xfrm>
-            <a:off x="5394960" y="2441448"/>
-            <a:ext cx="3200400" cy="777240"/>
+            <a:off x="2011680" y="2496335"/>
+            <a:ext cx="6720840" cy="530626"/>
           </a:xfrm>
           <a:prstGeom prst="rect">
             <a:avLst/>
@@ -15921,14 +11890,14 @@
           <a:ln/>
         </p:spPr>
         <p:txBody>
-          <a:bodyPr wrap="square" lIns="0" tIns="0" rIns="0" bIns="0" rtlCol="0" anchor="ctr"/>
+          <a:bodyPr wrap="square" lIns="0" tIns="0" rIns="0" bIns="0" rtlCol="0" anchor="t"/>
           <a:lstStyle/>
           <a:p>
             <a:pPr indent="0" marL="0">
               <a:buNone/>
             </a:pPr>
             <a:r>
-              <a:rPr lang="en-US" sz="1000" dirty="0">
+              <a:rPr lang="en-US" sz="800" dirty="0">
                 <a:solidFill>
                   <a:srgbClr val="64748B"/>
                 </a:solidFill>
@@ -15938,7 +11907,7 @@
               </a:rPr>
               <a:t>NAV deposit/redeem · Opening Auction endogenous liquidity · LP Guard dynamic fee protection</a:t>
             </a:r>
-            <a:endParaRPr lang="en-US" sz="1000" dirty="0"/>
+            <a:endParaRPr lang="en-US" sz="800" dirty="0"/>
           </a:p>
         </p:txBody>
       </p:sp>
@@ -15950,8 +11919,8 @@
         </p:nvSpPr>
         <p:spPr>
           <a:xfrm>
-            <a:off x="365760" y="3474720"/>
-            <a:ext cx="1645920" cy="960120"/>
+            <a:off x="320040" y="3083814"/>
+            <a:ext cx="1508760" cy="947547"/>
           </a:xfrm>
           <a:prstGeom prst="rect">
             <a:avLst/>
@@ -15970,8 +11939,8 @@
         </p:nvSpPr>
         <p:spPr>
           <a:xfrm>
-            <a:off x="365760" y="3749040"/>
-            <a:ext cx="1645920" cy="457200"/>
+            <a:off x="320040" y="3083814"/>
+            <a:ext cx="1508760" cy="947547"/>
           </a:xfrm>
           <a:prstGeom prst="rect">
             <a:avLst/>
@@ -15987,7 +11956,7 @@
               <a:buNone/>
             </a:pPr>
             <a:r>
-              <a:rPr lang="en-US" sz="1200" b="1" dirty="0">
+              <a:rPr lang="en-US" sz="1000" b="1" dirty="0">
                 <a:solidFill>
                   <a:srgbClr val="FFFFFF"/>
                 </a:solidFill>
@@ -15997,7 +11966,7 @@
               </a:rPr>
               <a:t>Prophets</a:t>
             </a:r>
-            <a:endParaRPr lang="en-US" sz="1200" dirty="0"/>
+            <a:endParaRPr lang="en-US" sz="1000" dirty="0"/>
           </a:p>
         </p:txBody>
       </p:sp>
@@ -16009,8 +11978,8 @@
         </p:nvSpPr>
         <p:spPr>
           <a:xfrm>
-            <a:off x="2148840" y="3474720"/>
-            <a:ext cx="6629400" cy="960120"/>
+            <a:off x="1920240" y="3083814"/>
+            <a:ext cx="6903720" cy="947547"/>
           </a:xfrm>
           <a:prstGeom prst="rect">
             <a:avLst/>
@@ -16034,8 +12003,8 @@
         </p:nvSpPr>
         <p:spPr>
           <a:xfrm>
-            <a:off x="2286000" y="3584448"/>
-            <a:ext cx="3108960" cy="777240"/>
+            <a:off x="2011680" y="3138678"/>
+            <a:ext cx="6720840" cy="360068"/>
           </a:xfrm>
           <a:prstGeom prst="rect">
             <a:avLst/>
@@ -16044,14 +12013,14 @@
           <a:ln/>
         </p:spPr>
         <p:txBody>
-          <a:bodyPr wrap="square" lIns="0" tIns="0" rIns="0" bIns="0" rtlCol="0" anchor="ctr"/>
+          <a:bodyPr wrap="square" lIns="0" tIns="0" rIns="0" bIns="0" rtlCol="0" anchor="t"/>
           <a:lstStyle/>
           <a:p>
             <a:pPr indent="0" marL="0">
               <a:buNone/>
             </a:pPr>
             <a:r>
-              <a:rPr lang="en-US" sz="1100" b="1" dirty="0">
+              <a:rPr lang="en-US" sz="950" b="1" dirty="0">
                 <a:solidFill>
                   <a:srgbClr val="065A82"/>
                 </a:solidFill>
@@ -16061,7 +12030,7 @@
               </a:rPr>
               <a:t>On-chain win-rate cred + unlock revenue</a:t>
             </a:r>
-            <a:endParaRPr lang="en-US" sz="1100" dirty="0"/>
+            <a:endParaRPr lang="en-US" sz="950" dirty="0"/>
           </a:p>
         </p:txBody>
       </p:sp>
@@ -16073,8 +12042,8 @@
         </p:nvSpPr>
         <p:spPr>
           <a:xfrm>
-            <a:off x="5394960" y="3584448"/>
-            <a:ext cx="3200400" cy="777240"/>
+            <a:off x="2011680" y="3498746"/>
+            <a:ext cx="6720840" cy="530626"/>
           </a:xfrm>
           <a:prstGeom prst="rect">
             <a:avLst/>
@@ -16083,14 +12052,14 @@
           <a:ln/>
         </p:spPr>
         <p:txBody>
-          <a:bodyPr wrap="square" lIns="0" tIns="0" rIns="0" bIns="0" rtlCol="0" anchor="ctr"/>
+          <a:bodyPr wrap="square" lIns="0" tIns="0" rIns="0" bIns="0" rtlCol="0" anchor="t"/>
           <a:lstStyle/>
           <a:p>
             <a:pPr indent="0" marL="0">
               <a:buNone/>
             </a:pPr>
             <a:r>
-              <a:rPr lang="en-US" sz="1000" dirty="0">
+              <a:rPr lang="en-US" sz="800" dirty="0">
                 <a:solidFill>
                   <a:srgbClr val="64748B"/>
                 </a:solidFill>
@@ -16100,7 +12069,7 @@
               </a:rPr>
               <a:t>Seal private analysis · on-chain track record · paid unlock after on-chain eligibility check</a:t>
             </a:r>
-            <a:endParaRPr lang="en-US" sz="1000" dirty="0"/>
+            <a:endParaRPr lang="en-US" sz="800" dirty="0"/>
           </a:p>
         </p:txBody>
       </p:sp>
@@ -16112,8 +12081,8 @@
         </p:nvSpPr>
         <p:spPr>
           <a:xfrm>
-            <a:off x="365760" y="4617720"/>
-            <a:ext cx="1645920" cy="960120"/>
+            <a:off x="320040" y="4086225"/>
+            <a:ext cx="1508760" cy="947547"/>
           </a:xfrm>
           <a:prstGeom prst="rect">
             <a:avLst/>
@@ -16132,8 +12101,8 @@
         </p:nvSpPr>
         <p:spPr>
           <a:xfrm>
-            <a:off x="365760" y="4892040"/>
-            <a:ext cx="1645920" cy="457200"/>
+            <a:off x="320040" y="4086225"/>
+            <a:ext cx="1508760" cy="947547"/>
           </a:xfrm>
           <a:prstGeom prst="rect">
             <a:avLst/>
@@ -16149,7 +12118,7 @@
               <a:buNone/>
             </a:pPr>
             <a:r>
-              <a:rPr lang="en-US" sz="1200" b="1" dirty="0">
+              <a:rPr lang="en-US" sz="1000" b="1" dirty="0">
                 <a:solidFill>
                   <a:srgbClr val="FFFFFF"/>
                 </a:solidFill>
@@ -16159,7 +12128,7 @@
               </a:rPr>
               <a:t>Protocol</a:t>
             </a:r>
-            <a:endParaRPr lang="en-US" sz="1200" dirty="0"/>
+            <a:endParaRPr lang="en-US" sz="1000" dirty="0"/>
           </a:p>
         </p:txBody>
       </p:sp>
@@ -16171,8 +12140,8 @@
         </p:nvSpPr>
         <p:spPr>
           <a:xfrm>
-            <a:off x="2148840" y="4617720"/>
-            <a:ext cx="6629400" cy="960120"/>
+            <a:off x="1920240" y="4086225"/>
+            <a:ext cx="6903720" cy="947547"/>
           </a:xfrm>
           <a:prstGeom prst="rect">
             <a:avLst/>
@@ -16196,8 +12165,8 @@
         </p:nvSpPr>
         <p:spPr>
           <a:xfrm>
-            <a:off x="2286000" y="4727448"/>
-            <a:ext cx="3108960" cy="777240"/>
+            <a:off x="2011680" y="4141089"/>
+            <a:ext cx="6720840" cy="360068"/>
           </a:xfrm>
           <a:prstGeom prst="rect">
             <a:avLst/>
@@ -16206,14 +12175,14 @@
           <a:ln/>
         </p:spPr>
         <p:txBody>
-          <a:bodyPr wrap="square" lIns="0" tIns="0" rIns="0" bIns="0" rtlCol="0" anchor="ctr"/>
+          <a:bodyPr wrap="square" lIns="0" tIns="0" rIns="0" bIns="0" rtlCol="0" anchor="t"/>
           <a:lstStyle/>
           <a:p>
             <a:pPr indent="0" marL="0">
               <a:buNone/>
             </a:pPr>
             <a:r>
-              <a:rPr lang="en-US" sz="1100" b="1" dirty="0">
+              <a:rPr lang="en-US" sz="950" b="1" dirty="0">
                 <a:solidFill>
                   <a:srgbClr val="065A82"/>
                 </a:solidFill>
@@ -16223,7 +12192,7 @@
               </a:rPr>
               <a:t>Unlock fees + trading fees + network effects</a:t>
             </a:r>
-            <a:endParaRPr lang="en-US" sz="1100" dirty="0"/>
+            <a:endParaRPr lang="en-US" sz="950" dirty="0"/>
           </a:p>
         </p:txBody>
       </p:sp>
@@ -16235,8 +12204,8 @@
         </p:nvSpPr>
         <p:spPr>
           <a:xfrm>
-            <a:off x="5394960" y="4727448"/>
-            <a:ext cx="3200400" cy="777240"/>
+            <a:off x="2011680" y="4501157"/>
+            <a:ext cx="6720840" cy="530626"/>
           </a:xfrm>
           <a:prstGeom prst="rect">
             <a:avLst/>
@@ -16245,14 +12214,14 @@
           <a:ln/>
         </p:spPr>
         <p:txBody>
-          <a:bodyPr wrap="square" lIns="0" tIns="0" rIns="0" bIns="0" rtlCol="0" anchor="ctr"/>
+          <a:bodyPr wrap="square" lIns="0" tIns="0" rIns="0" bIns="0" rtlCol="0" anchor="t"/>
           <a:lstStyle/>
           <a:p>
             <a:pPr indent="0" marL="0">
               <a:buNone/>
             </a:pPr>
             <a:r>
-              <a:rPr lang="en-US" sz="1000" dirty="0">
+              <a:rPr lang="en-US" sz="800" dirty="0">
                 <a:solidFill>
                   <a:srgbClr val="64748B"/>
                 </a:solidFill>
@@ -16262,7 +12231,7 @@
               </a:rPr>
               <a:t>Crank auto-settlement · leaderboard-driven traffic · parallel multi-market scaling</a:t>
             </a:r>
-            <a:endParaRPr lang="en-US" sz="1000" dirty="0"/>
+            <a:endParaRPr lang="en-US" sz="800" dirty="0"/>
           </a:p>
         </p:txBody>
       </p:sp>
@@ -19052,8 +15021,8 @@
         </p:nvSpPr>
         <p:spPr>
           <a:xfrm>
-            <a:off x="365760" y="1188720"/>
-            <a:ext cx="4023360" cy="1691640"/>
+            <a:off x="365760" y="1078992"/>
+            <a:ext cx="4023360" cy="1940814"/>
           </a:xfrm>
           <a:prstGeom prst="rect">
             <a:avLst/>
@@ -19084,8 +15053,8 @@
         </p:nvSpPr>
         <p:spPr>
           <a:xfrm>
-            <a:off x="548640" y="1371600"/>
-            <a:ext cx="502920" cy="502920"/>
+            <a:off x="530352" y="1225296"/>
+            <a:ext cx="457200" cy="457200"/>
           </a:xfrm>
           <a:prstGeom prst="ellipse">
             <a:avLst/>
@@ -19104,8 +15073,8 @@
         </p:nvSpPr>
         <p:spPr>
           <a:xfrm>
-            <a:off x="548640" y="1371600"/>
-            <a:ext cx="502920" cy="502920"/>
+            <a:off x="530352" y="1225296"/>
+            <a:ext cx="457200" cy="457200"/>
           </a:xfrm>
           <a:prstGeom prst="rect">
             <a:avLst/>
@@ -19121,14 +15090,14 @@
               <a:buNone/>
             </a:pPr>
             <a:r>
-              <a:rPr lang="en-US" sz="1600" dirty="0">
+              <a:rPr lang="en-US" sz="1400" dirty="0">
                 <a:solidFill>
                   <a:srgbClr val="000000"/>
                 </a:solidFill>
               </a:rPr>
               <a:t>⚡</a:t>
             </a:r>
-            <a:endParaRPr lang="en-US" sz="1600" dirty="0"/>
+            <a:endParaRPr lang="en-US" sz="1400" dirty="0"/>
           </a:p>
         </p:txBody>
       </p:sp>
@@ -19140,8 +15109,8 @@
         </p:nvSpPr>
         <p:spPr>
           <a:xfrm>
-            <a:off x="1143000" y="1353312"/>
-            <a:ext cx="3108960" cy="365760"/>
+            <a:off x="1078992" y="1188720"/>
+            <a:ext cx="3218688" cy="420624"/>
           </a:xfrm>
           <a:prstGeom prst="rect">
             <a:avLst/>
@@ -19150,14 +15119,14 @@
           <a:ln/>
         </p:spPr>
         <p:txBody>
-          <a:bodyPr wrap="square" lIns="0" tIns="0" rIns="0" bIns="0" rtlCol="0" anchor="ctr"/>
+          <a:bodyPr wrap="square" lIns="0" tIns="0" rIns="0" bIns="0" rtlCol="0" anchor="t"/>
           <a:lstStyle/>
           <a:p>
             <a:pPr indent="0" marL="0">
               <a:buNone/>
             </a:pPr>
             <a:r>
-              <a:rPr lang="en-US" sz="1400" b="1" dirty="0">
+              <a:rPr lang="en-US" sz="1100" b="1" dirty="0">
                 <a:solidFill>
                   <a:srgbClr val="065A82"/>
                 </a:solidFill>
@@ -19167,7 +15136,7 @@
               </a:rPr>
               <a:t>Sui Parallel Execution</a:t>
             </a:r>
-            <a:endParaRPr lang="en-US" sz="1400" dirty="0"/>
+            <a:endParaRPr lang="en-US" sz="1100" dirty="0"/>
           </a:p>
         </p:txBody>
       </p:sp>
@@ -19179,8 +15148,8 @@
         </p:nvSpPr>
         <p:spPr>
           <a:xfrm>
-            <a:off x="548640" y="1874520"/>
-            <a:ext cx="3657600" cy="914400"/>
+            <a:off x="512064" y="1664208"/>
+            <a:ext cx="3767328" cy="1282446"/>
           </a:xfrm>
           <a:prstGeom prst="rect">
             <a:avLst/>
@@ -19189,7 +15158,7 @@
           <a:ln/>
         </p:spPr>
         <p:txBody>
-          <a:bodyPr wrap="square" rtlCol="0" anchor="t"/>
+          <a:bodyPr wrap="square" lIns="0" tIns="0" rIns="0" bIns="0" rtlCol="0" anchor="t"/>
           <a:lstStyle/>
           <a:p>
             <a:pPr marL="342900" indent="-342900">
@@ -19197,7 +15166,7 @@
               <a:buChar char="•"/>
             </a:pPr>
             <a:r>
-              <a:rPr lang="en-US" sz="1000" dirty="0">
+              <a:rPr lang="en-US" sz="750" dirty="0">
                 <a:solidFill>
                   <a:srgbClr val="1E293B"/>
                 </a:solidFill>
@@ -19207,7 +15176,7 @@
               </a:rPr>
               <a:t>Sharded by event_id, parallel settlement across markets</a:t>
             </a:r>
-            <a:endParaRPr lang="en-US" sz="1000" dirty="0"/>
+            <a:endParaRPr lang="en-US" sz="750" dirty="0"/>
           </a:p>
           <a:p>
             <a:pPr marL="342900" indent="-342900">
@@ -19215,7 +15184,7 @@
               <a:buChar char="•"/>
             </a:pPr>
             <a:r>
-              <a:rPr lang="en-US" sz="1000" dirty="0">
+              <a:rPr lang="en-US" sz="750" dirty="0">
                 <a:solidFill>
                   <a:srgbClr val="1E293B"/>
                 </a:solidFill>
@@ -19225,7 +15194,7 @@
               </a:rPr>
               <a:t>Position/Prophecy as independent Objects, no global lock</a:t>
             </a:r>
-            <a:endParaRPr lang="en-US" sz="1000" dirty="0"/>
+            <a:endParaRPr lang="en-US" sz="750" dirty="0"/>
           </a:p>
           <a:p>
             <a:pPr marL="342900" indent="-342900">
@@ -19233,7 +15202,7 @@
               <a:buChar char="•"/>
             </a:pPr>
             <a:r>
-              <a:rPr lang="en-US" sz="1000" dirty="0">
+              <a:rPr lang="en-US" sz="750" dirty="0">
                 <a:solidFill>
                   <a:srgbClr val="1E293B"/>
                 </a:solidFill>
@@ -19243,7 +15212,7 @@
               </a:rPr>
               <a:t>High concurrency for multi-pool + multi-prophet scenarios</a:t>
             </a:r>
-            <a:endParaRPr lang="en-US" sz="1000" dirty="0"/>
+            <a:endParaRPr lang="en-US" sz="750" dirty="0"/>
           </a:p>
         </p:txBody>
       </p:sp>
@@ -19255,8 +15224,8 @@
         </p:nvSpPr>
         <p:spPr>
           <a:xfrm>
-            <a:off x="4754880" y="1188720"/>
-            <a:ext cx="4023360" cy="1691640"/>
+            <a:off x="4754880" y="1078992"/>
+            <a:ext cx="4023360" cy="1940814"/>
           </a:xfrm>
           <a:prstGeom prst="rect">
             <a:avLst/>
@@ -19287,8 +15256,8 @@
         </p:nvSpPr>
         <p:spPr>
           <a:xfrm>
-            <a:off x="4937760" y="1371600"/>
-            <a:ext cx="502920" cy="502920"/>
+            <a:off x="4919472" y="1225296"/>
+            <a:ext cx="457200" cy="457200"/>
           </a:xfrm>
           <a:prstGeom prst="ellipse">
             <a:avLst/>
@@ -19307,8 +15276,8 @@
         </p:nvSpPr>
         <p:spPr>
           <a:xfrm>
-            <a:off x="4937760" y="1371600"/>
-            <a:ext cx="502920" cy="502920"/>
+            <a:off x="4919472" y="1225296"/>
+            <a:ext cx="457200" cy="457200"/>
           </a:xfrm>
           <a:prstGeom prst="rect">
             <a:avLst/>
@@ -19324,14 +15293,14 @@
               <a:buNone/>
             </a:pPr>
             <a:r>
-              <a:rPr lang="en-US" sz="1600" dirty="0">
+              <a:rPr lang="en-US" sz="1400" dirty="0">
                 <a:solidFill>
                   <a:srgbClr val="000000"/>
                 </a:solidFill>
               </a:rPr>
               <a:t>📊</a:t>
             </a:r>
-            <a:endParaRPr lang="en-US" sz="1600" dirty="0"/>
+            <a:endParaRPr lang="en-US" sz="1400" dirty="0"/>
           </a:p>
         </p:txBody>
       </p:sp>
@@ -19343,8 +15312,8 @@
         </p:nvSpPr>
         <p:spPr>
           <a:xfrm>
-            <a:off x="5532120" y="1353312"/>
-            <a:ext cx="3108960" cy="365760"/>
+            <a:off x="5468112" y="1188720"/>
+            <a:ext cx="3218688" cy="420624"/>
           </a:xfrm>
           <a:prstGeom prst="rect">
             <a:avLst/>
@@ -19353,14 +15322,14 @@
           <a:ln/>
         </p:spPr>
         <p:txBody>
-          <a:bodyPr wrap="square" lIns="0" tIns="0" rIns="0" bIns="0" rtlCol="0" anchor="ctr"/>
+          <a:bodyPr wrap="square" lIns="0" tIns="0" rIns="0" bIns="0" rtlCol="0" anchor="t"/>
           <a:lstStyle/>
           <a:p>
             <a:pPr indent="0" marL="0">
               <a:buNone/>
             </a:pPr>
             <a:r>
-              <a:rPr lang="en-US" sz="1400" b="1" dirty="0">
+              <a:rPr lang="en-US" sz="1100" b="1" dirty="0">
                 <a:solidFill>
                   <a:srgbClr val="065A82"/>
                 </a:solidFill>
@@ -19370,7 +15339,7 @@
               </a:rPr>
               <a:t>On-Chain Atomic Compute</a:t>
             </a:r>
-            <a:endParaRPr lang="en-US" sz="1400" dirty="0"/>
+            <a:endParaRPr lang="en-US" sz="1100" dirty="0"/>
           </a:p>
         </p:txBody>
       </p:sp>
@@ -19382,8 +15351,8 @@
         </p:nvSpPr>
         <p:spPr>
           <a:xfrm>
-            <a:off x="4937760" y="1874520"/>
-            <a:ext cx="3657600" cy="914400"/>
+            <a:off x="4901184" y="1664208"/>
+            <a:ext cx="3767328" cy="1282446"/>
           </a:xfrm>
           <a:prstGeom prst="rect">
             <a:avLst/>
@@ -19392,7 +15361,7 @@
           <a:ln/>
         </p:spPr>
         <p:txBody>
-          <a:bodyPr wrap="square" rtlCol="0" anchor="t"/>
+          <a:bodyPr wrap="square" lIns="0" tIns="0" rIns="0" bIns="0" rtlCol="0" anchor="t"/>
           <a:lstStyle/>
           <a:p>
             <a:pPr marL="342900" indent="-342900">
@@ -19400,7 +15369,7 @@
               <a:buChar char="•"/>
             </a:pPr>
             <a:r>
-              <a:rPr lang="en-US" sz="1000" dirty="0">
+              <a:rPr lang="en-US" sz="750" dirty="0">
                 <a:solidFill>
                   <a:srgbClr val="1E293B"/>
                 </a:solidFill>
@@ -19410,7 +15379,7 @@
               </a:rPr>
               <a:t>Tier 1: param update + probability in single PTB</a:t>
             </a:r>
-            <a:endParaRPr lang="en-US" sz="1000" dirty="0"/>
+            <a:endParaRPr lang="en-US" sz="750" dirty="0"/>
           </a:p>
           <a:p>
             <a:pPr marL="342900" indent="-342900">
@@ -19418,7 +15387,7 @@
               <a:buChar char="•"/>
             </a:pPr>
             <a:r>
-              <a:rPr lang="en-US" sz="1000" dirty="0">
+              <a:rPr lang="en-US" sz="750" dirty="0">
                 <a:solidFill>
                   <a:srgbClr val="1E293B"/>
                 </a:solidFill>
@@ -19428,7 +15397,7 @@
               </a:rPr>
               <a:t>No Oracle-signed pricing updates, eliminates latency arb</a:t>
             </a:r>
-            <a:endParaRPr lang="en-US" sz="1000" dirty="0"/>
+            <a:endParaRPr lang="en-US" sz="750" dirty="0"/>
           </a:p>
           <a:p>
             <a:pPr marL="342900" indent="-342900">
@@ -19436,7 +15405,7 @@
               <a:buChar char="•"/>
             </a:pPr>
             <a:r>
-              <a:rPr lang="en-US" sz="1000" dirty="0">
+              <a:rPr lang="en-US" sz="750" dirty="0">
                 <a:solidFill>
                   <a:srgbClr val="1E293B"/>
                 </a:solidFill>
@@ -19446,7 +15415,7 @@
               </a:rPr>
               <a:t>LUT lookup reduces exp/erf Gas cost</a:t>
             </a:r>
-            <a:endParaRPr lang="en-US" sz="1000" dirty="0"/>
+            <a:endParaRPr lang="en-US" sz="750" dirty="0"/>
           </a:p>
         </p:txBody>
       </p:sp>
@@ -19458,8 +15427,8 @@
         </p:nvSpPr>
         <p:spPr>
           <a:xfrm>
-            <a:off x="365760" y="3063240"/>
-            <a:ext cx="4023360" cy="1691640"/>
+            <a:off x="365760" y="3092958"/>
+            <a:ext cx="4023360" cy="1940814"/>
           </a:xfrm>
           <a:prstGeom prst="rect">
             <a:avLst/>
@@ -19490,8 +15459,8 @@
         </p:nvSpPr>
         <p:spPr>
           <a:xfrm>
-            <a:off x="548640" y="3246120"/>
-            <a:ext cx="502920" cy="502920"/>
+            <a:off x="530352" y="3239262"/>
+            <a:ext cx="457200" cy="457200"/>
           </a:xfrm>
           <a:prstGeom prst="ellipse">
             <a:avLst/>
@@ -19510,8 +15479,8 @@
         </p:nvSpPr>
         <p:spPr>
           <a:xfrm>
-            <a:off x="548640" y="3246120"/>
-            <a:ext cx="502920" cy="502920"/>
+            <a:off x="530352" y="3239262"/>
+            <a:ext cx="457200" cy="457200"/>
           </a:xfrm>
           <a:prstGeom prst="rect">
             <a:avLst/>
@@ -19527,14 +15496,14 @@
               <a:buNone/>
             </a:pPr>
             <a:r>
-              <a:rPr lang="en-US" sz="1600" dirty="0">
+              <a:rPr lang="en-US" sz="1400" dirty="0">
                 <a:solidFill>
                   <a:srgbClr val="000000"/>
                 </a:solidFill>
               </a:rPr>
               <a:t>🔄</a:t>
             </a:r>
-            <a:endParaRPr lang="en-US" sz="1600" dirty="0"/>
+            <a:endParaRPr lang="en-US" sz="1400" dirty="0"/>
           </a:p>
         </p:txBody>
       </p:sp>
@@ -19546,8 +15515,8 @@
         </p:nvSpPr>
         <p:spPr>
           <a:xfrm>
-            <a:off x="1143000" y="3227832"/>
-            <a:ext cx="3108960" cy="365760"/>
+            <a:off x="1078992" y="3202686"/>
+            <a:ext cx="3218688" cy="420624"/>
           </a:xfrm>
           <a:prstGeom prst="rect">
             <a:avLst/>
@@ -19556,14 +15525,14 @@
           <a:ln/>
         </p:spPr>
         <p:txBody>
-          <a:bodyPr wrap="square" lIns="0" tIns="0" rIns="0" bIns="0" rtlCol="0" anchor="ctr"/>
+          <a:bodyPr wrap="square" lIns="0" tIns="0" rIns="0" bIns="0" rtlCol="0" anchor="t"/>
           <a:lstStyle/>
           <a:p>
             <a:pPr indent="0" marL="0">
               <a:buNone/>
             </a:pPr>
             <a:r>
-              <a:rPr lang="en-US" sz="1400" b="1" dirty="0">
+              <a:rPr lang="en-US" sz="1100" b="1" dirty="0">
                 <a:solidFill>
                   <a:srgbClr val="065A82"/>
                 </a:solidFill>
@@ -19573,7 +15542,7 @@
               </a:rPr>
               <a:t>Indexer Async Enhancement</a:t>
             </a:r>
-            <a:endParaRPr lang="en-US" sz="1400" dirty="0"/>
+            <a:endParaRPr lang="en-US" sz="1100" dirty="0"/>
           </a:p>
         </p:txBody>
       </p:sp>
@@ -19585,8 +15554,8 @@
         </p:nvSpPr>
         <p:spPr>
           <a:xfrm>
-            <a:off x="548640" y="3749040"/>
-            <a:ext cx="3657600" cy="914400"/>
+            <a:off x="512064" y="3678174"/>
+            <a:ext cx="3767328" cy="1282446"/>
           </a:xfrm>
           <a:prstGeom prst="rect">
             <a:avLst/>
@@ -19595,7 +15564,7 @@
           <a:ln/>
         </p:spPr>
         <p:txBody>
-          <a:bodyPr wrap="square" rtlCol="0" anchor="t"/>
+          <a:bodyPr wrap="square" lIns="0" tIns="0" rIns="0" bIns="0" rtlCol="0" anchor="t"/>
           <a:lstStyle/>
           <a:p>
             <a:pPr marL="342900" indent="-342900">
@@ -19603,7 +15572,7 @@
               <a:buChar char="•"/>
             </a:pPr>
             <a:r>
-              <a:rPr lang="en-US" sz="1000" dirty="0">
+              <a:rPr lang="en-US" sz="750" dirty="0">
                 <a:solidFill>
                   <a:srgbClr val="1E293B"/>
                 </a:solidFill>
@@ -19613,7 +15582,7 @@
               </a:rPr>
               <a:t>Vol Crush / IV / Vol Smile computed off-chain</a:t>
             </a:r>
-            <a:endParaRPr lang="en-US" sz="1000" dirty="0"/>
+            <a:endParaRPr lang="en-US" sz="750" dirty="0"/>
           </a:p>
           <a:p>
             <a:pPr marL="342900" indent="-342900">
@@ -19621,7 +15590,7 @@
               <a:buChar char="•"/>
             </a:pPr>
             <a:r>
-              <a:rPr lang="en-US" sz="1000" dirty="0">
+              <a:rPr lang="en-US" sz="750" dirty="0">
                 <a:solidFill>
                   <a:srgbClr val="1E293B"/>
                 </a:solidFill>
@@ -19631,7 +15600,7 @@
               </a:rPr>
               <a:t>PostgreSQL index + REST API millisecond queries</a:t>
             </a:r>
-            <a:endParaRPr lang="en-US" sz="1000" dirty="0"/>
+            <a:endParaRPr lang="en-US" sz="750" dirty="0"/>
           </a:p>
           <a:p>
             <a:pPr marL="342900" indent="-342900">
@@ -19639,7 +15608,7 @@
               <a:buChar char="•"/>
             </a:pPr>
             <a:r>
-              <a:rPr lang="en-US" sz="1000" dirty="0">
+              <a:rPr lang="en-US" sz="750" dirty="0">
                 <a:solidFill>
                   <a:srgbClr val="1E293B"/>
                 </a:solidFill>
@@ -19649,7 +15618,7 @@
               </a:rPr>
               <a:t>Doesn't block on-chain settlement path</a:t>
             </a:r>
-            <a:endParaRPr lang="en-US" sz="1000" dirty="0"/>
+            <a:endParaRPr lang="en-US" sz="750" dirty="0"/>
           </a:p>
         </p:txBody>
       </p:sp>
@@ -19661,8 +15630,8 @@
         </p:nvSpPr>
         <p:spPr>
           <a:xfrm>
-            <a:off x="4754880" y="3063240"/>
-            <a:ext cx="4023360" cy="1691640"/>
+            <a:off x="4754880" y="3092958"/>
+            <a:ext cx="4023360" cy="1940814"/>
           </a:xfrm>
           <a:prstGeom prst="rect">
             <a:avLst/>
@@ -19693,8 +15662,8 @@
         </p:nvSpPr>
         <p:spPr>
           <a:xfrm>
-            <a:off x="4937760" y="3246120"/>
-            <a:ext cx="502920" cy="502920"/>
+            <a:off x="4919472" y="3239262"/>
+            <a:ext cx="457200" cy="457200"/>
           </a:xfrm>
           <a:prstGeom prst="ellipse">
             <a:avLst/>
@@ -19713,8 +15682,8 @@
         </p:nvSpPr>
         <p:spPr>
           <a:xfrm>
-            <a:off x="4937760" y="3246120"/>
-            <a:ext cx="502920" cy="502920"/>
+            <a:off x="4919472" y="3239262"/>
+            <a:ext cx="457200" cy="457200"/>
           </a:xfrm>
           <a:prstGeom prst="rect">
             <a:avLst/>
@@ -19730,14 +15699,14 @@
               <a:buNone/>
             </a:pPr>
             <a:r>
-              <a:rPr lang="en-US" sz="1600" dirty="0">
+              <a:rPr lang="en-US" sz="1400" dirty="0">
                 <a:solidFill>
                   <a:srgbClr val="000000"/>
                 </a:solidFill>
               </a:rPr>
               <a:t>📱</a:t>
             </a:r>
-            <a:endParaRPr lang="en-US" sz="1600" dirty="0"/>
+            <a:endParaRPr lang="en-US" sz="1400" dirty="0"/>
           </a:p>
         </p:txBody>
       </p:sp>
@@ -19749,8 +15718,8 @@
         </p:nvSpPr>
         <p:spPr>
           <a:xfrm>
-            <a:off x="5532120" y="3227832"/>
-            <a:ext cx="3108960" cy="365760"/>
+            <a:off x="5468112" y="3202686"/>
+            <a:ext cx="3218688" cy="420624"/>
           </a:xfrm>
           <a:prstGeom prst="rect">
             <a:avLst/>
@@ -19759,14 +15728,14 @@
           <a:ln/>
         </p:spPr>
         <p:txBody>
-          <a:bodyPr wrap="square" lIns="0" tIns="0" rIns="0" bIns="0" rtlCol="0" anchor="ctr"/>
+          <a:bodyPr wrap="square" lIns="0" tIns="0" rIns="0" bIns="0" rtlCol="0" anchor="t"/>
           <a:lstStyle/>
           <a:p>
             <a:pPr indent="0" marL="0">
               <a:buNone/>
             </a:pPr>
             <a:r>
-              <a:rPr lang="en-US" sz="1400" b="1" dirty="0">
+              <a:rPr lang="en-US" sz="1100" b="1" dirty="0">
                 <a:solidFill>
                   <a:srgbClr val="065A82"/>
                 </a:solidFill>
@@ -19776,7 +15745,7 @@
               </a:rPr>
               <a:t>Multi-Platform Pricing Bridge</a:t>
             </a:r>
-            <a:endParaRPr lang="en-US" sz="1400" dirty="0"/>
+            <a:endParaRPr lang="en-US" sz="1100" dirty="0"/>
           </a:p>
         </p:txBody>
       </p:sp>
@@ -19788,8 +15757,8 @@
         </p:nvSpPr>
         <p:spPr>
           <a:xfrm>
-            <a:off x="4937760" y="3749040"/>
-            <a:ext cx="3657600" cy="914400"/>
+            <a:off x="4901184" y="3678174"/>
+            <a:ext cx="3767328" cy="1282446"/>
           </a:xfrm>
           <a:prstGeom prst="rect">
             <a:avLst/>
@@ -19798,7 +15767,7 @@
           <a:ln/>
         </p:spPr>
         <p:txBody>
-          <a:bodyPr wrap="square" rtlCol="0" anchor="t"/>
+          <a:bodyPr wrap="square" lIns="0" tIns="0" rIns="0" bIns="0" rtlCol="0" anchor="t"/>
           <a:lstStyle/>
           <a:p>
             <a:pPr marL="342900" indent="-342900">
@@ -19806,7 +15775,7 @@
               <a:buChar char="•"/>
             </a:pPr>
             <a:r>
-              <a:rPr lang="en-US" sz="1000" dirty="0">
+              <a:rPr lang="en-US" sz="750" dirty="0">
                 <a:solidFill>
                   <a:srgbClr val="1E293B"/>
                 </a:solidFill>
@@ -19816,7 +15785,7 @@
               </a:rPr>
               <a:t>Flutter + Rust pricing bridge for local preview</a:t>
             </a:r>
-            <a:endParaRPr lang="en-US" sz="1000" dirty="0"/>
+            <a:endParaRPr lang="en-US" sz="750" dirty="0"/>
           </a:p>
           <a:p>
             <a:pPr marL="342900" indent="-342900">
@@ -19824,7 +15793,7 @@
               <a:buChar char="•"/>
             </a:pPr>
             <a:r>
-              <a:rPr lang="en-US" sz="1000" dirty="0">
+              <a:rPr lang="en-US" sz="750" dirty="0">
                 <a:solidFill>
                   <a:srgbClr val="1E293B"/>
                 </a:solidFill>
@@ -19834,7 +15803,7 @@
               </a:rPr>
               <a:t>Aligned with math-spec, WYSIWYG quotes</a:t>
             </a:r>
-            <a:endParaRPr lang="en-US" sz="1000" dirty="0"/>
+            <a:endParaRPr lang="en-US" sz="750" dirty="0"/>
           </a:p>
           <a:p>
             <a:pPr marL="342900" indent="-342900">
@@ -19842,7 +15811,7 @@
               <a:buChar char="•"/>
             </a:pPr>
             <a:r>
-              <a:rPr lang="en-US" sz="1000" dirty="0">
+              <a:rPr lang="en-US" sz="750" dirty="0">
                 <a:solidFill>
                   <a:srgbClr val="1E293B"/>
                 </a:solidFill>
@@ -19852,7 +15821,7 @@
               </a:rPr>
               <a:t>Reduces invalid on-chain transaction submissions</a:t>
             </a:r>
-            <a:endParaRPr lang="en-US" sz="1000" dirty="0"/>
+            <a:endParaRPr lang="en-US" sz="750" dirty="0"/>
           </a:p>
         </p:txBody>
       </p:sp>
@@ -20014,8 +15983,8 @@
         </p:nvSpPr>
         <p:spPr>
           <a:xfrm>
-            <a:off x="365760" y="1188720"/>
-            <a:ext cx="4023360" cy="1691640"/>
+            <a:off x="365760" y="1078992"/>
+            <a:ext cx="4023360" cy="1940814"/>
           </a:xfrm>
           <a:prstGeom prst="rect">
             <a:avLst/>
@@ -20046,8 +16015,8 @@
         </p:nvSpPr>
         <p:spPr>
           <a:xfrm>
-            <a:off x="548640" y="1371600"/>
-            <a:ext cx="502920" cy="502920"/>
+            <a:off x="530352" y="1225296"/>
+            <a:ext cx="457200" cy="457200"/>
           </a:xfrm>
           <a:prstGeom prst="ellipse">
             <a:avLst/>
@@ -20066,8 +16035,8 @@
         </p:nvSpPr>
         <p:spPr>
           <a:xfrm>
-            <a:off x="548640" y="1371600"/>
-            <a:ext cx="502920" cy="502920"/>
+            <a:off x="530352" y="1225296"/>
+            <a:ext cx="457200" cy="457200"/>
           </a:xfrm>
           <a:prstGeom prst="rect">
             <a:avLst/>
@@ -20083,14 +16052,14 @@
               <a:buNone/>
             </a:pPr>
             <a:r>
-              <a:rPr lang="en-US" sz="1600" dirty="0">
+              <a:rPr lang="en-US" sz="1400" dirty="0">
                 <a:solidFill>
                   <a:srgbClr val="000000"/>
                 </a:solidFill>
               </a:rPr>
               <a:t>🛡</a:t>
             </a:r>
-            <a:endParaRPr lang="en-US" sz="1600" dirty="0"/>
+            <a:endParaRPr lang="en-US" sz="1400" dirty="0"/>
           </a:p>
         </p:txBody>
       </p:sp>
@@ -20102,8 +16071,8 @@
         </p:nvSpPr>
         <p:spPr>
           <a:xfrm>
-            <a:off x="1143000" y="1353312"/>
-            <a:ext cx="3108960" cy="365760"/>
+            <a:off x="1078992" y="1188720"/>
+            <a:ext cx="3218688" cy="420624"/>
           </a:xfrm>
           <a:prstGeom prst="rect">
             <a:avLst/>
@@ -20112,14 +16081,14 @@
           <a:ln/>
         </p:spPr>
         <p:txBody>
-          <a:bodyPr wrap="square" lIns="0" tIns="0" rIns="0" bIns="0" rtlCol="0" anchor="ctr"/>
+          <a:bodyPr wrap="square" lIns="0" tIns="0" rIns="0" bIns="0" rtlCol="0" anchor="t"/>
           <a:lstStyle/>
           <a:p>
             <a:pPr indent="0" marL="0">
               <a:buNone/>
             </a:pPr>
             <a:r>
-              <a:rPr lang="en-US" sz="1400" b="1" dirty="0">
+              <a:rPr lang="en-US" sz="1100" b="1" dirty="0">
                 <a:solidFill>
                   <a:srgbClr val="065A82"/>
                 </a:solidFill>
@@ -20129,7 +16098,7 @@
               </a:rPr>
               <a:t>Max-Loss Boundary</a:t>
             </a:r>
-            <a:endParaRPr lang="en-US" sz="1400" dirty="0"/>
+            <a:endParaRPr lang="en-US" sz="1100" dirty="0"/>
           </a:p>
         </p:txBody>
       </p:sp>
@@ -20141,8 +16110,8 @@
         </p:nvSpPr>
         <p:spPr>
           <a:xfrm>
-            <a:off x="548640" y="1874520"/>
-            <a:ext cx="3657600" cy="914400"/>
+            <a:off x="512064" y="1664208"/>
+            <a:ext cx="3767328" cy="1282446"/>
           </a:xfrm>
           <a:prstGeom prst="rect">
             <a:avLst/>
@@ -20151,7 +16120,7 @@
           <a:ln/>
         </p:spPr>
         <p:txBody>
-          <a:bodyPr wrap="square" rtlCol="0" anchor="t"/>
+          <a:bodyPr wrap="square" lIns="0" tIns="0" rIns="0" bIns="0" rtlCol="0" anchor="t"/>
           <a:lstStyle/>
           <a:p>
             <a:pPr marL="342900" indent="-342900">
@@ -20159,7 +16128,7 @@
               <a:buChar char="•"/>
             </a:pPr>
             <a:r>
-              <a:rPr lang="en-US" sz="1000" dirty="0">
+              <a:rPr lang="en-US" sz="750" dirty="0">
                 <a:solidFill>
                   <a:srgbClr val="1E293B"/>
                 </a:solidFill>
@@ -20169,7 +16138,7 @@
               </a:rPr>
               <a:t>Every buy_* checks worst-case payout ≤ Vault on-chain</a:t>
             </a:r>
-            <a:endParaRPr lang="en-US" sz="1000" dirty="0"/>
+            <a:endParaRPr lang="en-US" sz="750" dirty="0"/>
           </a:p>
           <a:p>
             <a:pPr marL="342900" indent="-342900">
@@ -20177,7 +16146,7 @@
               <a:buChar char="•"/>
             </a:pPr>
             <a:r>
-              <a:rPr lang="en-US" sz="1000" dirty="0">
+              <a:rPr lang="en-US" sz="750" dirty="0">
                 <a:solidFill>
                   <a:srgbClr val="1E293B"/>
                 </a:solidFill>
@@ -20187,7 +16156,7 @@
               </a:rPr>
               <a:t>Slippage Reject forcibly rejects insolvency trades</a:t>
             </a:r>
-            <a:endParaRPr lang="en-US" sz="1000" dirty="0"/>
+            <a:endParaRPr lang="en-US" sz="750" dirty="0"/>
           </a:p>
           <a:p>
             <a:pPr marL="342900" indent="-342900">
@@ -20195,7 +16164,7 @@
               <a:buChar char="•"/>
             </a:pPr>
             <a:r>
-              <a:rPr lang="en-US" sz="1000" dirty="0">
+              <a:rPr lang="en-US" sz="750" dirty="0">
                 <a:solidFill>
                   <a:srgbClr val="1E293B"/>
                 </a:solidFill>
@@ -20205,7 +16174,7 @@
               </a:rPr>
               <a:t>risk.move full path coverage</a:t>
             </a:r>
-            <a:endParaRPr lang="en-US" sz="1000" dirty="0"/>
+            <a:endParaRPr lang="en-US" sz="750" dirty="0"/>
           </a:p>
         </p:txBody>
       </p:sp>
@@ -20217,8 +16186,8 @@
         </p:nvSpPr>
         <p:spPr>
           <a:xfrm>
-            <a:off x="4754880" y="1188720"/>
-            <a:ext cx="4023360" cy="1691640"/>
+            <a:off x="4754880" y="1078992"/>
+            <a:ext cx="4023360" cy="1940814"/>
           </a:xfrm>
           <a:prstGeom prst="rect">
             <a:avLst/>
@@ -20249,8 +16218,8 @@
         </p:nvSpPr>
         <p:spPr>
           <a:xfrm>
-            <a:off x="4937760" y="1371600"/>
-            <a:ext cx="502920" cy="502920"/>
+            <a:off x="4919472" y="1225296"/>
+            <a:ext cx="457200" cy="457200"/>
           </a:xfrm>
           <a:prstGeom prst="ellipse">
             <a:avLst/>
@@ -20269,8 +16238,8 @@
         </p:nvSpPr>
         <p:spPr>
           <a:xfrm>
-            <a:off x="4937760" y="1371600"/>
-            <a:ext cx="502920" cy="502920"/>
+            <a:off x="4919472" y="1225296"/>
+            <a:ext cx="457200" cy="457200"/>
           </a:xfrm>
           <a:prstGeom prst="rect">
             <a:avLst/>
@@ -20286,14 +16255,14 @@
               <a:buNone/>
             </a:pPr>
             <a:r>
-              <a:rPr lang="en-US" sz="1600" dirty="0">
+              <a:rPr lang="en-US" sz="1400" dirty="0">
                 <a:solidFill>
                   <a:srgbClr val="000000"/>
                 </a:solidFill>
               </a:rPr>
               <a:t>⚖</a:t>
             </a:r>
-            <a:endParaRPr lang="en-US" sz="1600" dirty="0"/>
+            <a:endParaRPr lang="en-US" sz="1400" dirty="0"/>
           </a:p>
         </p:txBody>
       </p:sp>
@@ -20305,8 +16274,8 @@
         </p:nvSpPr>
         <p:spPr>
           <a:xfrm>
-            <a:off x="5532120" y="1353312"/>
-            <a:ext cx="3108960" cy="365760"/>
+            <a:off x="5468112" y="1188720"/>
+            <a:ext cx="3218688" cy="420624"/>
           </a:xfrm>
           <a:prstGeom prst="rect">
             <a:avLst/>
@@ -20315,14 +16284,14 @@
           <a:ln/>
         </p:spPr>
         <p:txBody>
-          <a:bodyPr wrap="square" lIns="0" tIns="0" rIns="0" bIns="0" rtlCol="0" anchor="ctr"/>
+          <a:bodyPr wrap="square" lIns="0" tIns="0" rIns="0" bIns="0" rtlCol="0" anchor="t"/>
           <a:lstStyle/>
           <a:p>
             <a:pPr indent="0" marL="0">
               <a:buNone/>
             </a:pPr>
             <a:r>
-              <a:rPr lang="en-US" sz="1400" b="1" dirty="0">
+              <a:rPr lang="en-US" sz="1100" b="1" dirty="0">
                 <a:solidFill>
                   <a:srgbClr val="065A82"/>
                 </a:solidFill>
@@ -20332,7 +16301,7 @@
               </a:rPr>
               <a:t>LP Guard Dynamic Defense</a:t>
             </a:r>
-            <a:endParaRPr lang="en-US" sz="1400" dirty="0"/>
+            <a:endParaRPr lang="en-US" sz="1100" dirty="0"/>
           </a:p>
         </p:txBody>
       </p:sp>
@@ -20344,8 +16313,8 @@
         </p:nvSpPr>
         <p:spPr>
           <a:xfrm>
-            <a:off x="4937760" y="1874520"/>
-            <a:ext cx="3657600" cy="914400"/>
+            <a:off x="4901184" y="1664208"/>
+            <a:ext cx="3767328" cy="1282446"/>
           </a:xfrm>
           <a:prstGeom prst="rect">
             <a:avLst/>
@@ -20354,7 +16323,7 @@
           <a:ln/>
         </p:spPr>
         <p:txBody>
-          <a:bodyPr wrap="square" rtlCol="0" anchor="t"/>
+          <a:bodyPr wrap="square" lIns="0" tIns="0" rIns="0" bIns="0" rtlCol="0" anchor="t"/>
           <a:lstStyle/>
           <a:p>
             <a:pPr marL="342900" indent="-342900">
@@ -20362,7 +16331,7 @@
               <a:buChar char="•"/>
             </a:pPr>
             <a:r>
-              <a:rPr lang="en-US" sz="1000" dirty="0">
+              <a:rPr lang="en-US" sz="750" dirty="0">
                 <a:solidFill>
                   <a:srgbClr val="1E293B"/>
                 </a:solidFill>
@@ -20372,7 +16341,7 @@
               </a:rPr>
               <a:t>Keeper monitors param drift + skewness + volume EMA</a:t>
             </a:r>
-            <a:endParaRPr lang="en-US" sz="1000" dirty="0"/>
+            <a:endParaRPr lang="en-US" sz="750" dirty="0"/>
           </a:p>
           <a:p>
             <a:pPr marL="342900" indent="-342900">
@@ -20380,7 +16349,7 @@
               <a:buChar char="•"/>
             </a:pPr>
             <a:r>
-              <a:rPr lang="en-US" sz="1000" dirty="0">
+              <a:rPr lang="en-US" sz="750" dirty="0">
                 <a:solidFill>
                   <a:srgbClr val="1E293B"/>
                 </a:solidFill>
@@ -20390,7 +16359,7 @@
               </a:rPr>
               <a:t>Effective fee up to 800 bps at max risk score</a:t>
             </a:r>
-            <a:endParaRPr lang="en-US" sz="1000" dirty="0"/>
+            <a:endParaRPr lang="en-US" sz="750" dirty="0"/>
           </a:p>
           <a:p>
             <a:pPr marL="342900" indent="-342900">
@@ -20398,7 +16367,7 @@
               <a:buChar char="•"/>
             </a:pPr>
             <a:r>
-              <a:rPr lang="en-US" sz="1000" dirty="0">
+              <a:rPr lang="en-US" sz="750" dirty="0">
                 <a:solidFill>
                   <a:srgbClr val="1E293B"/>
                 </a:solidFill>
@@ -20408,7 +16377,7 @@
               </a:rPr>
               <a:t>sigma_virtual / resolution_window time lock</a:t>
             </a:r>
-            <a:endParaRPr lang="en-US" sz="1000" dirty="0"/>
+            <a:endParaRPr lang="en-US" sz="750" dirty="0"/>
           </a:p>
         </p:txBody>
       </p:sp>
@@ -20420,8 +16389,8 @@
         </p:nvSpPr>
         <p:spPr>
           <a:xfrm>
-            <a:off x="365760" y="3063240"/>
-            <a:ext cx="4023360" cy="1691640"/>
+            <a:off x="365760" y="3092958"/>
+            <a:ext cx="4023360" cy="1940814"/>
           </a:xfrm>
           <a:prstGeom prst="rect">
             <a:avLst/>
@@ -20452,8 +16421,8 @@
         </p:nvSpPr>
         <p:spPr>
           <a:xfrm>
-            <a:off x="548640" y="3246120"/>
-            <a:ext cx="502920" cy="502920"/>
+            <a:off x="530352" y="3239262"/>
+            <a:ext cx="457200" cy="457200"/>
           </a:xfrm>
           <a:prstGeom prst="ellipse">
             <a:avLst/>
@@ -20472,8 +16441,8 @@
         </p:nvSpPr>
         <p:spPr>
           <a:xfrm>
-            <a:off x="548640" y="3246120"/>
-            <a:ext cx="502920" cy="502920"/>
+            <a:off x="530352" y="3239262"/>
+            <a:ext cx="457200" cy="457200"/>
           </a:xfrm>
           <a:prstGeom prst="rect">
             <a:avLst/>
@@ -20489,14 +16458,14 @@
               <a:buNone/>
             </a:pPr>
             <a:r>
-              <a:rPr lang="en-US" sz="1600" dirty="0">
+              <a:rPr lang="en-US" sz="1400" dirty="0">
                 <a:solidFill>
                   <a:srgbClr val="000000"/>
                 </a:solidFill>
               </a:rPr>
               <a:t>🔐</a:t>
             </a:r>
-            <a:endParaRPr lang="en-US" sz="1600" dirty="0"/>
+            <a:endParaRPr lang="en-US" sz="1400" dirty="0"/>
           </a:p>
         </p:txBody>
       </p:sp>
@@ -20508,8 +16477,8 @@
         </p:nvSpPr>
         <p:spPr>
           <a:xfrm>
-            <a:off x="1143000" y="3227832"/>
-            <a:ext cx="3108960" cy="365760"/>
+            <a:off x="1078992" y="3202686"/>
+            <a:ext cx="3218688" cy="420624"/>
           </a:xfrm>
           <a:prstGeom prst="rect">
             <a:avLst/>
@@ -20518,14 +16487,14 @@
           <a:ln/>
         </p:spPr>
         <p:txBody>
-          <a:bodyPr wrap="square" lIns="0" tIns="0" rIns="0" bIns="0" rtlCol="0" anchor="ctr"/>
+          <a:bodyPr wrap="square" lIns="0" tIns="0" rIns="0" bIns="0" rtlCol="0" anchor="t"/>
           <a:lstStyle/>
           <a:p>
             <a:pPr indent="0" marL="0">
               <a:buNone/>
             </a:pPr>
             <a:r>
-              <a:rPr lang="en-US" sz="1400" b="1" dirty="0">
+              <a:rPr lang="en-US" sz="1100" b="1" dirty="0">
                 <a:solidFill>
                   <a:srgbClr val="065A82"/>
                 </a:solidFill>
@@ -20535,7 +16504,7 @@
               </a:rPr>
               <a:t>Oracle Committee Finality</a:t>
             </a:r>
-            <a:endParaRPr lang="en-US" sz="1400" dirty="0"/>
+            <a:endParaRPr lang="en-US" sz="1100" dirty="0"/>
           </a:p>
         </p:txBody>
       </p:sp>
@@ -20547,8 +16516,8 @@
         </p:nvSpPr>
         <p:spPr>
           <a:xfrm>
-            <a:off x="548640" y="3749040"/>
-            <a:ext cx="3657600" cy="914400"/>
+            <a:off x="512064" y="3678174"/>
+            <a:ext cx="3767328" cy="1282446"/>
           </a:xfrm>
           <a:prstGeom prst="rect">
             <a:avLst/>
@@ -20557,7 +16526,7 @@
           <a:ln/>
         </p:spPr>
         <p:txBody>
-          <a:bodyPr wrap="square" rtlCol="0" anchor="t"/>
+          <a:bodyPr wrap="square" lIns="0" tIns="0" rIns="0" bIns="0" rtlCol="0" anchor="t"/>
           <a:lstStyle/>
           <a:p>
             <a:pPr marL="342900" indent="-342900">
@@ -20565,7 +16534,7 @@
               <a:buChar char="•"/>
             </a:pPr>
             <a:r>
-              <a:rPr lang="en-US" sz="1000" dirty="0">
+              <a:rPr lang="en-US" sz="750" dirty="0">
                 <a:solidFill>
                   <a:srgbClr val="1E293B"/>
                 </a:solidFill>
@@ -20575,7 +16544,7 @@
               </a:rPr>
               <a:t>Optimistic propose + dispute + multi-sig committee</a:t>
             </a:r>
-            <a:endParaRPr lang="en-US" sz="1000" dirty="0"/>
+            <a:endParaRPr lang="en-US" sz="750" dirty="0"/>
           </a:p>
           <a:p>
             <a:pPr marL="342900" indent="-342900">
@@ -20583,7 +16552,7 @@
               <a:buChar char="•"/>
             </a:pPr>
             <a:r>
-              <a:rPr lang="en-US" sz="1000" dirty="0">
+              <a:rPr lang="en-US" sz="750" dirty="0">
                 <a:solidFill>
                   <a:srgbClr val="1E293B"/>
                 </a:solidFill>
@@ -20593,7 +16562,7 @@
               </a:rPr>
               <a:t>Not admin unilateral · stake-based game theory</a:t>
             </a:r>
-            <a:endParaRPr lang="en-US" sz="1000" dirty="0"/>
+            <a:endParaRPr lang="en-US" sz="750" dirty="0"/>
           </a:p>
           <a:p>
             <a:pPr marL="342900" indent="-342900">
@@ -20601,7 +16570,7 @@
               <a:buChar char="•"/>
             </a:pPr>
             <a:r>
-              <a:rPr lang="en-US" sz="1000" dirty="0">
+              <a:rPr lang="en-US" sz="750" dirty="0">
                 <a:solidFill>
                   <a:srgbClr val="1E293B"/>
                 </a:solidFill>
@@ -20611,7 +16580,7 @@
               </a:rPr>
               <a:t>Oracle forbidden from AMM pricing params</a:t>
             </a:r>
-            <a:endParaRPr lang="en-US" sz="1000" dirty="0"/>
+            <a:endParaRPr lang="en-US" sz="750" dirty="0"/>
           </a:p>
         </p:txBody>
       </p:sp>
@@ -20623,8 +16592,8 @@
         </p:nvSpPr>
         <p:spPr>
           <a:xfrm>
-            <a:off x="4754880" y="3063240"/>
-            <a:ext cx="4023360" cy="1691640"/>
+            <a:off x="4754880" y="3092958"/>
+            <a:ext cx="4023360" cy="1940814"/>
           </a:xfrm>
           <a:prstGeom prst="rect">
             <a:avLst/>
@@ -20655,8 +16624,8 @@
         </p:nvSpPr>
         <p:spPr>
           <a:xfrm>
-            <a:off x="4937760" y="3246120"/>
-            <a:ext cx="502920" cy="502920"/>
+            <a:off x="4919472" y="3239262"/>
+            <a:ext cx="457200" cy="457200"/>
           </a:xfrm>
           <a:prstGeom prst="ellipse">
             <a:avLst/>
@@ -20675,8 +16644,8 @@
         </p:nvSpPr>
         <p:spPr>
           <a:xfrm>
-            <a:off x="4937760" y="3246120"/>
-            <a:ext cx="502920" cy="502920"/>
+            <a:off x="4919472" y="3239262"/>
+            <a:ext cx="457200" cy="457200"/>
           </a:xfrm>
           <a:prstGeom prst="rect">
             <a:avLst/>
@@ -20692,14 +16661,14 @@
               <a:buNone/>
             </a:pPr>
             <a:r>
-              <a:rPr lang="en-US" sz="1600" dirty="0">
+              <a:rPr lang="en-US" sz="1400" dirty="0">
                 <a:solidFill>
                   <a:srgbClr val="000000"/>
                 </a:solidFill>
               </a:rPr>
               <a:t>🔒</a:t>
             </a:r>
-            <a:endParaRPr lang="en-US" sz="1600" dirty="0"/>
+            <a:endParaRPr lang="en-US" sz="1400" dirty="0"/>
           </a:p>
         </p:txBody>
       </p:sp>
@@ -20711,8 +16680,8 @@
         </p:nvSpPr>
         <p:spPr>
           <a:xfrm>
-            <a:off x="5532120" y="3227832"/>
-            <a:ext cx="3108960" cy="365760"/>
+            <a:off x="5468112" y="3202686"/>
+            <a:ext cx="3218688" cy="420624"/>
           </a:xfrm>
           <a:prstGeom prst="rect">
             <a:avLst/>
@@ -20721,14 +16690,14 @@
           <a:ln/>
         </p:spPr>
         <p:txBody>
-          <a:bodyPr wrap="square" lIns="0" tIns="0" rIns="0" bIns="0" rtlCol="0" anchor="ctr"/>
+          <a:bodyPr wrap="square" lIns="0" tIns="0" rIns="0" bIns="0" rtlCol="0" anchor="t"/>
           <a:lstStyle/>
           <a:p>
             <a:pPr indent="0" marL="0">
               <a:buNone/>
             </a:pPr>
             <a:r>
-              <a:rPr lang="en-US" sz="1400" b="1" dirty="0">
+              <a:rPr lang="en-US" sz="1100" b="1" dirty="0">
                 <a:solidFill>
                   <a:srgbClr val="065A82"/>
                 </a:solidFill>
@@ -20738,7 +16707,7 @@
               </a:rPr>
               <a:t>Seal Privacy + Slash</a:t>
             </a:r>
-            <a:endParaRPr lang="en-US" sz="1400" dirty="0"/>
+            <a:endParaRPr lang="en-US" sz="1100" dirty="0"/>
           </a:p>
         </p:txBody>
       </p:sp>
@@ -20750,8 +16719,8 @@
         </p:nvSpPr>
         <p:spPr>
           <a:xfrm>
-            <a:off x="4937760" y="3749040"/>
-            <a:ext cx="3657600" cy="914400"/>
+            <a:off x="4901184" y="3678174"/>
+            <a:ext cx="3767328" cy="1282446"/>
           </a:xfrm>
           <a:prstGeom prst="rect">
             <a:avLst/>
@@ -20760,7 +16729,7 @@
           <a:ln/>
         </p:spPr>
         <p:txBody>
-          <a:bodyPr wrap="square" rtlCol="0" anchor="t"/>
+          <a:bodyPr wrap="square" lIns="0" tIns="0" rIns="0" bIns="0" rtlCol="0" anchor="t"/>
           <a:lstStyle/>
           <a:p>
             <a:pPr marL="342900" indent="-342900">
@@ -20768,7 +16737,7 @@
               <a:buChar char="•"/>
             </a:pPr>
             <a:r>
-              <a:rPr lang="en-US" sz="1000" dirty="0">
+              <a:rPr lang="en-US" sz="750" dirty="0">
                 <a:solidFill>
                   <a:srgbClr val="1E293B"/>
                 </a:solidFill>
@@ -20778,7 +16747,7 @@
               </a:rPr>
               <a:t>Seal OR policy: paid instant / post-expiry public</a:t>
             </a:r>
-            <a:endParaRPr lang="en-US" sz="1000" dirty="0"/>
+            <a:endParaRPr lang="en-US" sz="750" dirty="0"/>
           </a:p>
           <a:p>
             <a:pPr marL="342900" indent="-342900">
@@ -20786,7 +16755,7 @@
               <a:buChar char="•"/>
             </a:pPr>
             <a:r>
-              <a:rPr lang="en-US" sz="1000" dirty="0">
+              <a:rPr lang="en-US" sz="750" dirty="0">
                 <a:solidFill>
                   <a:srgbClr val="1E293B"/>
                 </a:solidFill>
@@ -20796,7 +16765,7 @@
               </a:rPr>
               <a:t>Slash governance timelock + multi-sig execution</a:t>
             </a:r>
-            <a:endParaRPr lang="en-US" sz="1000" dirty="0"/>
+            <a:endParaRPr lang="en-US" sz="750" dirty="0"/>
           </a:p>
           <a:p>
             <a:pPr marL="342900" indent="-342900">
@@ -20804,7 +16773,7 @@
               <a:buChar char="•"/>
             </a:pPr>
             <a:r>
-              <a:rPr lang="en-US" sz="1000" dirty="0">
+              <a:rPr lang="en-US" sz="750" dirty="0">
                 <a:solidFill>
                   <a:srgbClr val="1E293B"/>
                 </a:solidFill>
@@ -20814,7 +16783,7 @@
               </a:rPr>
               <a:t>ZK attestation cold path: 3600s challenge window + delayed finalize (non-blocking)</a:t>
             </a:r>
-            <a:endParaRPr lang="en-US" sz="1000" dirty="0"/>
+            <a:endParaRPr lang="en-US" sz="750" dirty="0"/>
           </a:p>
         </p:txBody>
       </p:sp>
@@ -20976,8 +16945,8 @@
         </p:nvSpPr>
         <p:spPr>
           <a:xfrm>
-            <a:off x="365760" y="1188720"/>
-            <a:ext cx="4023360" cy="1691640"/>
+            <a:off x="365760" y="1078992"/>
+            <a:ext cx="4023360" cy="1940814"/>
           </a:xfrm>
           <a:prstGeom prst="rect">
             <a:avLst/>
@@ -21008,8 +16977,8 @@
         </p:nvSpPr>
         <p:spPr>
           <a:xfrm>
-            <a:off x="548640" y="1371600"/>
-            <a:ext cx="502920" cy="502920"/>
+            <a:off x="530352" y="1225296"/>
+            <a:ext cx="457200" cy="457200"/>
           </a:xfrm>
           <a:prstGeom prst="ellipse">
             <a:avLst/>
@@ -21028,8 +16997,8 @@
         </p:nvSpPr>
         <p:spPr>
           <a:xfrm>
-            <a:off x="548640" y="1371600"/>
-            <a:ext cx="502920" cy="502920"/>
+            <a:off x="530352" y="1225296"/>
+            <a:ext cx="457200" cy="457200"/>
           </a:xfrm>
           <a:prstGeom prst="rect">
             <a:avLst/>
@@ -21045,14 +17014,14 @@
               <a:buNone/>
             </a:pPr>
             <a:r>
-              <a:rPr lang="en-US" sz="1600" dirty="0">
+              <a:rPr lang="en-US" sz="1400" dirty="0">
                 <a:solidFill>
                   <a:srgbClr val="000000"/>
                 </a:solidFill>
               </a:rPr>
               <a:t>📡</a:t>
             </a:r>
-            <a:endParaRPr lang="en-US" sz="1600" dirty="0"/>
+            <a:endParaRPr lang="en-US" sz="1400" dirty="0"/>
           </a:p>
         </p:txBody>
       </p:sp>
@@ -21064,8 +17033,8 @@
         </p:nvSpPr>
         <p:spPr>
           <a:xfrm>
-            <a:off x="1143000" y="1353312"/>
-            <a:ext cx="3108960" cy="365760"/>
+            <a:off x="1078992" y="1188720"/>
+            <a:ext cx="3218688" cy="420624"/>
           </a:xfrm>
           <a:prstGeom prst="rect">
             <a:avLst/>
@@ -21074,14 +17043,14 @@
           <a:ln/>
         </p:spPr>
         <p:txBody>
-          <a:bodyPr wrap="square" lIns="0" tIns="0" rIns="0" bIns="0" rtlCol="0" anchor="ctr"/>
+          <a:bodyPr wrap="square" lIns="0" tIns="0" rIns="0" bIns="0" rtlCol="0" anchor="t"/>
           <a:lstStyle/>
           <a:p>
             <a:pPr indent="0" marL="0">
               <a:buNone/>
             </a:pPr>
             <a:r>
-              <a:rPr lang="en-US" sz="1400" b="1" dirty="0">
+              <a:rPr lang="en-US" sz="1100" b="1" dirty="0">
                 <a:solidFill>
                   <a:srgbClr val="065A82"/>
                 </a:solidFill>
@@ -21091,7 +17060,7 @@
               </a:rPr>
               <a:t>Unified Settlement Truth</a:t>
             </a:r>
-            <a:endParaRPr lang="en-US" sz="1400" dirty="0"/>
+            <a:endParaRPr lang="en-US" sz="1100" dirty="0"/>
           </a:p>
         </p:txBody>
       </p:sp>
@@ -21103,8 +17072,8 @@
         </p:nvSpPr>
         <p:spPr>
           <a:xfrm>
-            <a:off x="548640" y="1874520"/>
-            <a:ext cx="3657600" cy="914400"/>
+            <a:off x="512064" y="1664208"/>
+            <a:ext cx="3767328" cy="1282446"/>
           </a:xfrm>
           <a:prstGeom prst="rect">
             <a:avLst/>
@@ -21113,7 +17082,7 @@
           <a:ln/>
         </p:spPr>
         <p:txBody>
-          <a:bodyPr wrap="square" rtlCol="0" anchor="t"/>
+          <a:bodyPr wrap="square" lIns="0" tIns="0" rIns="0" bIns="0" rtlCol="0" anchor="t"/>
           <a:lstStyle/>
           <a:p>
             <a:pPr marL="342900" indent="-342900">
@@ -21121,7 +17090,7 @@
               <a:buChar char="•"/>
             </a:pPr>
             <a:r>
-              <a:rPr lang="en-US" sz="1000" dirty="0">
+              <a:rPr lang="en-US" sz="750" dirty="0">
                 <a:solidFill>
                   <a:srgbClr val="1E293B"/>
                 </a:solidFill>
@@ -21131,7 +17100,7 @@
               </a:rPr>
               <a:t>macro_oracle + oracle_arbitrator single source for all products</a:t>
             </a:r>
-            <a:endParaRPr lang="en-US" sz="1000" dirty="0"/>
+            <a:endParaRPr lang="en-US" sz="750" dirty="0"/>
           </a:p>
           <a:p>
             <a:pPr marL="342900" indent="-342900">
@@ -21139,7 +17108,7 @@
               <a:buChar char="•"/>
             </a:pPr>
             <a:r>
-              <a:rPr lang="en-US" sz="1000" dirty="0">
+              <a:rPr lang="en-US" sz="750" dirty="0">
                 <a:solidFill>
                   <a:srgbClr val="1E293B"/>
                 </a:solidFill>
@@ -21149,7 +17118,7 @@
               </a:rPr>
               <a:t>Same DataFeed → trading claim + Prophet audit</a:t>
             </a:r>
-            <a:endParaRPr lang="en-US" sz="1000" dirty="0"/>
+            <a:endParaRPr lang="en-US" sz="750" dirty="0"/>
           </a:p>
           <a:p>
             <a:pPr marL="342900" indent="-342900">
@@ -21157,7 +17126,7 @@
               <a:buChar char="•"/>
             </a:pPr>
             <a:r>
-              <a:rPr lang="en-US" sz="1000" dirty="0">
+              <a:rPr lang="en-US" sz="750" dirty="0">
                 <a:solidFill>
                   <a:srgbClr val="1E293B"/>
                 </a:solidFill>
@@ -21167,7 +17136,7 @@
               </a:rPr>
               <a:t>Feed auto-register, no hardcoded frontend env</a:t>
             </a:r>
-            <a:endParaRPr lang="en-US" sz="1000" dirty="0"/>
+            <a:endParaRPr lang="en-US" sz="750" dirty="0"/>
           </a:p>
         </p:txBody>
       </p:sp>
@@ -21179,8 +17148,8 @@
         </p:nvSpPr>
         <p:spPr>
           <a:xfrm>
-            <a:off x="4754880" y="1188720"/>
-            <a:ext cx="4023360" cy="1691640"/>
+            <a:off x="4754880" y="1078992"/>
+            <a:ext cx="4023360" cy="1940814"/>
           </a:xfrm>
           <a:prstGeom prst="rect">
             <a:avLst/>
@@ -21211,8 +17180,8 @@
         </p:nvSpPr>
         <p:spPr>
           <a:xfrm>
-            <a:off x="4937760" y="1371600"/>
-            <a:ext cx="502920" cy="502920"/>
+            <a:off x="4919472" y="1225296"/>
+            <a:ext cx="457200" cy="457200"/>
           </a:xfrm>
           <a:prstGeom prst="ellipse">
             <a:avLst/>
@@ -21231,8 +17200,8 @@
         </p:nvSpPr>
         <p:spPr>
           <a:xfrm>
-            <a:off x="4937760" y="1371600"/>
-            <a:ext cx="502920" cy="502920"/>
+            <a:off x="4919472" y="1225296"/>
+            <a:ext cx="457200" cy="457200"/>
           </a:xfrm>
           <a:prstGeom prst="rect">
             <a:avLst/>
@@ -21248,14 +17217,14 @@
               <a:buNone/>
             </a:pPr>
             <a:r>
-              <a:rPr lang="en-US" sz="1600" dirty="0">
+              <a:rPr lang="en-US" sz="1400" dirty="0">
                 <a:solidFill>
                   <a:srgbClr val="000000"/>
                 </a:solidFill>
               </a:rPr>
               <a:t>🔁</a:t>
             </a:r>
-            <a:endParaRPr lang="en-US" sz="1600" dirty="0"/>
+            <a:endParaRPr lang="en-US" sz="1400" dirty="0"/>
           </a:p>
         </p:txBody>
       </p:sp>
@@ -21267,8 +17236,8 @@
         </p:nvSpPr>
         <p:spPr>
           <a:xfrm>
-            <a:off x="5532120" y="1353312"/>
-            <a:ext cx="3108960" cy="365760"/>
+            <a:off x="5468112" y="1188720"/>
+            <a:ext cx="3218688" cy="420624"/>
           </a:xfrm>
           <a:prstGeom prst="rect">
             <a:avLst/>
@@ -21277,14 +17246,14 @@
           <a:ln/>
         </p:spPr>
         <p:txBody>
-          <a:bodyPr wrap="square" lIns="0" tIns="0" rIns="0" bIns="0" rtlCol="0" anchor="ctr"/>
+          <a:bodyPr wrap="square" lIns="0" tIns="0" rIns="0" bIns="0" rtlCol="0" anchor="t"/>
           <a:lstStyle/>
           <a:p>
             <a:pPr indent="0" marL="0">
               <a:buNone/>
             </a:pPr>
             <a:r>
-              <a:rPr lang="en-US" sz="1400" b="1" dirty="0">
+              <a:rPr lang="en-US" sz="1100" b="1" dirty="0">
                 <a:solidFill>
                   <a:srgbClr val="065A82"/>
                 </a:solidFill>
@@ -21294,7 +17263,7 @@
               </a:rPr>
               <a:t>Market State Machine</a:t>
             </a:r>
-            <a:endParaRPr lang="en-US" sz="1400" dirty="0"/>
+            <a:endParaRPr lang="en-US" sz="1100" dirty="0"/>
           </a:p>
         </p:txBody>
       </p:sp>
@@ -21306,8 +17275,8 @@
         </p:nvSpPr>
         <p:spPr>
           <a:xfrm>
-            <a:off x="4937760" y="1874520"/>
-            <a:ext cx="3657600" cy="914400"/>
+            <a:off x="4901184" y="1664208"/>
+            <a:ext cx="3767328" cy="1282446"/>
           </a:xfrm>
           <a:prstGeom prst="rect">
             <a:avLst/>
@@ -21316,7 +17285,7 @@
           <a:ln/>
         </p:spPr>
         <p:txBody>
-          <a:bodyPr wrap="square" rtlCol="0" anchor="t"/>
+          <a:bodyPr wrap="square" lIns="0" tIns="0" rIns="0" bIns="0" rtlCol="0" anchor="t"/>
           <a:lstStyle/>
           <a:p>
             <a:pPr marL="342900" indent="-342900">
@@ -21324,7 +17293,7 @@
               <a:buChar char="•"/>
             </a:pPr>
             <a:r>
-              <a:rPr lang="en-US" sz="1000" dirty="0">
+              <a:rPr lang="en-US" sz="750" dirty="0">
                 <a:solidFill>
                   <a:srgbClr val="1E293B"/>
                 </a:solidFill>
@@ -21334,7 +17303,7 @@
               </a:rPr>
               <a:t>Auction → Trading → Settled strict transitions</a:t>
             </a:r>
-            <a:endParaRPr lang="en-US" sz="1000" dirty="0"/>
+            <a:endParaRPr lang="en-US" sz="750" dirty="0"/>
           </a:p>
           <a:p>
             <a:pPr marL="342900" indent="-342900">
@@ -21342,7 +17311,7 @@
               <a:buChar char="•"/>
             </a:pPr>
             <a:r>
-              <a:rPr lang="en-US" sz="1000" dirty="0">
+              <a:rPr lang="en-US" sz="750" dirty="0">
                 <a:solidFill>
                   <a:srgbClr val="1E293B"/>
                 </a:solidFill>
@@ -21352,7 +17321,7 @@
               </a:rPr>
               <a:t>resolution_window blocks buy_* near expiry</a:t>
             </a:r>
-            <a:endParaRPr lang="en-US" sz="1000" dirty="0"/>
+            <a:endParaRPr lang="en-US" sz="750" dirty="0"/>
           </a:p>
           <a:p>
             <a:pPr marL="342900" indent="-342900">
@@ -21360,7 +17329,7 @@
               <a:buChar char="•"/>
             </a:pPr>
             <a:r>
-              <a:rPr lang="en-US" sz="1000" dirty="0">
+              <a:rPr lang="en-US" sz="750" dirty="0">
                 <a:solidFill>
                   <a:srgbClr val="1E293B"/>
                 </a:solidFill>
@@ -21370,7 +17339,7 @@
               </a:rPr>
               <a:t>paused emergency halt + drill documentation</a:t>
             </a:r>
-            <a:endParaRPr lang="en-US" sz="1000" dirty="0"/>
+            <a:endParaRPr lang="en-US" sz="750" dirty="0"/>
           </a:p>
         </p:txBody>
       </p:sp>
@@ -21382,8 +17351,8 @@
         </p:nvSpPr>
         <p:spPr>
           <a:xfrm>
-            <a:off x="365760" y="3063240"/>
-            <a:ext cx="4023360" cy="1691640"/>
+            <a:off x="365760" y="3092958"/>
+            <a:ext cx="4023360" cy="1940814"/>
           </a:xfrm>
           <a:prstGeom prst="rect">
             <a:avLst/>
@@ -21414,8 +17383,8 @@
         </p:nvSpPr>
         <p:spPr>
           <a:xfrm>
-            <a:off x="548640" y="3246120"/>
-            <a:ext cx="502920" cy="502920"/>
+            <a:off x="530352" y="3239262"/>
+            <a:ext cx="457200" cy="457200"/>
           </a:xfrm>
           <a:prstGeom prst="ellipse">
             <a:avLst/>
@@ -21434,8 +17403,8 @@
         </p:nvSpPr>
         <p:spPr>
           <a:xfrm>
-            <a:off x="548640" y="3246120"/>
-            <a:ext cx="502920" cy="502920"/>
+            <a:off x="530352" y="3239262"/>
+            <a:ext cx="457200" cy="457200"/>
           </a:xfrm>
           <a:prstGeom prst="rect">
             <a:avLst/>
@@ -21451,14 +17420,14 @@
               <a:buNone/>
             </a:pPr>
             <a:r>
-              <a:rPr lang="en-US" sz="1600" dirty="0">
+              <a:rPr lang="en-US" sz="1400" dirty="0">
                 <a:solidFill>
                   <a:srgbClr val="000000"/>
                 </a:solidFill>
               </a:rPr>
               <a:t>🏗</a:t>
             </a:r>
-            <a:endParaRPr lang="en-US" sz="1600" dirty="0"/>
+            <a:endParaRPr lang="en-US" sz="1400" dirty="0"/>
           </a:p>
         </p:txBody>
       </p:sp>
@@ -21470,8 +17439,8 @@
         </p:nvSpPr>
         <p:spPr>
           <a:xfrm>
-            <a:off x="1143000" y="3227832"/>
-            <a:ext cx="3108960" cy="365760"/>
+            <a:off x="1078992" y="3202686"/>
+            <a:ext cx="3218688" cy="420624"/>
           </a:xfrm>
           <a:prstGeom prst="rect">
             <a:avLst/>
@@ -21480,14 +17449,14 @@
           <a:ln/>
         </p:spPr>
         <p:txBody>
-          <a:bodyPr wrap="square" lIns="0" tIns="0" rIns="0" bIns="0" rtlCol="0" anchor="ctr"/>
+          <a:bodyPr wrap="square" lIns="0" tIns="0" rIns="0" bIns="0" rtlCol="0" anchor="t"/>
           <a:lstStyle/>
           <a:p>
             <a:pPr indent="0" marL="0">
               <a:buNone/>
             </a:pPr>
             <a:r>
-              <a:rPr lang="en-US" sz="1400" b="1" dirty="0">
+              <a:rPr lang="en-US" sz="1100" b="1" dirty="0">
                 <a:solidFill>
                   <a:srgbClr val="065A82"/>
                 </a:solidFill>
@@ -21497,7 +17466,7 @@
               </a:rPr>
               <a:t>Off-Chain Service Matrix</a:t>
             </a:r>
-            <a:endParaRPr lang="en-US" sz="1400" dirty="0"/>
+            <a:endParaRPr lang="en-US" sz="1100" dirty="0"/>
           </a:p>
         </p:txBody>
       </p:sp>
@@ -21509,8 +17478,8 @@
         </p:nvSpPr>
         <p:spPr>
           <a:xfrm>
-            <a:off x="548640" y="3749040"/>
-            <a:ext cx="3657600" cy="914400"/>
+            <a:off x="512064" y="3678174"/>
+            <a:ext cx="3767328" cy="1282446"/>
           </a:xfrm>
           <a:prstGeom prst="rect">
             <a:avLst/>
@@ -21519,7 +17488,7 @@
           <a:ln/>
         </p:spPr>
         <p:txBody>
-          <a:bodyPr wrap="square" rtlCol="0" anchor="t"/>
+          <a:bodyPr wrap="square" lIns="0" tIns="0" rIns="0" bIns="0" rtlCol="0" anchor="t"/>
           <a:lstStyle/>
           <a:p>
             <a:pPr marL="342900" indent="-342900">
@@ -21527,7 +17496,7 @@
               <a:buChar char="•"/>
             </a:pPr>
             <a:r>
-              <a:rPr lang="en-US" sz="1000" dirty="0">
+              <a:rPr lang="en-US" sz="750" dirty="0">
                 <a:solidFill>
                   <a:srgbClr val="1E293B"/>
                 </a:solidFill>
@@ -21537,7 +17506,7 @@
               </a:rPr>
               <a:t>LP Guard · Oracle Relayer · Walrus Relay</a:t>
             </a:r>
-            <a:endParaRPr lang="en-US" sz="1000" dirty="0"/>
+            <a:endParaRPr lang="en-US" sz="750" dirty="0"/>
           </a:p>
           <a:p>
             <a:pPr marL="342900" indent="-342900">
@@ -21545,7 +17514,7 @@
               <a:buChar char="•"/>
             </a:pPr>
             <a:r>
-              <a:rPr lang="en-US" sz="1000" dirty="0">
+              <a:rPr lang="en-US" sz="750" dirty="0">
                 <a:solidFill>
                   <a:srgbClr val="1E293B"/>
                 </a:solidFill>
@@ -21555,7 +17524,7 @@
               </a:rPr>
               <a:t>Prophet Audit Keeper · Chain Monitor</a:t>
             </a:r>
-            <a:endParaRPr lang="en-US" sz="1000" dirty="0"/>
+            <a:endParaRPr lang="en-US" sz="750" dirty="0"/>
           </a:p>
           <a:p>
             <a:pPr marL="342900" indent="-342900">
@@ -21563,7 +17532,7 @@
               <a:buChar char="•"/>
             </a:pPr>
             <a:r>
-              <a:rPr lang="en-US" sz="1000" dirty="0">
+              <a:rPr lang="en-US" sz="750" dirty="0">
                 <a:solidFill>
                   <a:srgbClr val="1E293B"/>
                 </a:solidFill>
@@ -21573,7 +17542,7 @@
               </a:rPr>
               <a:t>Docker orchestration + health check scripts</a:t>
             </a:r>
-            <a:endParaRPr lang="en-US" sz="1000" dirty="0"/>
+            <a:endParaRPr lang="en-US" sz="750" dirty="0"/>
           </a:p>
         </p:txBody>
       </p:sp>
@@ -21585,8 +17554,8 @@
         </p:nvSpPr>
         <p:spPr>
           <a:xfrm>
-            <a:off x="4754880" y="3063240"/>
-            <a:ext cx="4023360" cy="1691640"/>
+            <a:off x="4754880" y="3092958"/>
+            <a:ext cx="4023360" cy="1940814"/>
           </a:xfrm>
           <a:prstGeom prst="rect">
             <a:avLst/>
@@ -21617,8 +17586,8 @@
         </p:nvSpPr>
         <p:spPr>
           <a:xfrm>
-            <a:off x="4937760" y="3246120"/>
-            <a:ext cx="502920" cy="502920"/>
+            <a:off x="4919472" y="3239262"/>
+            <a:ext cx="457200" cy="457200"/>
           </a:xfrm>
           <a:prstGeom prst="ellipse">
             <a:avLst/>
@@ -21637,8 +17606,8 @@
         </p:nvSpPr>
         <p:spPr>
           <a:xfrm>
-            <a:off x="4937760" y="3246120"/>
-            <a:ext cx="502920" cy="502920"/>
+            <a:off x="4919472" y="3239262"/>
+            <a:ext cx="457200" cy="457200"/>
           </a:xfrm>
           <a:prstGeom prst="rect">
             <a:avLst/>
@@ -21654,14 +17623,14 @@
               <a:buNone/>
             </a:pPr>
             <a:r>
-              <a:rPr lang="en-US" sz="1600" dirty="0">
+              <a:rPr lang="en-US" sz="1400" dirty="0">
                 <a:solidFill>
                   <a:srgbClr val="000000"/>
                 </a:solidFill>
               </a:rPr>
               <a:t>✅</a:t>
             </a:r>
-            <a:endParaRPr lang="en-US" sz="1600" dirty="0"/>
+            <a:endParaRPr lang="en-US" sz="1400" dirty="0"/>
           </a:p>
         </p:txBody>
       </p:sp>
@@ -21673,8 +17642,8 @@
         </p:nvSpPr>
         <p:spPr>
           <a:xfrm>
-            <a:off x="5532120" y="3227832"/>
-            <a:ext cx="3108960" cy="365760"/>
+            <a:off x="5468112" y="3202686"/>
+            <a:ext cx="3218688" cy="420624"/>
           </a:xfrm>
           <a:prstGeom prst="rect">
             <a:avLst/>
@@ -21683,14 +17652,14 @@
           <a:ln/>
         </p:spPr>
         <p:txBody>
-          <a:bodyPr wrap="square" lIns="0" tIns="0" rIns="0" bIns="0" rtlCol="0" anchor="ctr"/>
+          <a:bodyPr wrap="square" lIns="0" tIns="0" rIns="0" bIns="0" rtlCol="0" anchor="t"/>
           <a:lstStyle/>
           <a:p>
             <a:pPr indent="0" marL="0">
               <a:buNone/>
             </a:pPr>
             <a:r>
-              <a:rPr lang="en-US" sz="1400" b="1" dirty="0">
+              <a:rPr lang="en-US" sz="1100" b="1" dirty="0">
                 <a:solidFill>
                   <a:srgbClr val="065A82"/>
                 </a:solidFill>
@@ -21700,7 +17669,7 @@
               </a:rPr>
               <a:t>Mainnet Readiness System</a:t>
             </a:r>
-            <a:endParaRPr lang="en-US" sz="1400" dirty="0"/>
+            <a:endParaRPr lang="en-US" sz="1100" dirty="0"/>
           </a:p>
         </p:txBody>
       </p:sp>
@@ -21712,8 +17681,8 @@
         </p:nvSpPr>
         <p:spPr>
           <a:xfrm>
-            <a:off x="4937760" y="3749040"/>
-            <a:ext cx="3657600" cy="914400"/>
+            <a:off x="4901184" y="3678174"/>
+            <a:ext cx="3767328" cy="1282446"/>
           </a:xfrm>
           <a:prstGeom prst="rect">
             <a:avLst/>
@@ -21722,7 +17691,7 @@
           <a:ln/>
         </p:spPr>
         <p:txBody>
-          <a:bodyPr wrap="square" rtlCol="0" anchor="t"/>
+          <a:bodyPr wrap="square" lIns="0" tIns="0" rIns="0" bIns="0" rtlCol="0" anchor="t"/>
           <a:lstStyle/>
           <a:p>
             <a:pPr marL="342900" indent="-342900">
@@ -21730,7 +17699,7 @@
               <a:buChar char="•"/>
             </a:pPr>
             <a:r>
-              <a:rPr lang="en-US" sz="1000" dirty="0">
+              <a:rPr lang="en-US" sz="750" dirty="0">
                 <a:solidFill>
                   <a:srgbClr val="1E293B"/>
                 </a:solidFill>
@@ -21740,7 +17709,7 @@
               </a:rPr>
               <a:t>mainnet-readiness-checklist executable steps</a:t>
             </a:r>
-            <a:endParaRPr lang="en-US" sz="1000" dirty="0"/>
+            <a:endParaRPr lang="en-US" sz="750" dirty="0"/>
           </a:p>
           <a:p>
             <a:pPr marL="342900" indent="-342900">
@@ -21748,7 +17717,7 @@
               <a:buChar char="•"/>
             </a:pPr>
             <a:r>
-              <a:rPr lang="en-US" sz="1000" dirty="0">
+              <a:rPr lang="en-US" sz="750" dirty="0">
                 <a:solidFill>
                   <a:srgbClr val="1E293B"/>
                 </a:solidFill>
@@ -21758,7 +17727,7 @@
               </a:rPr>
               <a:t>Governance params sign-off + emergency drill templates</a:t>
             </a:r>
-            <a:endParaRPr lang="en-US" sz="1000" dirty="0"/>
+            <a:endParaRPr lang="en-US" sz="750" dirty="0"/>
           </a:p>
           <a:p>
             <a:pPr marL="342900" indent="-342900">
@@ -21766,7 +17735,7 @@
               <a:buChar char="•"/>
             </a:pPr>
             <a:r>
-              <a:rPr lang="en-US" sz="1000" dirty="0">
+              <a:rPr lang="en-US" sz="750" dirty="0">
                 <a:solidFill>
                   <a:srgbClr val="1E293B"/>
                 </a:solidFill>
@@ -21776,7 +17745,7 @@
               </a:rPr>
               <a:t>sui move test full module coverage</a:t>
             </a:r>
-            <a:endParaRPr lang="en-US" sz="1000" dirty="0"/>
+            <a:endParaRPr lang="en-US" sz="750" dirty="0"/>
           </a:p>
         </p:txBody>
       </p:sp>
